--- a/koreatech-db/weeks/12주차_웹과_DB_연동_1_조회.pptx
+++ b/koreatech-db/weeks/12주차_웹과_DB_연동_1_조회.pptx
@@ -4592,9 +4592,9 @@
                 <a:solidFill>
                   <a:srgbClr val="7A869C"/>
                 </a:solidFill>
-                <a:latin typeface="나눔고딕코딩"/>
-                <a:ea typeface="나눔고딕코딩"/>
-                <a:cs typeface="나눔고딕코딩"/>
+                <a:latin typeface="D2Coding"/>
+                <a:ea typeface="D2Coding"/>
+                <a:cs typeface="D2Coding"/>
               </a:rPr>
               <a:t>1</a:t>
             </a:r>
@@ -4610,9 +4610,9 @@
                 <a:solidFill>
                   <a:srgbClr val="7A869C"/>
                 </a:solidFill>
-                <a:latin typeface="나눔고딕코딩"/>
-                <a:ea typeface="나눔고딕코딩"/>
-                <a:cs typeface="나눔고딕코딩"/>
+                <a:latin typeface="D2Coding"/>
+                <a:ea typeface="D2Coding"/>
+                <a:cs typeface="D2Coding"/>
               </a:rPr>
               <a:t>2</a:t>
             </a:r>
@@ -4628,9 +4628,9 @@
                 <a:solidFill>
                   <a:srgbClr val="7A869C"/>
                 </a:solidFill>
-                <a:latin typeface="나눔고딕코딩"/>
-                <a:ea typeface="나눔고딕코딩"/>
-                <a:cs typeface="나눔고딕코딩"/>
+                <a:latin typeface="D2Coding"/>
+                <a:ea typeface="D2Coding"/>
+                <a:cs typeface="D2Coding"/>
               </a:rPr>
               <a:t>3</a:t>
             </a:r>
@@ -4646,9 +4646,9 @@
                 <a:solidFill>
                   <a:srgbClr val="7A869C"/>
                 </a:solidFill>
-                <a:latin typeface="나눔고딕코딩"/>
-                <a:ea typeface="나눔고딕코딩"/>
-                <a:cs typeface="나눔고딕코딩"/>
+                <a:latin typeface="D2Coding"/>
+                <a:ea typeface="D2Coding"/>
+                <a:cs typeface="D2Coding"/>
               </a:rPr>
               <a:t>4</a:t>
             </a:r>
@@ -4664,9 +4664,9 @@
                 <a:solidFill>
                   <a:srgbClr val="7A869C"/>
                 </a:solidFill>
-                <a:latin typeface="나눔고딕코딩"/>
-                <a:ea typeface="나눔고딕코딩"/>
-                <a:cs typeface="나눔고딕코딩"/>
+                <a:latin typeface="D2Coding"/>
+                <a:ea typeface="D2Coding"/>
+                <a:cs typeface="D2Coding"/>
               </a:rPr>
               <a:t>5</a:t>
             </a:r>
@@ -4682,9 +4682,9 @@
                 <a:solidFill>
                   <a:srgbClr val="7A869C"/>
                 </a:solidFill>
-                <a:latin typeface="나눔고딕코딩"/>
-                <a:ea typeface="나눔고딕코딩"/>
-                <a:cs typeface="나눔고딕코딩"/>
+                <a:latin typeface="D2Coding"/>
+                <a:ea typeface="D2Coding"/>
+                <a:cs typeface="D2Coding"/>
               </a:rPr>
               <a:t>6</a:t>
             </a:r>
@@ -4700,9 +4700,9 @@
                 <a:solidFill>
                   <a:srgbClr val="7A869C"/>
                 </a:solidFill>
-                <a:latin typeface="나눔고딕코딩"/>
-                <a:ea typeface="나눔고딕코딩"/>
-                <a:cs typeface="나눔고딕코딩"/>
+                <a:latin typeface="D2Coding"/>
+                <a:ea typeface="D2Coding"/>
+                <a:cs typeface="D2Coding"/>
               </a:rPr>
               <a:t>7</a:t>
             </a:r>
@@ -4718,9 +4718,9 @@
                 <a:solidFill>
                   <a:srgbClr val="7A869C"/>
                 </a:solidFill>
-                <a:latin typeface="나눔고딕코딩"/>
-                <a:ea typeface="나눔고딕코딩"/>
-                <a:cs typeface="나눔고딕코딩"/>
+                <a:latin typeface="D2Coding"/>
+                <a:ea typeface="D2Coding"/>
+                <a:cs typeface="D2Coding"/>
               </a:rPr>
               <a:t>8</a:t>
             </a:r>
@@ -4736,9 +4736,9 @@
                 <a:solidFill>
                   <a:srgbClr val="7A869C"/>
                 </a:solidFill>
-                <a:latin typeface="나눔고딕코딩"/>
-                <a:ea typeface="나눔고딕코딩"/>
-                <a:cs typeface="나눔고딕코딩"/>
+                <a:latin typeface="D2Coding"/>
+                <a:ea typeface="D2Coding"/>
+                <a:cs typeface="D2Coding"/>
               </a:rPr>
               <a:t>9</a:t>
             </a:r>
@@ -4754,9 +4754,9 @@
                 <a:solidFill>
                   <a:srgbClr val="7A869C"/>
                 </a:solidFill>
-                <a:latin typeface="나눔고딕코딩"/>
-                <a:ea typeface="나눔고딕코딩"/>
-                <a:cs typeface="나눔고딕코딩"/>
+                <a:latin typeface="D2Coding"/>
+                <a:ea typeface="D2Coding"/>
+                <a:cs typeface="D2Coding"/>
               </a:rPr>
               <a:t>10</a:t>
             </a:r>
@@ -4772,9 +4772,9 @@
                 <a:solidFill>
                   <a:srgbClr val="7A869C"/>
                 </a:solidFill>
-                <a:latin typeface="나눔고딕코딩"/>
-                <a:ea typeface="나눔고딕코딩"/>
-                <a:cs typeface="나눔고딕코딩"/>
+                <a:latin typeface="D2Coding"/>
+                <a:ea typeface="D2Coding"/>
+                <a:cs typeface="D2Coding"/>
               </a:rPr>
               <a:t>11</a:t>
             </a:r>
@@ -4790,9 +4790,9 @@
                 <a:solidFill>
                   <a:srgbClr val="7A869C"/>
                 </a:solidFill>
-                <a:latin typeface="나눔고딕코딩"/>
-                <a:ea typeface="나눔고딕코딩"/>
-                <a:cs typeface="나눔고딕코딩"/>
+                <a:latin typeface="D2Coding"/>
+                <a:ea typeface="D2Coding"/>
+                <a:cs typeface="D2Coding"/>
               </a:rPr>
               <a:t>12</a:t>
             </a:r>
@@ -4808,9 +4808,9 @@
                 <a:solidFill>
                   <a:srgbClr val="7A869C"/>
                 </a:solidFill>
-                <a:latin typeface="나눔고딕코딩"/>
-                <a:ea typeface="나눔고딕코딩"/>
-                <a:cs typeface="나눔고딕코딩"/>
+                <a:latin typeface="D2Coding"/>
+                <a:ea typeface="D2Coding"/>
+                <a:cs typeface="D2Coding"/>
               </a:rPr>
               <a:t>13</a:t>
             </a:r>
@@ -4849,9 +4849,9 @@
                 <a:solidFill>
                   <a:srgbClr val="D9A7FF"/>
                 </a:solidFill>
-                <a:latin typeface="나눔고딕코딩"/>
-                <a:ea typeface="나눔고딕코딩"/>
-                <a:cs typeface="나눔고딕코딩"/>
+                <a:latin typeface="D2Coding"/>
+                <a:ea typeface="D2Coding"/>
+                <a:cs typeface="D2Coding"/>
               </a:rPr>
               <a:t>const</a:t>
             </a:r>
@@ -4860,9 +4860,9 @@
                 <a:solidFill>
                   <a:srgbClr val="E6EAF2"/>
                 </a:solidFill>
-                <a:latin typeface="나눔고딕코딩"/>
-                <a:ea typeface="나눔고딕코딩"/>
-                <a:cs typeface="나눔고딕코딩"/>
+                <a:latin typeface="D2Coding"/>
+                <a:ea typeface="D2Coding"/>
+                <a:cs typeface="D2Coding"/>
               </a:rPr>
               <a:t> </a:t>
             </a:r>
@@ -4871,9 +4871,9 @@
                 <a:solidFill>
                   <a:srgbClr val="E6EAF2"/>
                 </a:solidFill>
-                <a:latin typeface="나눔고딕코딩"/>
-                <a:ea typeface="나눔고딕코딩"/>
-                <a:cs typeface="나눔고딕코딩"/>
+                <a:latin typeface="D2Coding"/>
+                <a:ea typeface="D2Coding"/>
+                <a:cs typeface="D2Coding"/>
               </a:rPr>
               <a:t>express</a:t>
             </a:r>
@@ -4882,9 +4882,9 @@
                 <a:solidFill>
                   <a:srgbClr val="E6EAF2"/>
                 </a:solidFill>
-                <a:latin typeface="나눔고딕코딩"/>
-                <a:ea typeface="나눔고딕코딩"/>
-                <a:cs typeface="나눔고딕코딩"/>
+                <a:latin typeface="D2Coding"/>
+                <a:ea typeface="D2Coding"/>
+                <a:cs typeface="D2Coding"/>
               </a:rPr>
               <a:t> = </a:t>
             </a:r>
@@ -4893,9 +4893,9 @@
                 <a:solidFill>
                   <a:srgbClr val="E6EAF2"/>
                 </a:solidFill>
-                <a:latin typeface="나눔고딕코딩"/>
-                <a:ea typeface="나눔고딕코딩"/>
-                <a:cs typeface="나눔고딕코딩"/>
+                <a:latin typeface="D2Coding"/>
+                <a:ea typeface="D2Coding"/>
+                <a:cs typeface="D2Coding"/>
               </a:rPr>
               <a:t>require</a:t>
             </a:r>
@@ -4904,9 +4904,9 @@
                 <a:solidFill>
                   <a:srgbClr val="E6EAF2"/>
                 </a:solidFill>
-                <a:latin typeface="나눔고딕코딩"/>
-                <a:ea typeface="나눔고딕코딩"/>
-                <a:cs typeface="나눔고딕코딩"/>
+                <a:latin typeface="D2Coding"/>
+                <a:ea typeface="D2Coding"/>
+                <a:cs typeface="D2Coding"/>
               </a:rPr>
               <a:t>(</a:t>
             </a:r>
@@ -4915,9 +4915,9 @@
                 <a:solidFill>
                   <a:srgbClr val="F5C97A"/>
                 </a:solidFill>
-                <a:latin typeface="나눔고딕코딩"/>
-                <a:ea typeface="나눔고딕코딩"/>
-                <a:cs typeface="나눔고딕코딩"/>
+                <a:latin typeface="D2Coding"/>
+                <a:ea typeface="D2Coding"/>
+                <a:cs typeface="D2Coding"/>
               </a:rPr>
               <a:t>'express'</a:t>
             </a:r>
@@ -4926,9 +4926,9 @@
                 <a:solidFill>
                   <a:srgbClr val="E6EAF2"/>
                 </a:solidFill>
-                <a:latin typeface="나눔고딕코딩"/>
-                <a:ea typeface="나눔고딕코딩"/>
-                <a:cs typeface="나눔고딕코딩"/>
+                <a:latin typeface="D2Coding"/>
+                <a:ea typeface="D2Coding"/>
+                <a:cs typeface="D2Coding"/>
               </a:rPr>
               <a:t>);          </a:t>
             </a:r>
@@ -4937,9 +4937,9 @@
                 <a:solidFill>
                   <a:srgbClr val="8F9DB5"/>
                 </a:solidFill>
-                <a:latin typeface="나눔고딕코딩"/>
-                <a:ea typeface="나눔고딕코딩"/>
-                <a:cs typeface="나눔고딕코딩"/>
+                <a:latin typeface="D2Coding"/>
+                <a:ea typeface="D2Coding"/>
+                <a:cs typeface="D2Coding"/>
               </a:rPr>
               <a:t>// 웹 서버 프레임워크</a:t>
             </a:r>
@@ -4955,9 +4955,9 @@
                 <a:solidFill>
                   <a:srgbClr val="D9A7FF"/>
                 </a:solidFill>
-                <a:latin typeface="나눔고딕코딩"/>
-                <a:ea typeface="나눔고딕코딩"/>
-                <a:cs typeface="나눔고딕코딩"/>
+                <a:latin typeface="D2Coding"/>
+                <a:ea typeface="D2Coding"/>
+                <a:cs typeface="D2Coding"/>
               </a:rPr>
               <a:t>const</a:t>
             </a:r>
@@ -4966,9 +4966,9 @@
                 <a:solidFill>
                   <a:srgbClr val="E6EAF2"/>
                 </a:solidFill>
-                <a:latin typeface="나눔고딕코딩"/>
-                <a:ea typeface="나눔고딕코딩"/>
-                <a:cs typeface="나눔고딕코딩"/>
+                <a:latin typeface="D2Coding"/>
+                <a:ea typeface="D2Coding"/>
+                <a:cs typeface="D2Coding"/>
               </a:rPr>
               <a:t> </a:t>
             </a:r>
@@ -4977,9 +4977,9 @@
                 <a:solidFill>
                   <a:srgbClr val="E6EAF2"/>
                 </a:solidFill>
-                <a:latin typeface="나눔고딕코딩"/>
-                <a:ea typeface="나눔고딕코딩"/>
-                <a:cs typeface="나눔고딕코딩"/>
+                <a:latin typeface="D2Coding"/>
+                <a:ea typeface="D2Coding"/>
+                <a:cs typeface="D2Coding"/>
               </a:rPr>
               <a:t>mysql</a:t>
             </a:r>
@@ -4988,9 +4988,9 @@
                 <a:solidFill>
                   <a:srgbClr val="E6EAF2"/>
                 </a:solidFill>
-                <a:latin typeface="나눔고딕코딩"/>
-                <a:ea typeface="나눔고딕코딩"/>
-                <a:cs typeface="나눔고딕코딩"/>
+                <a:latin typeface="D2Coding"/>
+                <a:ea typeface="D2Coding"/>
+                <a:cs typeface="D2Coding"/>
               </a:rPr>
               <a:t> = </a:t>
             </a:r>
@@ -4999,9 +4999,9 @@
                 <a:solidFill>
                   <a:srgbClr val="E6EAF2"/>
                 </a:solidFill>
-                <a:latin typeface="나눔고딕코딩"/>
-                <a:ea typeface="나눔고딕코딩"/>
-                <a:cs typeface="나눔고딕코딩"/>
+                <a:latin typeface="D2Coding"/>
+                <a:ea typeface="D2Coding"/>
+                <a:cs typeface="D2Coding"/>
               </a:rPr>
               <a:t>require</a:t>
             </a:r>
@@ -5010,9 +5010,9 @@
                 <a:solidFill>
                   <a:srgbClr val="E6EAF2"/>
                 </a:solidFill>
-                <a:latin typeface="나눔고딕코딩"/>
-                <a:ea typeface="나눔고딕코딩"/>
-                <a:cs typeface="나눔고딕코딩"/>
+                <a:latin typeface="D2Coding"/>
+                <a:ea typeface="D2Coding"/>
+                <a:cs typeface="D2Coding"/>
               </a:rPr>
               <a:t>(</a:t>
             </a:r>
@@ -5021,9 +5021,9 @@
                 <a:solidFill>
                   <a:srgbClr val="F5C97A"/>
                 </a:solidFill>
-                <a:latin typeface="나눔고딕코딩"/>
-                <a:ea typeface="나눔고딕코딩"/>
-                <a:cs typeface="나눔고딕코딩"/>
+                <a:latin typeface="D2Coding"/>
+                <a:ea typeface="D2Coding"/>
+                <a:cs typeface="D2Coding"/>
               </a:rPr>
               <a:t>'mysql2/promise'</a:t>
             </a:r>
@@ -5032,9 +5032,9 @@
                 <a:solidFill>
                   <a:srgbClr val="E6EAF2"/>
                 </a:solidFill>
-                <a:latin typeface="나눔고딕코딩"/>
-                <a:ea typeface="나눔고딕코딩"/>
-                <a:cs typeface="나눔고딕코딩"/>
+                <a:latin typeface="D2Coding"/>
+                <a:ea typeface="D2Coding"/>
+                <a:cs typeface="D2Coding"/>
               </a:rPr>
               <a:t>);     </a:t>
             </a:r>
@@ -5043,9 +5043,9 @@
                 <a:solidFill>
                   <a:srgbClr val="8F9DB5"/>
                 </a:solidFill>
-                <a:latin typeface="나눔고딕코딩"/>
-                <a:ea typeface="나눔고딕코딩"/>
-                <a:cs typeface="나눔고딕코딩"/>
+                <a:latin typeface="D2Coding"/>
+                <a:ea typeface="D2Coding"/>
+                <a:cs typeface="D2Coding"/>
               </a:rPr>
               <a:t>// MySQL 드라이버 (async/await 버전)</a:t>
             </a:r>
@@ -5061,9 +5061,9 @@
                 <a:solidFill>
                   <a:srgbClr val="E6EAF2"/>
                 </a:solidFill>
-                <a:latin typeface="나눔고딕코딩"/>
-                <a:ea typeface="나눔고딕코딩"/>
-                <a:cs typeface="나눔고딕코딩"/>
+                <a:latin typeface="D2Coding"/>
+                <a:ea typeface="D2Coding"/>
+                <a:cs typeface="D2Coding"/>
               </a:rPr>
               <a:t/>
             </a:r>
@@ -5079,9 +5079,9 @@
                 <a:solidFill>
                   <a:srgbClr val="D9A7FF"/>
                 </a:solidFill>
-                <a:latin typeface="나눔고딕코딩"/>
-                <a:ea typeface="나눔고딕코딩"/>
-                <a:cs typeface="나눔고딕코딩"/>
+                <a:latin typeface="D2Coding"/>
+                <a:ea typeface="D2Coding"/>
+                <a:cs typeface="D2Coding"/>
               </a:rPr>
               <a:t>const</a:t>
             </a:r>
@@ -5090,9 +5090,9 @@
                 <a:solidFill>
                   <a:srgbClr val="E6EAF2"/>
                 </a:solidFill>
-                <a:latin typeface="나눔고딕코딩"/>
-                <a:ea typeface="나눔고딕코딩"/>
-                <a:cs typeface="나눔고딕코딩"/>
+                <a:latin typeface="D2Coding"/>
+                <a:ea typeface="D2Coding"/>
+                <a:cs typeface="D2Coding"/>
               </a:rPr>
               <a:t> </a:t>
             </a:r>
@@ -5101,9 +5101,9 @@
                 <a:solidFill>
                   <a:srgbClr val="E6EAF2"/>
                 </a:solidFill>
-                <a:latin typeface="나눔고딕코딩"/>
-                <a:ea typeface="나눔고딕코딩"/>
-                <a:cs typeface="나눔고딕코딩"/>
+                <a:latin typeface="D2Coding"/>
+                <a:ea typeface="D2Coding"/>
+                <a:cs typeface="D2Coding"/>
               </a:rPr>
               <a:t>app</a:t>
             </a:r>
@@ -5112,9 +5112,9 @@
                 <a:solidFill>
                   <a:srgbClr val="E6EAF2"/>
                 </a:solidFill>
-                <a:latin typeface="나눔고딕코딩"/>
-                <a:ea typeface="나눔고딕코딩"/>
-                <a:cs typeface="나눔고딕코딩"/>
+                <a:latin typeface="D2Coding"/>
+                <a:ea typeface="D2Coding"/>
+                <a:cs typeface="D2Coding"/>
               </a:rPr>
               <a:t> = </a:t>
             </a:r>
@@ -5123,9 +5123,9 @@
                 <a:solidFill>
                   <a:srgbClr val="E6EAF2"/>
                 </a:solidFill>
-                <a:latin typeface="나눔고딕코딩"/>
-                <a:ea typeface="나눔고딕코딩"/>
-                <a:cs typeface="나눔고딕코딩"/>
+                <a:latin typeface="D2Coding"/>
+                <a:ea typeface="D2Coding"/>
+                <a:cs typeface="D2Coding"/>
               </a:rPr>
               <a:t>express</a:t>
             </a:r>
@@ -5134,9 +5134,9 @@
                 <a:solidFill>
                   <a:srgbClr val="E6EAF2"/>
                 </a:solidFill>
-                <a:latin typeface="나눔고딕코딩"/>
-                <a:ea typeface="나눔고딕코딩"/>
-                <a:cs typeface="나눔고딕코딩"/>
+                <a:latin typeface="D2Coding"/>
+                <a:ea typeface="D2Coding"/>
+                <a:cs typeface="D2Coding"/>
               </a:rPr>
               <a:t>();</a:t>
             </a:r>
@@ -5152,9 +5152,9 @@
                 <a:solidFill>
                   <a:srgbClr val="E6EAF2"/>
                 </a:solidFill>
-                <a:latin typeface="나눔고딕코딩"/>
-                <a:ea typeface="나눔고딕코딩"/>
-                <a:cs typeface="나눔고딕코딩"/>
+                <a:latin typeface="D2Coding"/>
+                <a:ea typeface="D2Coding"/>
+                <a:cs typeface="D2Coding"/>
               </a:rPr>
               <a:t/>
             </a:r>
@@ -5170,9 +5170,9 @@
                 <a:solidFill>
                   <a:srgbClr val="D9A7FF"/>
                 </a:solidFill>
-                <a:latin typeface="나눔고딕코딩"/>
-                <a:ea typeface="나눔고딕코딩"/>
-                <a:cs typeface="나눔고딕코딩"/>
+                <a:latin typeface="D2Coding"/>
+                <a:ea typeface="D2Coding"/>
+                <a:cs typeface="D2Coding"/>
               </a:rPr>
               <a:t>const</a:t>
             </a:r>
@@ -5181,9 +5181,9 @@
                 <a:solidFill>
                   <a:srgbClr val="E6EAF2"/>
                 </a:solidFill>
-                <a:latin typeface="나눔고딕코딩"/>
-                <a:ea typeface="나눔고딕코딩"/>
-                <a:cs typeface="나눔고딕코딩"/>
+                <a:latin typeface="D2Coding"/>
+                <a:ea typeface="D2Coding"/>
+                <a:cs typeface="D2Coding"/>
               </a:rPr>
               <a:t> </a:t>
             </a:r>
@@ -5192,9 +5192,9 @@
                 <a:solidFill>
                   <a:srgbClr val="E6EAF2"/>
                 </a:solidFill>
-                <a:latin typeface="나눔고딕코딩"/>
-                <a:ea typeface="나눔고딕코딩"/>
-                <a:cs typeface="나눔고딕코딩"/>
+                <a:latin typeface="D2Coding"/>
+                <a:ea typeface="D2Coding"/>
+                <a:cs typeface="D2Coding"/>
               </a:rPr>
               <a:t>pool</a:t>
             </a:r>
@@ -5203,9 +5203,9 @@
                 <a:solidFill>
                   <a:srgbClr val="E6EAF2"/>
                 </a:solidFill>
-                <a:latin typeface="나눔고딕코딩"/>
-                <a:ea typeface="나눔고딕코딩"/>
-                <a:cs typeface="나눔고딕코딩"/>
+                <a:latin typeface="D2Coding"/>
+                <a:ea typeface="D2Coding"/>
+                <a:cs typeface="D2Coding"/>
               </a:rPr>
               <a:t> = </a:t>
             </a:r>
@@ -5214,9 +5214,9 @@
                 <a:solidFill>
                   <a:srgbClr val="E6EAF2"/>
                 </a:solidFill>
-                <a:latin typeface="나눔고딕코딩"/>
-                <a:ea typeface="나눔고딕코딩"/>
-                <a:cs typeface="나눔고딕코딩"/>
+                <a:latin typeface="D2Coding"/>
+                <a:ea typeface="D2Coding"/>
+                <a:cs typeface="D2Coding"/>
               </a:rPr>
               <a:t>mysql</a:t>
             </a:r>
@@ -5225,9 +5225,9 @@
                 <a:solidFill>
                   <a:srgbClr val="E6EAF2"/>
                 </a:solidFill>
-                <a:latin typeface="나눔고딕코딩"/>
-                <a:ea typeface="나눔고딕코딩"/>
-                <a:cs typeface="나눔고딕코딩"/>
+                <a:latin typeface="D2Coding"/>
+                <a:ea typeface="D2Coding"/>
+                <a:cs typeface="D2Coding"/>
               </a:rPr>
               <a:t>.</a:t>
             </a:r>
@@ -5236,9 +5236,9 @@
                 <a:solidFill>
                   <a:srgbClr val="E6EAF2"/>
                 </a:solidFill>
-                <a:latin typeface="나눔고딕코딩"/>
-                <a:ea typeface="나눔고딕코딩"/>
-                <a:cs typeface="나눔고딕코딩"/>
+                <a:latin typeface="D2Coding"/>
+                <a:ea typeface="D2Coding"/>
+                <a:cs typeface="D2Coding"/>
               </a:rPr>
               <a:t>createPool</a:t>
             </a:r>
@@ -5247,9 +5247,9 @@
                 <a:solidFill>
                   <a:srgbClr val="E6EAF2"/>
                 </a:solidFill>
-                <a:latin typeface="나눔고딕코딩"/>
-                <a:ea typeface="나눔고딕코딩"/>
-                <a:cs typeface="나눔고딕코딩"/>
+                <a:latin typeface="D2Coding"/>
+                <a:ea typeface="D2Coding"/>
+                <a:cs typeface="D2Coding"/>
               </a:rPr>
               <a:t>({</a:t>
             </a:r>
@@ -5265,9 +5265,9 @@
                 <a:solidFill>
                   <a:srgbClr val="E6EAF2"/>
                 </a:solidFill>
-                <a:latin typeface="나눔고딕코딩"/>
-                <a:ea typeface="나눔고딕코딩"/>
-                <a:cs typeface="나눔고딕코딩"/>
+                <a:latin typeface="D2Coding"/>
+                <a:ea typeface="D2Coding"/>
+                <a:cs typeface="D2Coding"/>
               </a:rPr>
               <a:t>  </a:t>
             </a:r>
@@ -5276,9 +5276,9 @@
                 <a:solidFill>
                   <a:srgbClr val="E6EAF2"/>
                 </a:solidFill>
-                <a:latin typeface="나눔고딕코딩"/>
-                <a:ea typeface="나눔고딕코딩"/>
-                <a:cs typeface="나눔고딕코딩"/>
+                <a:latin typeface="D2Coding"/>
+                <a:ea typeface="D2Coding"/>
+                <a:cs typeface="D2Coding"/>
               </a:rPr>
               <a:t>host</a:t>
             </a:r>
@@ -5287,9 +5287,9 @@
                 <a:solidFill>
                   <a:srgbClr val="E6EAF2"/>
                 </a:solidFill>
-                <a:latin typeface="나눔고딕코딩"/>
-                <a:ea typeface="나눔고딕코딩"/>
-                <a:cs typeface="나눔고딕코딩"/>
+                <a:latin typeface="D2Coding"/>
+                <a:ea typeface="D2Coding"/>
+                <a:cs typeface="D2Coding"/>
               </a:rPr>
               <a:t>: </a:t>
             </a:r>
@@ -5298,9 +5298,9 @@
                 <a:solidFill>
                   <a:srgbClr val="F5C97A"/>
                 </a:solidFill>
-                <a:latin typeface="나눔고딕코딩"/>
-                <a:ea typeface="나눔고딕코딩"/>
-                <a:cs typeface="나눔고딕코딩"/>
+                <a:latin typeface="D2Coding"/>
+                <a:ea typeface="D2Coding"/>
+                <a:cs typeface="D2Coding"/>
               </a:rPr>
               <a:t>'localhost'</a:t>
             </a:r>
@@ -5309,9 +5309,9 @@
                 <a:solidFill>
                   <a:srgbClr val="E6EAF2"/>
                 </a:solidFill>
-                <a:latin typeface="나눔고딕코딩"/>
-                <a:ea typeface="나눔고딕코딩"/>
-                <a:cs typeface="나눔고딕코딩"/>
+                <a:latin typeface="D2Coding"/>
+                <a:ea typeface="D2Coding"/>
+                <a:cs typeface="D2Coding"/>
               </a:rPr>
               <a:t>,</a:t>
             </a:r>
@@ -5327,9 +5327,9 @@
                 <a:solidFill>
                   <a:srgbClr val="E6EAF2"/>
                 </a:solidFill>
-                <a:latin typeface="나눔고딕코딩"/>
-                <a:ea typeface="나눔고딕코딩"/>
-                <a:cs typeface="나눔고딕코딩"/>
+                <a:latin typeface="D2Coding"/>
+                <a:ea typeface="D2Coding"/>
+                <a:cs typeface="D2Coding"/>
               </a:rPr>
               <a:t>  </a:t>
             </a:r>
@@ -5338,9 +5338,9 @@
                 <a:solidFill>
                   <a:srgbClr val="E6EAF2"/>
                 </a:solidFill>
-                <a:latin typeface="나눔고딕코딩"/>
-                <a:ea typeface="나눔고딕코딩"/>
-                <a:cs typeface="나눔고딕코딩"/>
+                <a:latin typeface="D2Coding"/>
+                <a:ea typeface="D2Coding"/>
+                <a:cs typeface="D2Coding"/>
               </a:rPr>
               <a:t>user</a:t>
             </a:r>
@@ -5349,9 +5349,9 @@
                 <a:solidFill>
                   <a:srgbClr val="E6EAF2"/>
                 </a:solidFill>
-                <a:latin typeface="나눔고딕코딩"/>
-                <a:ea typeface="나눔고딕코딩"/>
-                <a:cs typeface="나눔고딕코딩"/>
+                <a:latin typeface="D2Coding"/>
+                <a:ea typeface="D2Coding"/>
+                <a:cs typeface="D2Coding"/>
               </a:rPr>
               <a:t>: </a:t>
             </a:r>
@@ -5360,9 +5360,9 @@
                 <a:solidFill>
                   <a:srgbClr val="F5C97A"/>
                 </a:solidFill>
-                <a:latin typeface="나눔고딕코딩"/>
-                <a:ea typeface="나눔고딕코딩"/>
-                <a:cs typeface="나눔고딕코딩"/>
+                <a:latin typeface="D2Coding"/>
+                <a:ea typeface="D2Coding"/>
+                <a:cs typeface="D2Coding"/>
               </a:rPr>
               <a:t>'root'</a:t>
             </a:r>
@@ -5371,9 +5371,9 @@
                 <a:solidFill>
                   <a:srgbClr val="E6EAF2"/>
                 </a:solidFill>
-                <a:latin typeface="나눔고딕코딩"/>
-                <a:ea typeface="나눔고딕코딩"/>
-                <a:cs typeface="나눔고딕코딩"/>
+                <a:latin typeface="D2Coding"/>
+                <a:ea typeface="D2Coding"/>
+                <a:cs typeface="D2Coding"/>
               </a:rPr>
               <a:t>,</a:t>
             </a:r>
@@ -5389,9 +5389,9 @@
                 <a:solidFill>
                   <a:srgbClr val="E6EAF2"/>
                 </a:solidFill>
-                <a:latin typeface="나눔고딕코딩"/>
-                <a:ea typeface="나눔고딕코딩"/>
-                <a:cs typeface="나눔고딕코딩"/>
+                <a:latin typeface="D2Coding"/>
+                <a:ea typeface="D2Coding"/>
+                <a:cs typeface="D2Coding"/>
               </a:rPr>
               <a:t>  </a:t>
             </a:r>
@@ -5400,9 +5400,9 @@
                 <a:solidFill>
                   <a:srgbClr val="E6EAF2"/>
                 </a:solidFill>
-                <a:latin typeface="나눔고딕코딩"/>
-                <a:ea typeface="나눔고딕코딩"/>
-                <a:cs typeface="나눔고딕코딩"/>
+                <a:latin typeface="D2Coding"/>
+                <a:ea typeface="D2Coding"/>
+                <a:cs typeface="D2Coding"/>
               </a:rPr>
               <a:t>password</a:t>
             </a:r>
@@ -5411,9 +5411,9 @@
                 <a:solidFill>
                   <a:srgbClr val="E6EAF2"/>
                 </a:solidFill>
-                <a:latin typeface="나눔고딕코딩"/>
-                <a:ea typeface="나눔고딕코딩"/>
-                <a:cs typeface="나눔고딕코딩"/>
+                <a:latin typeface="D2Coding"/>
+                <a:ea typeface="D2Coding"/>
+                <a:cs typeface="D2Coding"/>
               </a:rPr>
               <a:t>: </a:t>
             </a:r>
@@ -5422,9 +5422,9 @@
                 <a:solidFill>
                   <a:srgbClr val="F5C97A"/>
                 </a:solidFill>
-                <a:latin typeface="나눔고딕코딩"/>
-                <a:ea typeface="나눔고딕코딩"/>
-                <a:cs typeface="나눔고딕코딩"/>
+                <a:latin typeface="D2Coding"/>
+                <a:ea typeface="D2Coding"/>
+                <a:cs typeface="D2Coding"/>
               </a:rPr>
               <a:t>'본인 비밀번호'</a:t>
             </a:r>
@@ -5433,9 +5433,9 @@
                 <a:solidFill>
                   <a:srgbClr val="E6EAF2"/>
                 </a:solidFill>
-                <a:latin typeface="나눔고딕코딩"/>
-                <a:ea typeface="나눔고딕코딩"/>
-                <a:cs typeface="나눔고딕코딩"/>
+                <a:latin typeface="D2Coding"/>
+                <a:ea typeface="D2Coding"/>
+                <a:cs typeface="D2Coding"/>
               </a:rPr>
               <a:t>,   </a:t>
             </a:r>
@@ -5444,9 +5444,9 @@
                 <a:solidFill>
                   <a:srgbClr val="8F9DB5"/>
                 </a:solidFill>
-                <a:latin typeface="나눔고딕코딩"/>
-                <a:ea typeface="나눔고딕코딩"/>
-                <a:cs typeface="나눔고딕코딩"/>
+                <a:latin typeface="D2Coding"/>
+                <a:ea typeface="D2Coding"/>
+                <a:cs typeface="D2Coding"/>
               </a:rPr>
               <a:t>// ← 이 줄만 본인 환경에 맞게 수정 (실무는 환경 변수로)</a:t>
             </a:r>
@@ -5462,9 +5462,9 @@
                 <a:solidFill>
                   <a:srgbClr val="E6EAF2"/>
                 </a:solidFill>
-                <a:latin typeface="나눔고딕코딩"/>
-                <a:ea typeface="나눔고딕코딩"/>
-                <a:cs typeface="나눔고딕코딩"/>
+                <a:latin typeface="D2Coding"/>
+                <a:ea typeface="D2Coding"/>
+                <a:cs typeface="D2Coding"/>
               </a:rPr>
               <a:t>  </a:t>
             </a:r>
@@ -5473,9 +5473,9 @@
                 <a:solidFill>
                   <a:srgbClr val="E6EAF2"/>
                 </a:solidFill>
-                <a:latin typeface="나눔고딕코딩"/>
-                <a:ea typeface="나눔고딕코딩"/>
-                <a:cs typeface="나눔고딕코딩"/>
+                <a:latin typeface="D2Coding"/>
+                <a:ea typeface="D2Coding"/>
+                <a:cs typeface="D2Coding"/>
               </a:rPr>
               <a:t>database</a:t>
             </a:r>
@@ -5484,9 +5484,9 @@
                 <a:solidFill>
                   <a:srgbClr val="E6EAF2"/>
                 </a:solidFill>
-                <a:latin typeface="나눔고딕코딩"/>
-                <a:ea typeface="나눔고딕코딩"/>
-                <a:cs typeface="나눔고딕코딩"/>
+                <a:latin typeface="D2Coding"/>
+                <a:ea typeface="D2Coding"/>
+                <a:cs typeface="D2Coding"/>
               </a:rPr>
               <a:t>: </a:t>
             </a:r>
@@ -5495,9 +5495,9 @@
                 <a:solidFill>
                   <a:srgbClr val="F5C97A"/>
                 </a:solidFill>
-                <a:latin typeface="나눔고딕코딩"/>
-                <a:ea typeface="나눔고딕코딩"/>
-                <a:cs typeface="나눔고딕코딩"/>
+                <a:latin typeface="D2Coding"/>
+                <a:ea typeface="D2Coding"/>
+                <a:cs typeface="D2Coding"/>
               </a:rPr>
               <a:t>'daon'</a:t>
             </a:r>
@@ -5506,9 +5506,9 @@
                 <a:solidFill>
                   <a:srgbClr val="E6EAF2"/>
                 </a:solidFill>
-                <a:latin typeface="나눔고딕코딩"/>
-                <a:ea typeface="나눔고딕코딩"/>
-                <a:cs typeface="나눔고딕코딩"/>
+                <a:latin typeface="D2Coding"/>
+                <a:ea typeface="D2Coding"/>
+                <a:cs typeface="D2Coding"/>
               </a:rPr>
               <a:t>,</a:t>
             </a:r>
@@ -5524,9 +5524,9 @@
                 <a:solidFill>
                   <a:srgbClr val="E6EAF2"/>
                 </a:solidFill>
-                <a:latin typeface="나눔고딕코딩"/>
-                <a:ea typeface="나눔고딕코딩"/>
-                <a:cs typeface="나눔고딕코딩"/>
+                <a:latin typeface="D2Coding"/>
+                <a:ea typeface="D2Coding"/>
+                <a:cs typeface="D2Coding"/>
               </a:rPr>
               <a:t>  </a:t>
             </a:r>
@@ -5535,9 +5535,9 @@
                 <a:solidFill>
                   <a:srgbClr val="E6EAF2"/>
                 </a:solidFill>
-                <a:latin typeface="나눔고딕코딩"/>
-                <a:ea typeface="나눔고딕코딩"/>
-                <a:cs typeface="나눔고딕코딩"/>
+                <a:latin typeface="D2Coding"/>
+                <a:ea typeface="D2Coding"/>
+                <a:cs typeface="D2Coding"/>
               </a:rPr>
               <a:t>connectionLimit</a:t>
             </a:r>
@@ -5546,9 +5546,9 @@
                 <a:solidFill>
                   <a:srgbClr val="E6EAF2"/>
                 </a:solidFill>
-                <a:latin typeface="나눔고딕코딩"/>
-                <a:ea typeface="나눔고딕코딩"/>
-                <a:cs typeface="나눔고딕코딩"/>
+                <a:latin typeface="D2Coding"/>
+                <a:ea typeface="D2Coding"/>
+                <a:cs typeface="D2Coding"/>
               </a:rPr>
               <a:t>: </a:t>
             </a:r>
@@ -5557,9 +5557,9 @@
                 <a:solidFill>
                   <a:srgbClr val="FFB08A"/>
                 </a:solidFill>
-                <a:latin typeface="나눔고딕코딩"/>
-                <a:ea typeface="나눔고딕코딩"/>
-                <a:cs typeface="나눔고딕코딩"/>
+                <a:latin typeface="D2Coding"/>
+                <a:ea typeface="D2Coding"/>
+                <a:cs typeface="D2Coding"/>
               </a:rPr>
               <a:t>10</a:t>
             </a:r>
@@ -5568,9 +5568,9 @@
                 <a:solidFill>
                   <a:srgbClr val="E6EAF2"/>
                 </a:solidFill>
-                <a:latin typeface="나눔고딕코딩"/>
-                <a:ea typeface="나눔고딕코딩"/>
-                <a:cs typeface="나눔고딕코딩"/>
+                <a:latin typeface="D2Coding"/>
+                <a:ea typeface="D2Coding"/>
+                <a:cs typeface="D2Coding"/>
               </a:rPr>
               <a:t>,         </a:t>
             </a:r>
@@ -5579,9 +5579,9 @@
                 <a:solidFill>
                   <a:srgbClr val="8F9DB5"/>
                 </a:solidFill>
-                <a:latin typeface="나눔고딕코딩"/>
-                <a:ea typeface="나눔고딕코딩"/>
-                <a:cs typeface="나눔고딕코딩"/>
+                <a:latin typeface="D2Coding"/>
+                <a:ea typeface="D2Coding"/>
+                <a:cs typeface="D2Coding"/>
               </a:rPr>
               <a:t>// 동시에 유지할 연결 수 최대 10개</a:t>
             </a:r>
@@ -5597,9 +5597,9 @@
                 <a:solidFill>
                   <a:srgbClr val="E6EAF2"/>
                 </a:solidFill>
-                <a:latin typeface="나눔고딕코딩"/>
-                <a:ea typeface="나눔고딕코딩"/>
-                <a:cs typeface="나눔고딕코딩"/>
+                <a:latin typeface="D2Coding"/>
+                <a:ea typeface="D2Coding"/>
+                <a:cs typeface="D2Coding"/>
               </a:rPr>
               <a:t>  </a:t>
             </a:r>
@@ -5608,9 +5608,9 @@
                 <a:solidFill>
                   <a:srgbClr val="E6EAF2"/>
                 </a:solidFill>
-                <a:latin typeface="나눔고딕코딩"/>
-                <a:ea typeface="나눔고딕코딩"/>
-                <a:cs typeface="나눔고딕코딩"/>
+                <a:latin typeface="D2Coding"/>
+                <a:ea typeface="D2Coding"/>
+                <a:cs typeface="D2Coding"/>
               </a:rPr>
               <a:t>charset</a:t>
             </a:r>
@@ -5619,9 +5619,9 @@
                 <a:solidFill>
                   <a:srgbClr val="E6EAF2"/>
                 </a:solidFill>
-                <a:latin typeface="나눔고딕코딩"/>
-                <a:ea typeface="나눔고딕코딩"/>
-                <a:cs typeface="나눔고딕코딩"/>
+                <a:latin typeface="D2Coding"/>
+                <a:ea typeface="D2Coding"/>
+                <a:cs typeface="D2Coding"/>
               </a:rPr>
               <a:t>: </a:t>
             </a:r>
@@ -5630,9 +5630,9 @@
                 <a:solidFill>
                   <a:srgbClr val="F5C97A"/>
                 </a:solidFill>
-                <a:latin typeface="나눔고딕코딩"/>
-                <a:ea typeface="나눔고딕코딩"/>
-                <a:cs typeface="나눔고딕코딩"/>
+                <a:latin typeface="D2Coding"/>
+                <a:ea typeface="D2Coding"/>
+                <a:cs typeface="D2Coding"/>
               </a:rPr>
               <a:t>'utf8mb4'</a:t>
             </a:r>
@@ -5641,9 +5641,9 @@
                 <a:solidFill>
                   <a:srgbClr val="E6EAF2"/>
                 </a:solidFill>
-                <a:latin typeface="나눔고딕코딩"/>
-                <a:ea typeface="나눔고딕코딩"/>
-                <a:cs typeface="나눔고딕코딩"/>
+                <a:latin typeface="D2Coding"/>
+                <a:ea typeface="D2Coding"/>
+                <a:cs typeface="D2Coding"/>
               </a:rPr>
               <a:t>,          </a:t>
             </a:r>
@@ -5652,9 +5652,9 @@
                 <a:solidFill>
                   <a:srgbClr val="8F9DB5"/>
                 </a:solidFill>
-                <a:latin typeface="나눔고딕코딩"/>
-                <a:ea typeface="나눔고딕코딩"/>
-                <a:cs typeface="나눔고딕코딩"/>
+                <a:latin typeface="D2Coding"/>
+                <a:ea typeface="D2Coding"/>
+                <a:cs typeface="D2Coding"/>
               </a:rPr>
               <a:t>// 한글·이모지가 깨지지 않도록 문자 집합 지정</a:t>
             </a:r>
@@ -5670,9 +5670,9 @@
                 <a:solidFill>
                   <a:srgbClr val="E6EAF2"/>
                 </a:solidFill>
-                <a:latin typeface="나눔고딕코딩"/>
-                <a:ea typeface="나눔고딕코딩"/>
-                <a:cs typeface="나눔고딕코딩"/>
+                <a:latin typeface="D2Coding"/>
+                <a:ea typeface="D2Coding"/>
+                <a:cs typeface="D2Coding"/>
               </a:rPr>
               <a:t>});</a:t>
             </a:r>
@@ -7784,9 +7784,9 @@
                 <a:solidFill>
                   <a:srgbClr val="7A869C"/>
                 </a:solidFill>
-                <a:latin typeface="나눔고딕코딩"/>
-                <a:ea typeface="나눔고딕코딩"/>
-                <a:cs typeface="나눔고딕코딩"/>
+                <a:latin typeface="D2Coding"/>
+                <a:ea typeface="D2Coding"/>
+                <a:cs typeface="D2Coding"/>
               </a:rPr>
               <a:t>15</a:t>
             </a:r>
@@ -7802,9 +7802,9 @@
                 <a:solidFill>
                   <a:srgbClr val="7A869C"/>
                 </a:solidFill>
-                <a:latin typeface="나눔고딕코딩"/>
-                <a:ea typeface="나눔고딕코딩"/>
-                <a:cs typeface="나눔고딕코딩"/>
+                <a:latin typeface="D2Coding"/>
+                <a:ea typeface="D2Coding"/>
+                <a:cs typeface="D2Coding"/>
               </a:rPr>
               <a:t>16</a:t>
             </a:r>
@@ -7820,9 +7820,9 @@
                 <a:solidFill>
                   <a:srgbClr val="7A869C"/>
                 </a:solidFill>
-                <a:latin typeface="나눔고딕코딩"/>
-                <a:ea typeface="나눔고딕코딩"/>
-                <a:cs typeface="나눔고딕코딩"/>
+                <a:latin typeface="D2Coding"/>
+                <a:ea typeface="D2Coding"/>
+                <a:cs typeface="D2Coding"/>
               </a:rPr>
               <a:t>17</a:t>
             </a:r>
@@ -7838,9 +7838,9 @@
                 <a:solidFill>
                   <a:srgbClr val="7A869C"/>
                 </a:solidFill>
-                <a:latin typeface="나눔고딕코딩"/>
-                <a:ea typeface="나눔고딕코딩"/>
-                <a:cs typeface="나눔고딕코딩"/>
+                <a:latin typeface="D2Coding"/>
+                <a:ea typeface="D2Coding"/>
+                <a:cs typeface="D2Coding"/>
               </a:rPr>
               <a:t>18</a:t>
             </a:r>
@@ -7856,9 +7856,9 @@
                 <a:solidFill>
                   <a:srgbClr val="7A869C"/>
                 </a:solidFill>
-                <a:latin typeface="나눔고딕코딩"/>
-                <a:ea typeface="나눔고딕코딩"/>
-                <a:cs typeface="나눔고딕코딩"/>
+                <a:latin typeface="D2Coding"/>
+                <a:ea typeface="D2Coding"/>
+                <a:cs typeface="D2Coding"/>
               </a:rPr>
               <a:t>19</a:t>
             </a:r>
@@ -7874,9 +7874,9 @@
                 <a:solidFill>
                   <a:srgbClr val="7A869C"/>
                 </a:solidFill>
-                <a:latin typeface="나눔고딕코딩"/>
-                <a:ea typeface="나눔고딕코딩"/>
-                <a:cs typeface="나눔고딕코딩"/>
+                <a:latin typeface="D2Coding"/>
+                <a:ea typeface="D2Coding"/>
+                <a:cs typeface="D2Coding"/>
               </a:rPr>
               <a:t>20</a:t>
             </a:r>
@@ -7892,9 +7892,9 @@
                 <a:solidFill>
                   <a:srgbClr val="7A869C"/>
                 </a:solidFill>
-                <a:latin typeface="나눔고딕코딩"/>
-                <a:ea typeface="나눔고딕코딩"/>
-                <a:cs typeface="나눔고딕코딩"/>
+                <a:latin typeface="D2Coding"/>
+                <a:ea typeface="D2Coding"/>
+                <a:cs typeface="D2Coding"/>
               </a:rPr>
               <a:t>21</a:t>
             </a:r>
@@ -7910,9 +7910,9 @@
                 <a:solidFill>
                   <a:srgbClr val="7A869C"/>
                 </a:solidFill>
-                <a:latin typeface="나눔고딕코딩"/>
-                <a:ea typeface="나눔고딕코딩"/>
-                <a:cs typeface="나눔고딕코딩"/>
+                <a:latin typeface="D2Coding"/>
+                <a:ea typeface="D2Coding"/>
+                <a:cs typeface="D2Coding"/>
               </a:rPr>
               <a:t>22</a:t>
             </a:r>
@@ -7928,9 +7928,9 @@
                 <a:solidFill>
                   <a:srgbClr val="7A869C"/>
                 </a:solidFill>
-                <a:latin typeface="나눔고딕코딩"/>
-                <a:ea typeface="나눔고딕코딩"/>
-                <a:cs typeface="나눔고딕코딩"/>
+                <a:latin typeface="D2Coding"/>
+                <a:ea typeface="D2Coding"/>
+                <a:cs typeface="D2Coding"/>
               </a:rPr>
               <a:t>23</a:t>
             </a:r>
@@ -7946,9 +7946,9 @@
                 <a:solidFill>
                   <a:srgbClr val="7A869C"/>
                 </a:solidFill>
-                <a:latin typeface="나눔고딕코딩"/>
-                <a:ea typeface="나눔고딕코딩"/>
-                <a:cs typeface="나눔고딕코딩"/>
+                <a:latin typeface="D2Coding"/>
+                <a:ea typeface="D2Coding"/>
+                <a:cs typeface="D2Coding"/>
               </a:rPr>
               <a:t>24</a:t>
             </a:r>
@@ -7964,9 +7964,9 @@
                 <a:solidFill>
                   <a:srgbClr val="7A869C"/>
                 </a:solidFill>
-                <a:latin typeface="나눔고딕코딩"/>
-                <a:ea typeface="나눔고딕코딩"/>
-                <a:cs typeface="나눔고딕코딩"/>
+                <a:latin typeface="D2Coding"/>
+                <a:ea typeface="D2Coding"/>
+                <a:cs typeface="D2Coding"/>
               </a:rPr>
               <a:t>25</a:t>
             </a:r>
@@ -7982,9 +7982,9 @@
                 <a:solidFill>
                   <a:srgbClr val="7A869C"/>
                 </a:solidFill>
-                <a:latin typeface="나눔고딕코딩"/>
-                <a:ea typeface="나눔고딕코딩"/>
-                <a:cs typeface="나눔고딕코딩"/>
+                <a:latin typeface="D2Coding"/>
+                <a:ea typeface="D2Coding"/>
+                <a:cs typeface="D2Coding"/>
               </a:rPr>
               <a:t>26</a:t>
             </a:r>
@@ -8000,9 +8000,9 @@
                 <a:solidFill>
                   <a:srgbClr val="7A869C"/>
                 </a:solidFill>
-                <a:latin typeface="나눔고딕코딩"/>
-                <a:ea typeface="나눔고딕코딩"/>
-                <a:cs typeface="나눔고딕코딩"/>
+                <a:latin typeface="D2Coding"/>
+                <a:ea typeface="D2Coding"/>
+                <a:cs typeface="D2Coding"/>
               </a:rPr>
               <a:t>27</a:t>
             </a:r>
@@ -8018,9 +8018,9 @@
                 <a:solidFill>
                   <a:srgbClr val="7A869C"/>
                 </a:solidFill>
-                <a:latin typeface="나눔고딕코딩"/>
-                <a:ea typeface="나눔고딕코딩"/>
-                <a:cs typeface="나눔고딕코딩"/>
+                <a:latin typeface="D2Coding"/>
+                <a:ea typeface="D2Coding"/>
+                <a:cs typeface="D2Coding"/>
               </a:rPr>
               <a:t>28</a:t>
             </a:r>
@@ -8059,9 +8059,9 @@
                 <a:solidFill>
                   <a:srgbClr val="E6EAF2"/>
                 </a:solidFill>
-                <a:latin typeface="나눔고딕코딩"/>
-                <a:ea typeface="나눔고딕코딩"/>
-                <a:cs typeface="나눔고딕코딩"/>
+                <a:latin typeface="D2Coding"/>
+                <a:ea typeface="D2Coding"/>
+                <a:cs typeface="D2Coding"/>
               </a:rPr>
               <a:t>app</a:t>
             </a:r>
@@ -8070,9 +8070,9 @@
                 <a:solidFill>
                   <a:srgbClr val="E6EAF2"/>
                 </a:solidFill>
-                <a:latin typeface="나눔고딕코딩"/>
-                <a:ea typeface="나눔고딕코딩"/>
-                <a:cs typeface="나눔고딕코딩"/>
+                <a:latin typeface="D2Coding"/>
+                <a:ea typeface="D2Coding"/>
+                <a:cs typeface="D2Coding"/>
               </a:rPr>
               <a:t>.</a:t>
             </a:r>
@@ -8081,9 +8081,9 @@
                 <a:solidFill>
                   <a:srgbClr val="D9A7FF"/>
                 </a:solidFill>
-                <a:latin typeface="나눔고딕코딩"/>
-                <a:ea typeface="나눔고딕코딩"/>
-                <a:cs typeface="나눔고딕코딩"/>
+                <a:latin typeface="D2Coding"/>
+                <a:ea typeface="D2Coding"/>
+                <a:cs typeface="D2Coding"/>
               </a:rPr>
               <a:t>get</a:t>
             </a:r>
@@ -8092,9 +8092,9 @@
                 <a:solidFill>
                   <a:srgbClr val="E6EAF2"/>
                 </a:solidFill>
-                <a:latin typeface="나눔고딕코딩"/>
-                <a:ea typeface="나눔고딕코딩"/>
-                <a:cs typeface="나눔고딕코딩"/>
+                <a:latin typeface="D2Coding"/>
+                <a:ea typeface="D2Coding"/>
+                <a:cs typeface="D2Coding"/>
               </a:rPr>
               <a:t>(</a:t>
             </a:r>
@@ -8103,9 +8103,9 @@
                 <a:solidFill>
                   <a:srgbClr val="F5C97A"/>
                 </a:solidFill>
-                <a:latin typeface="나눔고딕코딩"/>
-                <a:ea typeface="나눔고딕코딩"/>
-                <a:cs typeface="나눔고딕코딩"/>
+                <a:latin typeface="D2Coding"/>
+                <a:ea typeface="D2Coding"/>
+                <a:cs typeface="D2Coding"/>
               </a:rPr>
               <a:t>'/products'</a:t>
             </a:r>
@@ -8114,9 +8114,9 @@
                 <a:solidFill>
                   <a:srgbClr val="E6EAF2"/>
                 </a:solidFill>
-                <a:latin typeface="나눔고딕코딩"/>
-                <a:ea typeface="나눔고딕코딩"/>
-                <a:cs typeface="나눔고딕코딩"/>
+                <a:latin typeface="D2Coding"/>
+                <a:ea typeface="D2Coding"/>
+                <a:cs typeface="D2Coding"/>
               </a:rPr>
               <a:t>, </a:t>
             </a:r>
@@ -8125,9 +8125,9 @@
                 <a:solidFill>
                   <a:srgbClr val="D9A7FF"/>
                 </a:solidFill>
-                <a:latin typeface="나눔고딕코딩"/>
-                <a:ea typeface="나눔고딕코딩"/>
-                <a:cs typeface="나눔고딕코딩"/>
+                <a:latin typeface="D2Coding"/>
+                <a:ea typeface="D2Coding"/>
+                <a:cs typeface="D2Coding"/>
               </a:rPr>
               <a:t>async</a:t>
             </a:r>
@@ -8136,9 +8136,9 @@
                 <a:solidFill>
                   <a:srgbClr val="E6EAF2"/>
                 </a:solidFill>
-                <a:latin typeface="나눔고딕코딩"/>
-                <a:ea typeface="나눔고딕코딩"/>
-                <a:cs typeface="나눔고딕코딩"/>
+                <a:latin typeface="D2Coding"/>
+                <a:ea typeface="D2Coding"/>
+                <a:cs typeface="D2Coding"/>
               </a:rPr>
               <a:t> (</a:t>
             </a:r>
@@ -8147,9 +8147,9 @@
                 <a:solidFill>
                   <a:srgbClr val="E6EAF2"/>
                 </a:solidFill>
-                <a:latin typeface="나눔고딕코딩"/>
-                <a:ea typeface="나눔고딕코딩"/>
-                <a:cs typeface="나눔고딕코딩"/>
+                <a:latin typeface="D2Coding"/>
+                <a:ea typeface="D2Coding"/>
+                <a:cs typeface="D2Coding"/>
               </a:rPr>
               <a:t>req</a:t>
             </a:r>
@@ -8158,9 +8158,9 @@
                 <a:solidFill>
                   <a:srgbClr val="E6EAF2"/>
                 </a:solidFill>
-                <a:latin typeface="나눔고딕코딩"/>
-                <a:ea typeface="나눔고딕코딩"/>
-                <a:cs typeface="나눔고딕코딩"/>
+                <a:latin typeface="D2Coding"/>
+                <a:ea typeface="D2Coding"/>
+                <a:cs typeface="D2Coding"/>
               </a:rPr>
               <a:t>, </a:t>
             </a:r>
@@ -8169,9 +8169,9 @@
                 <a:solidFill>
                   <a:srgbClr val="E6EAF2"/>
                 </a:solidFill>
-                <a:latin typeface="나눔고딕코딩"/>
-                <a:ea typeface="나눔고딕코딩"/>
-                <a:cs typeface="나눔고딕코딩"/>
+                <a:latin typeface="D2Coding"/>
+                <a:ea typeface="D2Coding"/>
+                <a:cs typeface="D2Coding"/>
               </a:rPr>
               <a:t>res</a:t>
             </a:r>
@@ -8180,9 +8180,9 @@
                 <a:solidFill>
                   <a:srgbClr val="E6EAF2"/>
                 </a:solidFill>
-                <a:latin typeface="나눔고딕코딩"/>
-                <a:ea typeface="나눔고딕코딩"/>
-                <a:cs typeface="나눔고딕코딩"/>
+                <a:latin typeface="D2Coding"/>
+                <a:ea typeface="D2Coding"/>
+                <a:cs typeface="D2Coding"/>
               </a:rPr>
               <a:t>) =&gt; {</a:t>
             </a:r>
@@ -8198,9 +8198,9 @@
                 <a:solidFill>
                   <a:srgbClr val="E6EAF2"/>
                 </a:solidFill>
-                <a:latin typeface="나눔고딕코딩"/>
-                <a:ea typeface="나눔고딕코딩"/>
-                <a:cs typeface="나눔고딕코딩"/>
+                <a:latin typeface="D2Coding"/>
+                <a:ea typeface="D2Coding"/>
+                <a:cs typeface="D2Coding"/>
               </a:rPr>
               <a:t>  </a:t>
             </a:r>
@@ -8209,9 +8209,9 @@
                 <a:solidFill>
                   <a:srgbClr val="D9A7FF"/>
                 </a:solidFill>
-                <a:latin typeface="나눔고딕코딩"/>
-                <a:ea typeface="나눔고딕코딩"/>
-                <a:cs typeface="나눔고딕코딩"/>
+                <a:latin typeface="D2Coding"/>
+                <a:ea typeface="D2Coding"/>
+                <a:cs typeface="D2Coding"/>
               </a:rPr>
               <a:t>try</a:t>
             </a:r>
@@ -8220,9 +8220,9 @@
                 <a:solidFill>
                   <a:srgbClr val="E6EAF2"/>
                 </a:solidFill>
-                <a:latin typeface="나눔고딕코딩"/>
-                <a:ea typeface="나눔고딕코딩"/>
-                <a:cs typeface="나눔고딕코딩"/>
+                <a:latin typeface="D2Coding"/>
+                <a:ea typeface="D2Coding"/>
+                <a:cs typeface="D2Coding"/>
               </a:rPr>
               <a:t> {</a:t>
             </a:r>
@@ -8238,9 +8238,9 @@
                 <a:solidFill>
                   <a:srgbClr val="E6EAF2"/>
                 </a:solidFill>
-                <a:latin typeface="나눔고딕코딩"/>
-                <a:ea typeface="나눔고딕코딩"/>
-                <a:cs typeface="나눔고딕코딩"/>
+                <a:latin typeface="D2Coding"/>
+                <a:ea typeface="D2Coding"/>
+                <a:cs typeface="D2Coding"/>
               </a:rPr>
               <a:t>    </a:t>
             </a:r>
@@ -8249,9 +8249,9 @@
                 <a:solidFill>
                   <a:srgbClr val="D9A7FF"/>
                 </a:solidFill>
-                <a:latin typeface="나눔고딕코딩"/>
-                <a:ea typeface="나눔고딕코딩"/>
-                <a:cs typeface="나눔고딕코딩"/>
+                <a:latin typeface="D2Coding"/>
+                <a:ea typeface="D2Coding"/>
+                <a:cs typeface="D2Coding"/>
               </a:rPr>
               <a:t>const</a:t>
             </a:r>
@@ -8260,9 +8260,9 @@
                 <a:solidFill>
                   <a:srgbClr val="E6EAF2"/>
                 </a:solidFill>
-                <a:latin typeface="나눔고딕코딩"/>
-                <a:ea typeface="나눔고딕코딩"/>
-                <a:cs typeface="나눔고딕코딩"/>
+                <a:latin typeface="D2Coding"/>
+                <a:ea typeface="D2Coding"/>
+                <a:cs typeface="D2Coding"/>
               </a:rPr>
               <a:t> [</a:t>
             </a:r>
@@ -8271,9 +8271,9 @@
                 <a:solidFill>
                   <a:srgbClr val="E6EAF2"/>
                 </a:solidFill>
-                <a:latin typeface="나눔고딕코딩"/>
-                <a:ea typeface="나눔고딕코딩"/>
-                <a:cs typeface="나눔고딕코딩"/>
+                <a:latin typeface="D2Coding"/>
+                <a:ea typeface="D2Coding"/>
+                <a:cs typeface="D2Coding"/>
               </a:rPr>
               <a:t>rows</a:t>
             </a:r>
@@ -8282,9 +8282,9 @@
                 <a:solidFill>
                   <a:srgbClr val="E6EAF2"/>
                 </a:solidFill>
-                <a:latin typeface="나눔고딕코딩"/>
-                <a:ea typeface="나눔고딕코딩"/>
-                <a:cs typeface="나눔고딕코딩"/>
+                <a:latin typeface="D2Coding"/>
+                <a:ea typeface="D2Coding"/>
+                <a:cs typeface="D2Coding"/>
               </a:rPr>
               <a:t>] = </a:t>
             </a:r>
@@ -8293,9 +8293,9 @@
                 <a:solidFill>
                   <a:srgbClr val="D9A7FF"/>
                 </a:solidFill>
-                <a:latin typeface="나눔고딕코딩"/>
-                <a:ea typeface="나눔고딕코딩"/>
-                <a:cs typeface="나눔고딕코딩"/>
+                <a:latin typeface="D2Coding"/>
+                <a:ea typeface="D2Coding"/>
+                <a:cs typeface="D2Coding"/>
               </a:rPr>
               <a:t>await</a:t>
             </a:r>
@@ -8304,9 +8304,9 @@
                 <a:solidFill>
                   <a:srgbClr val="E6EAF2"/>
                 </a:solidFill>
-                <a:latin typeface="나눔고딕코딩"/>
-                <a:ea typeface="나눔고딕코딩"/>
-                <a:cs typeface="나눔고딕코딩"/>
+                <a:latin typeface="D2Coding"/>
+                <a:ea typeface="D2Coding"/>
+                <a:cs typeface="D2Coding"/>
               </a:rPr>
               <a:t> </a:t>
             </a:r>
@@ -8315,9 +8315,9 @@
                 <a:solidFill>
                   <a:srgbClr val="E6EAF2"/>
                 </a:solidFill>
-                <a:latin typeface="나눔고딕코딩"/>
-                <a:ea typeface="나눔고딕코딩"/>
-                <a:cs typeface="나눔고딕코딩"/>
+                <a:latin typeface="D2Coding"/>
+                <a:ea typeface="D2Coding"/>
+                <a:cs typeface="D2Coding"/>
               </a:rPr>
               <a:t>pool</a:t>
             </a:r>
@@ -8326,9 +8326,9 @@
                 <a:solidFill>
                   <a:srgbClr val="E6EAF2"/>
                 </a:solidFill>
-                <a:latin typeface="나눔고딕코딩"/>
-                <a:ea typeface="나눔고딕코딩"/>
-                <a:cs typeface="나눔고딕코딩"/>
+                <a:latin typeface="D2Coding"/>
+                <a:ea typeface="D2Coding"/>
+                <a:cs typeface="D2Coding"/>
               </a:rPr>
               <a:t>.</a:t>
             </a:r>
@@ -8337,9 +8337,9 @@
                 <a:solidFill>
                   <a:srgbClr val="E6EAF2"/>
                 </a:solidFill>
-                <a:latin typeface="나눔고딕코딩"/>
-                <a:ea typeface="나눔고딕코딩"/>
-                <a:cs typeface="나눔고딕코딩"/>
+                <a:latin typeface="D2Coding"/>
+                <a:ea typeface="D2Coding"/>
+                <a:cs typeface="D2Coding"/>
               </a:rPr>
               <a:t>query</a:t>
             </a:r>
@@ -8348,9 +8348,9 @@
                 <a:solidFill>
                   <a:srgbClr val="E6EAF2"/>
                 </a:solidFill>
-                <a:latin typeface="나눔고딕코딩"/>
-                <a:ea typeface="나눔고딕코딩"/>
-                <a:cs typeface="나눔고딕코딩"/>
+                <a:latin typeface="D2Coding"/>
+                <a:ea typeface="D2Coding"/>
+                <a:cs typeface="D2Coding"/>
               </a:rPr>
               <a:t>(</a:t>
             </a:r>
@@ -8366,9 +8366,9 @@
                 <a:solidFill>
                   <a:srgbClr val="E6EAF2"/>
                 </a:solidFill>
-                <a:latin typeface="나눔고딕코딩"/>
-                <a:ea typeface="나눔고딕코딩"/>
-                <a:cs typeface="나눔고딕코딩"/>
+                <a:latin typeface="D2Coding"/>
+                <a:ea typeface="D2Coding"/>
+                <a:cs typeface="D2Coding"/>
               </a:rPr>
               <a:t>      </a:t>
             </a:r>
@@ -8377,9 +8377,9 @@
                 <a:solidFill>
                   <a:srgbClr val="F5C97A"/>
                 </a:solidFill>
-                <a:latin typeface="나눔고딕코딩"/>
-                <a:ea typeface="나눔고딕코딩"/>
-                <a:cs typeface="나눔고딕코딩"/>
+                <a:latin typeface="D2Coding"/>
+                <a:ea typeface="D2Coding"/>
+                <a:cs typeface="D2Coding"/>
               </a:rPr>
               <a:t>'SELECT prod_id, name, category, price, stock FROM products ORDER BY prod_id'</a:t>
             </a:r>
@@ -8395,9 +8395,9 @@
                 <a:solidFill>
                   <a:srgbClr val="E6EAF2"/>
                 </a:solidFill>
-                <a:latin typeface="나눔고딕코딩"/>
-                <a:ea typeface="나눔고딕코딩"/>
-                <a:cs typeface="나눔고딕코딩"/>
+                <a:latin typeface="D2Coding"/>
+                <a:ea typeface="D2Coding"/>
+                <a:cs typeface="D2Coding"/>
               </a:rPr>
               <a:t>    );</a:t>
             </a:r>
@@ -8413,9 +8413,9 @@
                 <a:solidFill>
                   <a:srgbClr val="E6EAF2"/>
                 </a:solidFill>
-                <a:latin typeface="나눔고딕코딩"/>
-                <a:ea typeface="나눔고딕코딩"/>
-                <a:cs typeface="나눔고딕코딩"/>
+                <a:latin typeface="D2Coding"/>
+                <a:ea typeface="D2Coding"/>
+                <a:cs typeface="D2Coding"/>
               </a:rPr>
               <a:t/>
             </a:r>
@@ -8431,9 +8431,9 @@
                 <a:solidFill>
                   <a:srgbClr val="E6EAF2"/>
                 </a:solidFill>
-                <a:latin typeface="나눔고딕코딩"/>
-                <a:ea typeface="나눔고딕코딩"/>
-                <a:cs typeface="나눔고딕코딩"/>
+                <a:latin typeface="D2Coding"/>
+                <a:ea typeface="D2Coding"/>
+                <a:cs typeface="D2Coding"/>
               </a:rPr>
               <a:t>    </a:t>
             </a:r>
@@ -8442,9 +8442,9 @@
                 <a:solidFill>
                   <a:srgbClr val="D9A7FF"/>
                 </a:solidFill>
-                <a:latin typeface="나눔고딕코딩"/>
-                <a:ea typeface="나눔고딕코딩"/>
-                <a:cs typeface="나눔고딕코딩"/>
+                <a:latin typeface="D2Coding"/>
+                <a:ea typeface="D2Coding"/>
+                <a:cs typeface="D2Coding"/>
               </a:rPr>
               <a:t>let</a:t>
             </a:r>
@@ -8453,9 +8453,9 @@
                 <a:solidFill>
                   <a:srgbClr val="E6EAF2"/>
                 </a:solidFill>
-                <a:latin typeface="나눔고딕코딩"/>
-                <a:ea typeface="나눔고딕코딩"/>
-                <a:cs typeface="나눔고딕코딩"/>
+                <a:latin typeface="D2Coding"/>
+                <a:ea typeface="D2Coding"/>
+                <a:cs typeface="D2Coding"/>
               </a:rPr>
               <a:t> </a:t>
             </a:r>
@@ -8464,9 +8464,9 @@
                 <a:solidFill>
                   <a:srgbClr val="E6EAF2"/>
                 </a:solidFill>
-                <a:latin typeface="나눔고딕코딩"/>
-                <a:ea typeface="나눔고딕코딩"/>
-                <a:cs typeface="나눔고딕코딩"/>
+                <a:latin typeface="D2Coding"/>
+                <a:ea typeface="D2Coding"/>
+                <a:cs typeface="D2Coding"/>
               </a:rPr>
               <a:t>html</a:t>
             </a:r>
@@ -8475,9 +8475,9 @@
                 <a:solidFill>
                   <a:srgbClr val="E6EAF2"/>
                 </a:solidFill>
-                <a:latin typeface="나눔고딕코딩"/>
-                <a:ea typeface="나눔고딕코딩"/>
-                <a:cs typeface="나눔고딕코딩"/>
+                <a:latin typeface="D2Coding"/>
+                <a:ea typeface="D2Coding"/>
+                <a:cs typeface="D2Coding"/>
               </a:rPr>
               <a:t> = </a:t>
             </a:r>
@@ -8486,9 +8486,9 @@
                 <a:solidFill>
                   <a:srgbClr val="F5C97A"/>
                 </a:solidFill>
-                <a:latin typeface="나눔고딕코딩"/>
-                <a:ea typeface="나눔고딕코딩"/>
-                <a:cs typeface="나눔고딕코딩"/>
+                <a:latin typeface="D2Coding"/>
+                <a:ea typeface="D2Coding"/>
+                <a:cs typeface="D2Coding"/>
               </a:rPr>
               <a:t>'&lt;meta charset="utf-8"&gt;&lt;h1&gt;다온유통 상품 목록&lt;/h1&gt;'</a:t>
             </a:r>
@@ -8497,9 +8497,9 @@
                 <a:solidFill>
                   <a:srgbClr val="E6EAF2"/>
                 </a:solidFill>
-                <a:latin typeface="나눔고딕코딩"/>
-                <a:ea typeface="나눔고딕코딩"/>
-                <a:cs typeface="나눔고딕코딩"/>
+                <a:latin typeface="D2Coding"/>
+                <a:ea typeface="D2Coding"/>
+                <a:cs typeface="D2Coding"/>
               </a:rPr>
               <a:t>;</a:t>
             </a:r>
@@ -8515,9 +8515,9 @@
                 <a:solidFill>
                   <a:srgbClr val="E6EAF2"/>
                 </a:solidFill>
-                <a:latin typeface="나눔고딕코딩"/>
-                <a:ea typeface="나눔고딕코딩"/>
-                <a:cs typeface="나눔고딕코딩"/>
+                <a:latin typeface="D2Coding"/>
+                <a:ea typeface="D2Coding"/>
+                <a:cs typeface="D2Coding"/>
               </a:rPr>
               <a:t>    </a:t>
             </a:r>
@@ -8526,9 +8526,9 @@
                 <a:solidFill>
                   <a:srgbClr val="E6EAF2"/>
                 </a:solidFill>
-                <a:latin typeface="나눔고딕코딩"/>
-                <a:ea typeface="나눔고딕코딩"/>
-                <a:cs typeface="나눔고딕코딩"/>
+                <a:latin typeface="D2Coding"/>
+                <a:ea typeface="D2Coding"/>
+                <a:cs typeface="D2Coding"/>
               </a:rPr>
               <a:t>html</a:t>
             </a:r>
@@ -8537,9 +8537,9 @@
                 <a:solidFill>
                   <a:srgbClr val="E6EAF2"/>
                 </a:solidFill>
-                <a:latin typeface="나눔고딕코딩"/>
-                <a:ea typeface="나눔고딕코딩"/>
-                <a:cs typeface="나눔고딕코딩"/>
+                <a:latin typeface="D2Coding"/>
+                <a:ea typeface="D2Coding"/>
+                <a:cs typeface="D2Coding"/>
               </a:rPr>
               <a:t> += </a:t>
             </a:r>
@@ -8548,9 +8548,9 @@
                 <a:solidFill>
                   <a:srgbClr val="F5C97A"/>
                 </a:solidFill>
-                <a:latin typeface="나눔고딕코딩"/>
-                <a:ea typeface="나눔고딕코딩"/>
-                <a:cs typeface="나눔고딕코딩"/>
+                <a:latin typeface="D2Coding"/>
+                <a:ea typeface="D2Coding"/>
+                <a:cs typeface="D2Coding"/>
               </a:rPr>
               <a:t>'&lt;table border="1" cellpadding="6"&gt;'</a:t>
             </a:r>
@@ -8559,9 +8559,9 @@
                 <a:solidFill>
                   <a:srgbClr val="E6EAF2"/>
                 </a:solidFill>
-                <a:latin typeface="나눔고딕코딩"/>
-                <a:ea typeface="나눔고딕코딩"/>
-                <a:cs typeface="나눔고딕코딩"/>
+                <a:latin typeface="D2Coding"/>
+                <a:ea typeface="D2Coding"/>
+                <a:cs typeface="D2Coding"/>
               </a:rPr>
               <a:t>;                     </a:t>
             </a:r>
@@ -8570,9 +8570,9 @@
                 <a:solidFill>
                   <a:srgbClr val="8F9DB5"/>
                 </a:solidFill>
-                <a:latin typeface="나눔고딕코딩"/>
-                <a:ea typeface="나눔고딕코딩"/>
-                <a:cs typeface="나눔고딕코딩"/>
+                <a:latin typeface="D2Coding"/>
+                <a:ea typeface="D2Coding"/>
+                <a:cs typeface="D2Coding"/>
               </a:rPr>
               <a:t>// 표 시작</a:t>
             </a:r>
@@ -8588,9 +8588,9 @@
                 <a:solidFill>
                   <a:srgbClr val="E6EAF2"/>
                 </a:solidFill>
-                <a:latin typeface="나눔고딕코딩"/>
-                <a:ea typeface="나눔고딕코딩"/>
-                <a:cs typeface="나눔고딕코딩"/>
+                <a:latin typeface="D2Coding"/>
+                <a:ea typeface="D2Coding"/>
+                <a:cs typeface="D2Coding"/>
               </a:rPr>
               <a:t>    </a:t>
             </a:r>
@@ -8599,9 +8599,9 @@
                 <a:solidFill>
                   <a:srgbClr val="E6EAF2"/>
                 </a:solidFill>
-                <a:latin typeface="나눔고딕코딩"/>
-                <a:ea typeface="나눔고딕코딩"/>
-                <a:cs typeface="나눔고딕코딩"/>
+                <a:latin typeface="D2Coding"/>
+                <a:ea typeface="D2Coding"/>
+                <a:cs typeface="D2Coding"/>
               </a:rPr>
               <a:t>html</a:t>
             </a:r>
@@ -8610,9 +8610,9 @@
                 <a:solidFill>
                   <a:srgbClr val="E6EAF2"/>
                 </a:solidFill>
-                <a:latin typeface="나눔고딕코딩"/>
-                <a:ea typeface="나눔고딕코딩"/>
-                <a:cs typeface="나눔고딕코딩"/>
+                <a:latin typeface="D2Coding"/>
+                <a:ea typeface="D2Coding"/>
+                <a:cs typeface="D2Coding"/>
               </a:rPr>
               <a:t> += </a:t>
             </a:r>
@@ -8621,9 +8621,9 @@
                 <a:solidFill>
                   <a:srgbClr val="F5C97A"/>
                 </a:solidFill>
-                <a:latin typeface="나눔고딕코딩"/>
-                <a:ea typeface="나눔고딕코딩"/>
-                <a:cs typeface="나눔고딕코딩"/>
+                <a:latin typeface="D2Coding"/>
+                <a:ea typeface="D2Coding"/>
+                <a:cs typeface="D2Coding"/>
               </a:rPr>
               <a:t>'&lt;tr&gt;&lt;th&gt;상품번호&lt;/th&gt;&lt;th&gt;상품명&lt;/th&gt;&lt;th&gt;카테고리&lt;/th&gt;&lt;th&gt;판매가&lt;/th&gt;&lt;th&gt;재고&lt;/th&gt;&lt;/tr&gt;'</a:t>
             </a:r>
@@ -8632,9 +8632,9 @@
                 <a:solidFill>
                   <a:srgbClr val="E6EAF2"/>
                 </a:solidFill>
-                <a:latin typeface="나눔고딕코딩"/>
-                <a:ea typeface="나눔고딕코딩"/>
-                <a:cs typeface="나눔고딕코딩"/>
+                <a:latin typeface="D2Coding"/>
+                <a:ea typeface="D2Coding"/>
+                <a:cs typeface="D2Coding"/>
               </a:rPr>
               <a:t>;</a:t>
             </a:r>
@@ -8650,9 +8650,9 @@
                 <a:solidFill>
                   <a:srgbClr val="E6EAF2"/>
                 </a:solidFill>
-                <a:latin typeface="나눔고딕코딩"/>
-                <a:ea typeface="나눔고딕코딩"/>
-                <a:cs typeface="나눔고딕코딩"/>
+                <a:latin typeface="D2Coding"/>
+                <a:ea typeface="D2Coding"/>
+                <a:cs typeface="D2Coding"/>
               </a:rPr>
               <a:t>    </a:t>
             </a:r>
@@ -8661,9 +8661,9 @@
                 <a:solidFill>
                   <a:srgbClr val="D9A7FF"/>
                 </a:solidFill>
-                <a:latin typeface="나눔고딕코딩"/>
-                <a:ea typeface="나눔고딕코딩"/>
-                <a:cs typeface="나눔고딕코딩"/>
+                <a:latin typeface="D2Coding"/>
+                <a:ea typeface="D2Coding"/>
+                <a:cs typeface="D2Coding"/>
               </a:rPr>
               <a:t>for</a:t>
             </a:r>
@@ -8672,9 +8672,9 @@
                 <a:solidFill>
                   <a:srgbClr val="E6EAF2"/>
                 </a:solidFill>
-                <a:latin typeface="나눔고딕코딩"/>
-                <a:ea typeface="나눔고딕코딩"/>
-                <a:cs typeface="나눔고딕코딩"/>
+                <a:latin typeface="D2Coding"/>
+                <a:ea typeface="D2Coding"/>
+                <a:cs typeface="D2Coding"/>
               </a:rPr>
               <a:t> (</a:t>
             </a:r>
@@ -8683,9 +8683,9 @@
                 <a:solidFill>
                   <a:srgbClr val="D9A7FF"/>
                 </a:solidFill>
-                <a:latin typeface="나눔고딕코딩"/>
-                <a:ea typeface="나눔고딕코딩"/>
-                <a:cs typeface="나눔고딕코딩"/>
+                <a:latin typeface="D2Coding"/>
+                <a:ea typeface="D2Coding"/>
+                <a:cs typeface="D2Coding"/>
               </a:rPr>
               <a:t>const</a:t>
             </a:r>
@@ -8694,9 +8694,9 @@
                 <a:solidFill>
                   <a:srgbClr val="E6EAF2"/>
                 </a:solidFill>
-                <a:latin typeface="나눔고딕코딩"/>
-                <a:ea typeface="나눔고딕코딩"/>
-                <a:cs typeface="나눔고딕코딩"/>
+                <a:latin typeface="D2Coding"/>
+                <a:ea typeface="D2Coding"/>
+                <a:cs typeface="D2Coding"/>
               </a:rPr>
               <a:t> </a:t>
             </a:r>
@@ -8705,9 +8705,9 @@
                 <a:solidFill>
                   <a:srgbClr val="E6EAF2"/>
                 </a:solidFill>
-                <a:latin typeface="나눔고딕코딩"/>
-                <a:ea typeface="나눔고딕코딩"/>
-                <a:cs typeface="나눔고딕코딩"/>
+                <a:latin typeface="D2Coding"/>
+                <a:ea typeface="D2Coding"/>
+                <a:cs typeface="D2Coding"/>
               </a:rPr>
               <a:t>p</a:t>
             </a:r>
@@ -8716,9 +8716,9 @@
                 <a:solidFill>
                   <a:srgbClr val="E6EAF2"/>
                 </a:solidFill>
-                <a:latin typeface="나눔고딕코딩"/>
-                <a:ea typeface="나눔고딕코딩"/>
-                <a:cs typeface="나눔고딕코딩"/>
+                <a:latin typeface="D2Coding"/>
+                <a:ea typeface="D2Coding"/>
+                <a:cs typeface="D2Coding"/>
               </a:rPr>
               <a:t> </a:t>
             </a:r>
@@ -8727,9 +8727,9 @@
                 <a:solidFill>
                   <a:srgbClr val="D9A7FF"/>
                 </a:solidFill>
-                <a:latin typeface="나눔고딕코딩"/>
-                <a:ea typeface="나눔고딕코딩"/>
-                <a:cs typeface="나눔고딕코딩"/>
+                <a:latin typeface="D2Coding"/>
+                <a:ea typeface="D2Coding"/>
+                <a:cs typeface="D2Coding"/>
               </a:rPr>
               <a:t>of</a:t>
             </a:r>
@@ -8738,9 +8738,9 @@
                 <a:solidFill>
                   <a:srgbClr val="E6EAF2"/>
                 </a:solidFill>
-                <a:latin typeface="나눔고딕코딩"/>
-                <a:ea typeface="나눔고딕코딩"/>
-                <a:cs typeface="나눔고딕코딩"/>
+                <a:latin typeface="D2Coding"/>
+                <a:ea typeface="D2Coding"/>
+                <a:cs typeface="D2Coding"/>
               </a:rPr>
               <a:t> </a:t>
             </a:r>
@@ -8749,9 +8749,9 @@
                 <a:solidFill>
                   <a:srgbClr val="E6EAF2"/>
                 </a:solidFill>
-                <a:latin typeface="나눔고딕코딩"/>
-                <a:ea typeface="나눔고딕코딩"/>
-                <a:cs typeface="나눔고딕코딩"/>
+                <a:latin typeface="D2Coding"/>
+                <a:ea typeface="D2Coding"/>
+                <a:cs typeface="D2Coding"/>
               </a:rPr>
               <a:t>rows</a:t>
             </a:r>
@@ -8760,9 +8760,9 @@
                 <a:solidFill>
                   <a:srgbClr val="E6EAF2"/>
                 </a:solidFill>
-                <a:latin typeface="나눔고딕코딩"/>
-                <a:ea typeface="나눔고딕코딩"/>
-                <a:cs typeface="나눔고딕코딩"/>
+                <a:latin typeface="D2Coding"/>
+                <a:ea typeface="D2Coding"/>
+                <a:cs typeface="D2Coding"/>
               </a:rPr>
               <a:t>) {</a:t>
             </a:r>
@@ -8778,9 +8778,9 @@
                 <a:solidFill>
                   <a:srgbClr val="E6EAF2"/>
                 </a:solidFill>
-                <a:latin typeface="나눔고딕코딩"/>
-                <a:ea typeface="나눔고딕코딩"/>
-                <a:cs typeface="나눔고딕코딩"/>
+                <a:latin typeface="D2Coding"/>
+                <a:ea typeface="D2Coding"/>
+                <a:cs typeface="D2Coding"/>
               </a:rPr>
               <a:t>      </a:t>
             </a:r>
@@ -8789,9 +8789,9 @@
                 <a:solidFill>
                   <a:srgbClr val="E6EAF2"/>
                 </a:solidFill>
-                <a:latin typeface="나눔고딕코딩"/>
-                <a:ea typeface="나눔고딕코딩"/>
-                <a:cs typeface="나눔고딕코딩"/>
+                <a:latin typeface="D2Coding"/>
+                <a:ea typeface="D2Coding"/>
+                <a:cs typeface="D2Coding"/>
               </a:rPr>
               <a:t>html</a:t>
             </a:r>
@@ -8800,9 +8800,9 @@
                 <a:solidFill>
                   <a:srgbClr val="E6EAF2"/>
                 </a:solidFill>
-                <a:latin typeface="나눔고딕코딩"/>
-                <a:ea typeface="나눔고딕코딩"/>
-                <a:cs typeface="나눔고딕코딩"/>
+                <a:latin typeface="D2Coding"/>
+                <a:ea typeface="D2Coding"/>
+                <a:cs typeface="D2Coding"/>
               </a:rPr>
               <a:t> += </a:t>
             </a:r>
@@ -8811,9 +8811,9 @@
                 <a:solidFill>
                   <a:srgbClr val="F5C97A"/>
                 </a:solidFill>
-                <a:latin typeface="나눔고딕코딩"/>
-                <a:ea typeface="나눔고딕코딩"/>
-                <a:cs typeface="나눔고딕코딩"/>
+                <a:latin typeface="D2Coding"/>
+                <a:ea typeface="D2Coding"/>
+                <a:cs typeface="D2Coding"/>
               </a:rPr>
               <a:t>'&lt;tr&gt;&lt;td&gt;'</a:t>
             </a:r>
@@ -8822,9 +8822,9 @@
                 <a:solidFill>
                   <a:srgbClr val="E6EAF2"/>
                 </a:solidFill>
-                <a:latin typeface="나눔고딕코딩"/>
-                <a:ea typeface="나눔고딕코딩"/>
-                <a:cs typeface="나눔고딕코딩"/>
+                <a:latin typeface="D2Coding"/>
+                <a:ea typeface="D2Coding"/>
+                <a:cs typeface="D2Coding"/>
               </a:rPr>
               <a:t> + </a:t>
             </a:r>
@@ -8833,9 +8833,9 @@
                 <a:solidFill>
                   <a:srgbClr val="E6EAF2"/>
                 </a:solidFill>
-                <a:latin typeface="나눔고딕코딩"/>
-                <a:ea typeface="나눔고딕코딩"/>
-                <a:cs typeface="나눔고딕코딩"/>
+                <a:latin typeface="D2Coding"/>
+                <a:ea typeface="D2Coding"/>
+                <a:cs typeface="D2Coding"/>
               </a:rPr>
               <a:t>p</a:t>
             </a:r>
@@ -8844,9 +8844,9 @@
                 <a:solidFill>
                   <a:srgbClr val="E6EAF2"/>
                 </a:solidFill>
-                <a:latin typeface="나눔고딕코딩"/>
-                <a:ea typeface="나눔고딕코딩"/>
-                <a:cs typeface="나눔고딕코딩"/>
+                <a:latin typeface="D2Coding"/>
+                <a:ea typeface="D2Coding"/>
+                <a:cs typeface="D2Coding"/>
               </a:rPr>
               <a:t>.</a:t>
             </a:r>
@@ -8855,9 +8855,9 @@
                 <a:solidFill>
                   <a:srgbClr val="E6EAF2"/>
                 </a:solidFill>
-                <a:latin typeface="나눔고딕코딩"/>
-                <a:ea typeface="나눔고딕코딩"/>
-                <a:cs typeface="나눔고딕코딩"/>
+                <a:latin typeface="D2Coding"/>
+                <a:ea typeface="D2Coding"/>
+                <a:cs typeface="D2Coding"/>
               </a:rPr>
               <a:t>prod_id</a:t>
             </a:r>
@@ -8866,9 +8866,9 @@
                 <a:solidFill>
                   <a:srgbClr val="E6EAF2"/>
                 </a:solidFill>
-                <a:latin typeface="나눔고딕코딩"/>
-                <a:ea typeface="나눔고딕코딩"/>
-                <a:cs typeface="나눔고딕코딩"/>
+                <a:latin typeface="D2Coding"/>
+                <a:ea typeface="D2Coding"/>
+                <a:cs typeface="D2Coding"/>
               </a:rPr>
               <a:t> + </a:t>
             </a:r>
@@ -8877,9 +8877,9 @@
                 <a:solidFill>
                   <a:srgbClr val="F5C97A"/>
                 </a:solidFill>
-                <a:latin typeface="나눔고딕코딩"/>
-                <a:ea typeface="나눔고딕코딩"/>
-                <a:cs typeface="나눔고딕코딩"/>
+                <a:latin typeface="D2Coding"/>
+                <a:ea typeface="D2Coding"/>
+                <a:cs typeface="D2Coding"/>
               </a:rPr>
               <a:t>'&lt;/td&gt;&lt;td&gt;'</a:t>
             </a:r>
@@ -8888,9 +8888,9 @@
                 <a:solidFill>
                   <a:srgbClr val="E6EAF2"/>
                 </a:solidFill>
-                <a:latin typeface="나눔고딕코딩"/>
-                <a:ea typeface="나눔고딕코딩"/>
-                <a:cs typeface="나눔고딕코딩"/>
+                <a:latin typeface="D2Coding"/>
+                <a:ea typeface="D2Coding"/>
+                <a:cs typeface="D2Coding"/>
               </a:rPr>
               <a:t> + </a:t>
             </a:r>
@@ -8899,9 +8899,9 @@
                 <a:solidFill>
                   <a:srgbClr val="E6EAF2"/>
                 </a:solidFill>
-                <a:latin typeface="나눔고딕코딩"/>
-                <a:ea typeface="나눔고딕코딩"/>
-                <a:cs typeface="나눔고딕코딩"/>
+                <a:latin typeface="D2Coding"/>
+                <a:ea typeface="D2Coding"/>
+                <a:cs typeface="D2Coding"/>
               </a:rPr>
               <a:t>p</a:t>
             </a:r>
@@ -8910,9 +8910,9 @@
                 <a:solidFill>
                   <a:srgbClr val="E6EAF2"/>
                 </a:solidFill>
-                <a:latin typeface="나눔고딕코딩"/>
-                <a:ea typeface="나눔고딕코딩"/>
-                <a:cs typeface="나눔고딕코딩"/>
+                <a:latin typeface="D2Coding"/>
+                <a:ea typeface="D2Coding"/>
+                <a:cs typeface="D2Coding"/>
               </a:rPr>
               <a:t>.</a:t>
             </a:r>
@@ -8921,9 +8921,9 @@
                 <a:solidFill>
                   <a:srgbClr val="E6EAF2"/>
                 </a:solidFill>
-                <a:latin typeface="나눔고딕코딩"/>
-                <a:ea typeface="나눔고딕코딩"/>
-                <a:cs typeface="나눔고딕코딩"/>
+                <a:latin typeface="D2Coding"/>
+                <a:ea typeface="D2Coding"/>
+                <a:cs typeface="D2Coding"/>
               </a:rPr>
               <a:t>name</a:t>
             </a:r>
@@ -8932,9 +8932,9 @@
                 <a:solidFill>
                   <a:srgbClr val="E6EAF2"/>
                 </a:solidFill>
-                <a:latin typeface="나눔고딕코딩"/>
-                <a:ea typeface="나눔고딕코딩"/>
-                <a:cs typeface="나눔고딕코딩"/>
+                <a:latin typeface="D2Coding"/>
+                <a:ea typeface="D2Coding"/>
+                <a:cs typeface="D2Coding"/>
               </a:rPr>
               <a:t> + </a:t>
             </a:r>
@@ -8943,9 +8943,9 @@
                 <a:solidFill>
                   <a:srgbClr val="F5C97A"/>
                 </a:solidFill>
-                <a:latin typeface="나눔고딕코딩"/>
-                <a:ea typeface="나눔고딕코딩"/>
-                <a:cs typeface="나눔고딕코딩"/>
+                <a:latin typeface="D2Coding"/>
+                <a:ea typeface="D2Coding"/>
+                <a:cs typeface="D2Coding"/>
               </a:rPr>
               <a:t>'&lt;/td&gt;&lt;td&gt;'</a:t>
             </a:r>
@@ -8961,9 +8961,9 @@
                 <a:solidFill>
                   <a:srgbClr val="E6EAF2"/>
                 </a:solidFill>
-                <a:latin typeface="나눔고딕코딩"/>
-                <a:ea typeface="나눔고딕코딩"/>
-                <a:cs typeface="나눔고딕코딩"/>
+                <a:latin typeface="D2Coding"/>
+                <a:ea typeface="D2Coding"/>
+                <a:cs typeface="D2Coding"/>
               </a:rPr>
               <a:t>            + </a:t>
             </a:r>
@@ -8972,9 +8972,9 @@
                 <a:solidFill>
                   <a:srgbClr val="E6EAF2"/>
                 </a:solidFill>
-                <a:latin typeface="나눔고딕코딩"/>
-                <a:ea typeface="나눔고딕코딩"/>
-                <a:cs typeface="나눔고딕코딩"/>
+                <a:latin typeface="D2Coding"/>
+                <a:ea typeface="D2Coding"/>
+                <a:cs typeface="D2Coding"/>
               </a:rPr>
               <a:t>p</a:t>
             </a:r>
@@ -8983,9 +8983,9 @@
                 <a:solidFill>
                   <a:srgbClr val="E6EAF2"/>
                 </a:solidFill>
-                <a:latin typeface="나눔고딕코딩"/>
-                <a:ea typeface="나눔고딕코딩"/>
-                <a:cs typeface="나눔고딕코딩"/>
+                <a:latin typeface="D2Coding"/>
+                <a:ea typeface="D2Coding"/>
+                <a:cs typeface="D2Coding"/>
               </a:rPr>
               <a:t>.</a:t>
             </a:r>
@@ -8994,9 +8994,9 @@
                 <a:solidFill>
                   <a:srgbClr val="E6EAF2"/>
                 </a:solidFill>
-                <a:latin typeface="나눔고딕코딩"/>
-                <a:ea typeface="나눔고딕코딩"/>
-                <a:cs typeface="나눔고딕코딩"/>
+                <a:latin typeface="D2Coding"/>
+                <a:ea typeface="D2Coding"/>
+                <a:cs typeface="D2Coding"/>
               </a:rPr>
               <a:t>category</a:t>
             </a:r>
@@ -9005,9 +9005,9 @@
                 <a:solidFill>
                   <a:srgbClr val="E6EAF2"/>
                 </a:solidFill>
-                <a:latin typeface="나눔고딕코딩"/>
-                <a:ea typeface="나눔고딕코딩"/>
-                <a:cs typeface="나눔고딕코딩"/>
+                <a:latin typeface="D2Coding"/>
+                <a:ea typeface="D2Coding"/>
+                <a:cs typeface="D2Coding"/>
               </a:rPr>
               <a:t> + </a:t>
             </a:r>
@@ -9016,9 +9016,9 @@
                 <a:solidFill>
                   <a:srgbClr val="F5C97A"/>
                 </a:solidFill>
-                <a:latin typeface="나눔고딕코딩"/>
-                <a:ea typeface="나눔고딕코딩"/>
-                <a:cs typeface="나눔고딕코딩"/>
+                <a:latin typeface="D2Coding"/>
+                <a:ea typeface="D2Coding"/>
+                <a:cs typeface="D2Coding"/>
               </a:rPr>
               <a:t>'&lt;/td&gt;&lt;td&gt;'</a:t>
             </a:r>
@@ -9027,9 +9027,9 @@
                 <a:solidFill>
                   <a:srgbClr val="E6EAF2"/>
                 </a:solidFill>
-                <a:latin typeface="나눔고딕코딩"/>
-                <a:ea typeface="나눔고딕코딩"/>
-                <a:cs typeface="나눔고딕코딩"/>
+                <a:latin typeface="D2Coding"/>
+                <a:ea typeface="D2Coding"/>
+                <a:cs typeface="D2Coding"/>
               </a:rPr>
               <a:t> + </a:t>
             </a:r>
@@ -9038,9 +9038,9 @@
                 <a:solidFill>
                   <a:srgbClr val="E6EAF2"/>
                 </a:solidFill>
-                <a:latin typeface="나눔고딕코딩"/>
-                <a:ea typeface="나눔고딕코딩"/>
-                <a:cs typeface="나눔고딕코딩"/>
+                <a:latin typeface="D2Coding"/>
+                <a:ea typeface="D2Coding"/>
+                <a:cs typeface="D2Coding"/>
               </a:rPr>
               <a:t>p</a:t>
             </a:r>
@@ -9049,9 +9049,9 @@
                 <a:solidFill>
                   <a:srgbClr val="E6EAF2"/>
                 </a:solidFill>
-                <a:latin typeface="나눔고딕코딩"/>
-                <a:ea typeface="나눔고딕코딩"/>
-                <a:cs typeface="나눔고딕코딩"/>
+                <a:latin typeface="D2Coding"/>
+                <a:ea typeface="D2Coding"/>
+                <a:cs typeface="D2Coding"/>
               </a:rPr>
               <a:t>.</a:t>
             </a:r>
@@ -9060,9 +9060,9 @@
                 <a:solidFill>
                   <a:srgbClr val="E6EAF2"/>
                 </a:solidFill>
-                <a:latin typeface="나눔고딕코딩"/>
-                <a:ea typeface="나눔고딕코딩"/>
-                <a:cs typeface="나눔고딕코딩"/>
+                <a:latin typeface="D2Coding"/>
+                <a:ea typeface="D2Coding"/>
+                <a:cs typeface="D2Coding"/>
               </a:rPr>
               <a:t>price</a:t>
             </a:r>
@@ -9071,9 +9071,9 @@
                 <a:solidFill>
                   <a:srgbClr val="E6EAF2"/>
                 </a:solidFill>
-                <a:latin typeface="나눔고딕코딩"/>
-                <a:ea typeface="나눔고딕코딩"/>
-                <a:cs typeface="나눔고딕코딩"/>
+                <a:latin typeface="D2Coding"/>
+                <a:ea typeface="D2Coding"/>
+                <a:cs typeface="D2Coding"/>
               </a:rPr>
               <a:t> + </a:t>
             </a:r>
@@ -9082,9 +9082,9 @@
                 <a:solidFill>
                   <a:srgbClr val="F5C97A"/>
                 </a:solidFill>
-                <a:latin typeface="나눔고딕코딩"/>
-                <a:ea typeface="나눔고딕코딩"/>
-                <a:cs typeface="나눔고딕코딩"/>
+                <a:latin typeface="D2Coding"/>
+                <a:ea typeface="D2Coding"/>
+                <a:cs typeface="D2Coding"/>
               </a:rPr>
               <a:t>'&lt;/td&gt;&lt;td&gt;'</a:t>
             </a:r>
@@ -9093,9 +9093,9 @@
                 <a:solidFill>
                   <a:srgbClr val="E6EAF2"/>
                 </a:solidFill>
-                <a:latin typeface="나눔고딕코딩"/>
-                <a:ea typeface="나눔고딕코딩"/>
-                <a:cs typeface="나눔고딕코딩"/>
+                <a:latin typeface="D2Coding"/>
+                <a:ea typeface="D2Coding"/>
+                <a:cs typeface="D2Coding"/>
               </a:rPr>
               <a:t> + </a:t>
             </a:r>
@@ -9104,9 +9104,9 @@
                 <a:solidFill>
                   <a:srgbClr val="E6EAF2"/>
                 </a:solidFill>
-                <a:latin typeface="나눔고딕코딩"/>
-                <a:ea typeface="나눔고딕코딩"/>
-                <a:cs typeface="나눔고딕코딩"/>
+                <a:latin typeface="D2Coding"/>
+                <a:ea typeface="D2Coding"/>
+                <a:cs typeface="D2Coding"/>
               </a:rPr>
               <a:t>p</a:t>
             </a:r>
@@ -9115,9 +9115,9 @@
                 <a:solidFill>
                   <a:srgbClr val="E6EAF2"/>
                 </a:solidFill>
-                <a:latin typeface="나눔고딕코딩"/>
-                <a:ea typeface="나눔고딕코딩"/>
-                <a:cs typeface="나눔고딕코딩"/>
+                <a:latin typeface="D2Coding"/>
+                <a:ea typeface="D2Coding"/>
+                <a:cs typeface="D2Coding"/>
               </a:rPr>
               <a:t>.</a:t>
             </a:r>
@@ -9126,9 +9126,9 @@
                 <a:solidFill>
                   <a:srgbClr val="E6EAF2"/>
                 </a:solidFill>
-                <a:latin typeface="나눔고딕코딩"/>
-                <a:ea typeface="나눔고딕코딩"/>
-                <a:cs typeface="나눔고딕코딩"/>
+                <a:latin typeface="D2Coding"/>
+                <a:ea typeface="D2Coding"/>
+                <a:cs typeface="D2Coding"/>
               </a:rPr>
               <a:t>stock</a:t>
             </a:r>
@@ -9137,9 +9137,9 @@
                 <a:solidFill>
                   <a:srgbClr val="E6EAF2"/>
                 </a:solidFill>
-                <a:latin typeface="나눔고딕코딩"/>
-                <a:ea typeface="나눔고딕코딩"/>
-                <a:cs typeface="나눔고딕코딩"/>
+                <a:latin typeface="D2Coding"/>
+                <a:ea typeface="D2Coding"/>
+                <a:cs typeface="D2Coding"/>
               </a:rPr>
               <a:t> + </a:t>
             </a:r>
@@ -9148,9 +9148,9 @@
                 <a:solidFill>
                   <a:srgbClr val="F5C97A"/>
                 </a:solidFill>
-                <a:latin typeface="나눔고딕코딩"/>
-                <a:ea typeface="나눔고딕코딩"/>
-                <a:cs typeface="나눔고딕코딩"/>
+                <a:latin typeface="D2Coding"/>
+                <a:ea typeface="D2Coding"/>
+                <a:cs typeface="D2Coding"/>
               </a:rPr>
               <a:t>'&lt;/td&gt;&lt;/tr&gt;'</a:t>
             </a:r>
@@ -9159,9 +9159,9 @@
                 <a:solidFill>
                   <a:srgbClr val="E6EAF2"/>
                 </a:solidFill>
-                <a:latin typeface="나눔고딕코딩"/>
-                <a:ea typeface="나눔고딕코딩"/>
-                <a:cs typeface="나눔고딕코딩"/>
+                <a:latin typeface="D2Coding"/>
+                <a:ea typeface="D2Coding"/>
+                <a:cs typeface="D2Coding"/>
               </a:rPr>
               <a:t>;</a:t>
             </a:r>
@@ -9177,9 +9177,9 @@
                 <a:solidFill>
                   <a:srgbClr val="E6EAF2"/>
                 </a:solidFill>
-                <a:latin typeface="나눔고딕코딩"/>
-                <a:ea typeface="나눔고딕코딩"/>
-                <a:cs typeface="나눔고딕코딩"/>
+                <a:latin typeface="D2Coding"/>
+                <a:ea typeface="D2Coding"/>
+                <a:cs typeface="D2Coding"/>
               </a:rPr>
               <a:t>    }</a:t>
             </a:r>
@@ -9195,9 +9195,9 @@
                 <a:solidFill>
                   <a:srgbClr val="E6EAF2"/>
                 </a:solidFill>
-                <a:latin typeface="나눔고딕코딩"/>
-                <a:ea typeface="나눔고딕코딩"/>
-                <a:cs typeface="나눔고딕코딩"/>
+                <a:latin typeface="D2Coding"/>
+                <a:ea typeface="D2Coding"/>
+                <a:cs typeface="D2Coding"/>
               </a:rPr>
               <a:t>    </a:t>
             </a:r>
@@ -9206,9 +9206,9 @@
                 <a:solidFill>
                   <a:srgbClr val="E6EAF2"/>
                 </a:solidFill>
-                <a:latin typeface="나눔고딕코딩"/>
-                <a:ea typeface="나눔고딕코딩"/>
-                <a:cs typeface="나눔고딕코딩"/>
+                <a:latin typeface="D2Coding"/>
+                <a:ea typeface="D2Coding"/>
+                <a:cs typeface="D2Coding"/>
               </a:rPr>
               <a:t>html</a:t>
             </a:r>
@@ -9217,9 +9217,9 @@
                 <a:solidFill>
                   <a:srgbClr val="E6EAF2"/>
                 </a:solidFill>
-                <a:latin typeface="나눔고딕코딩"/>
-                <a:ea typeface="나눔고딕코딩"/>
-                <a:cs typeface="나눔고딕코딩"/>
+                <a:latin typeface="D2Coding"/>
+                <a:ea typeface="D2Coding"/>
+                <a:cs typeface="D2Coding"/>
               </a:rPr>
               <a:t> += </a:t>
             </a:r>
@@ -9228,9 +9228,9 @@
                 <a:solidFill>
                   <a:srgbClr val="F5C97A"/>
                 </a:solidFill>
-                <a:latin typeface="나눔고딕코딩"/>
-                <a:ea typeface="나눔고딕코딩"/>
-                <a:cs typeface="나눔고딕코딩"/>
+                <a:latin typeface="D2Coding"/>
+                <a:ea typeface="D2Coding"/>
+                <a:cs typeface="D2Coding"/>
               </a:rPr>
               <a:t>'&lt;/table&gt;'</a:t>
             </a:r>
@@ -9239,9 +9239,9 @@
                 <a:solidFill>
                   <a:srgbClr val="E6EAF2"/>
                 </a:solidFill>
-                <a:latin typeface="나눔고딕코딩"/>
-                <a:ea typeface="나눔고딕코딩"/>
-                <a:cs typeface="나눔고딕코딩"/>
+                <a:latin typeface="D2Coding"/>
+                <a:ea typeface="D2Coding"/>
+                <a:cs typeface="D2Coding"/>
               </a:rPr>
               <a:t>;                                                </a:t>
             </a:r>
@@ -9250,9 +9250,9 @@
                 <a:solidFill>
                   <a:srgbClr val="8F9DB5"/>
                 </a:solidFill>
-                <a:latin typeface="나눔고딕코딩"/>
-                <a:ea typeface="나눔고딕코딩"/>
-                <a:cs typeface="나눔고딕코딩"/>
+                <a:latin typeface="D2Coding"/>
+                <a:ea typeface="D2Coding"/>
+                <a:cs typeface="D2Coding"/>
               </a:rPr>
               <a:t>// 표 끝</a:t>
             </a:r>
@@ -11020,9 +11020,9 @@
                 <a:solidFill>
                   <a:srgbClr val="7A869C"/>
                 </a:solidFill>
-                <a:latin typeface="나눔고딕코딩"/>
-                <a:ea typeface="나눔고딕코딩"/>
-                <a:cs typeface="나눔고딕코딩"/>
+                <a:latin typeface="D2Coding"/>
+                <a:ea typeface="D2Coding"/>
+                <a:cs typeface="D2Coding"/>
               </a:rPr>
               <a:t>29</a:t>
             </a:r>
@@ -11038,9 +11038,9 @@
                 <a:solidFill>
                   <a:srgbClr val="7A869C"/>
                 </a:solidFill>
-                <a:latin typeface="나눔고딕코딩"/>
-                <a:ea typeface="나눔고딕코딩"/>
-                <a:cs typeface="나눔고딕코딩"/>
+                <a:latin typeface="D2Coding"/>
+                <a:ea typeface="D2Coding"/>
+                <a:cs typeface="D2Coding"/>
               </a:rPr>
               <a:t>30</a:t>
             </a:r>
@@ -11056,9 +11056,9 @@
                 <a:solidFill>
                   <a:srgbClr val="7A869C"/>
                 </a:solidFill>
-                <a:latin typeface="나눔고딕코딩"/>
-                <a:ea typeface="나눔고딕코딩"/>
-                <a:cs typeface="나눔고딕코딩"/>
+                <a:latin typeface="D2Coding"/>
+                <a:ea typeface="D2Coding"/>
+                <a:cs typeface="D2Coding"/>
               </a:rPr>
               <a:t>31</a:t>
             </a:r>
@@ -11074,9 +11074,9 @@
                 <a:solidFill>
                   <a:srgbClr val="7A869C"/>
                 </a:solidFill>
-                <a:latin typeface="나눔고딕코딩"/>
-                <a:ea typeface="나눔고딕코딩"/>
-                <a:cs typeface="나눔고딕코딩"/>
+                <a:latin typeface="D2Coding"/>
+                <a:ea typeface="D2Coding"/>
+                <a:cs typeface="D2Coding"/>
               </a:rPr>
               <a:t>32</a:t>
             </a:r>
@@ -11092,9 +11092,9 @@
                 <a:solidFill>
                   <a:srgbClr val="7A869C"/>
                 </a:solidFill>
-                <a:latin typeface="나눔고딕코딩"/>
-                <a:ea typeface="나눔고딕코딩"/>
-                <a:cs typeface="나눔고딕코딩"/>
+                <a:latin typeface="D2Coding"/>
+                <a:ea typeface="D2Coding"/>
+                <a:cs typeface="D2Coding"/>
               </a:rPr>
               <a:t>33</a:t>
             </a:r>
@@ -11110,9 +11110,9 @@
                 <a:solidFill>
                   <a:srgbClr val="7A869C"/>
                 </a:solidFill>
-                <a:latin typeface="나눔고딕코딩"/>
-                <a:ea typeface="나눔고딕코딩"/>
-                <a:cs typeface="나눔고딕코딩"/>
+                <a:latin typeface="D2Coding"/>
+                <a:ea typeface="D2Coding"/>
+                <a:cs typeface="D2Coding"/>
               </a:rPr>
               <a:t>34</a:t>
             </a:r>
@@ -11128,9 +11128,9 @@
                 <a:solidFill>
                   <a:srgbClr val="7A869C"/>
                 </a:solidFill>
-                <a:latin typeface="나눔고딕코딩"/>
-                <a:ea typeface="나눔고딕코딩"/>
-                <a:cs typeface="나눔고딕코딩"/>
+                <a:latin typeface="D2Coding"/>
+                <a:ea typeface="D2Coding"/>
+                <a:cs typeface="D2Coding"/>
               </a:rPr>
               <a:t>35</a:t>
             </a:r>
@@ -11146,9 +11146,9 @@
                 <a:solidFill>
                   <a:srgbClr val="7A869C"/>
                 </a:solidFill>
-                <a:latin typeface="나눔고딕코딩"/>
-                <a:ea typeface="나눔고딕코딩"/>
-                <a:cs typeface="나눔고딕코딩"/>
+                <a:latin typeface="D2Coding"/>
+                <a:ea typeface="D2Coding"/>
+                <a:cs typeface="D2Coding"/>
               </a:rPr>
               <a:t>36</a:t>
             </a:r>
@@ -11164,9 +11164,9 @@
                 <a:solidFill>
                   <a:srgbClr val="7A869C"/>
                 </a:solidFill>
-                <a:latin typeface="나눔고딕코딩"/>
-                <a:ea typeface="나눔고딕코딩"/>
-                <a:cs typeface="나눔고딕코딩"/>
+                <a:latin typeface="D2Coding"/>
+                <a:ea typeface="D2Coding"/>
+                <a:cs typeface="D2Coding"/>
               </a:rPr>
               <a:t>37</a:t>
             </a:r>
@@ -11205,9 +11205,9 @@
                 <a:solidFill>
                   <a:srgbClr val="E6EAF2"/>
                 </a:solidFill>
-                <a:latin typeface="나눔고딕코딩"/>
-                <a:ea typeface="나눔고딕코딩"/>
-                <a:cs typeface="나눔고딕코딩"/>
+                <a:latin typeface="D2Coding"/>
+                <a:ea typeface="D2Coding"/>
+                <a:cs typeface="D2Coding"/>
               </a:rPr>
               <a:t>    </a:t>
             </a:r>
@@ -11216,9 +11216,9 @@
                 <a:solidFill>
                   <a:srgbClr val="E6EAF2"/>
                 </a:solidFill>
-                <a:latin typeface="나눔고딕코딩"/>
-                <a:ea typeface="나눔고딕코딩"/>
-                <a:cs typeface="나눔고딕코딩"/>
+                <a:latin typeface="D2Coding"/>
+                <a:ea typeface="D2Coding"/>
+                <a:cs typeface="D2Coding"/>
               </a:rPr>
               <a:t>res</a:t>
             </a:r>
@@ -11227,9 +11227,9 @@
                 <a:solidFill>
                   <a:srgbClr val="E6EAF2"/>
                 </a:solidFill>
-                <a:latin typeface="나눔고딕코딩"/>
-                <a:ea typeface="나눔고딕코딩"/>
-                <a:cs typeface="나눔고딕코딩"/>
+                <a:latin typeface="D2Coding"/>
+                <a:ea typeface="D2Coding"/>
+                <a:cs typeface="D2Coding"/>
               </a:rPr>
               <a:t>.</a:t>
             </a:r>
@@ -11238,9 +11238,9 @@
                 <a:solidFill>
                   <a:srgbClr val="E6EAF2"/>
                 </a:solidFill>
-                <a:latin typeface="나눔고딕코딩"/>
-                <a:ea typeface="나눔고딕코딩"/>
-                <a:cs typeface="나눔고딕코딩"/>
+                <a:latin typeface="D2Coding"/>
+                <a:ea typeface="D2Coding"/>
+                <a:cs typeface="D2Coding"/>
               </a:rPr>
               <a:t>send</a:t>
             </a:r>
@@ -11249,9 +11249,9 @@
                 <a:solidFill>
                   <a:srgbClr val="E6EAF2"/>
                 </a:solidFill>
-                <a:latin typeface="나눔고딕코딩"/>
-                <a:ea typeface="나눔고딕코딩"/>
-                <a:cs typeface="나눔고딕코딩"/>
+                <a:latin typeface="D2Coding"/>
+                <a:ea typeface="D2Coding"/>
+                <a:cs typeface="D2Coding"/>
               </a:rPr>
               <a:t>(</a:t>
             </a:r>
@@ -11260,9 +11260,9 @@
                 <a:solidFill>
                   <a:srgbClr val="E6EAF2"/>
                 </a:solidFill>
-                <a:latin typeface="나눔고딕코딩"/>
-                <a:ea typeface="나눔고딕코딩"/>
-                <a:cs typeface="나눔고딕코딩"/>
+                <a:latin typeface="D2Coding"/>
+                <a:ea typeface="D2Coding"/>
+                <a:cs typeface="D2Coding"/>
               </a:rPr>
               <a:t>html</a:t>
             </a:r>
@@ -11271,9 +11271,9 @@
                 <a:solidFill>
                   <a:srgbClr val="E6EAF2"/>
                 </a:solidFill>
-                <a:latin typeface="나눔고딕코딩"/>
-                <a:ea typeface="나눔고딕코딩"/>
-                <a:cs typeface="나눔고딕코딩"/>
+                <a:latin typeface="D2Coding"/>
+                <a:ea typeface="D2Coding"/>
+                <a:cs typeface="D2Coding"/>
               </a:rPr>
               <a:t>);</a:t>
             </a:r>
@@ -11289,9 +11289,9 @@
                 <a:solidFill>
                   <a:srgbClr val="E6EAF2"/>
                 </a:solidFill>
-                <a:latin typeface="나눔고딕코딩"/>
-                <a:ea typeface="나눔고딕코딩"/>
-                <a:cs typeface="나눔고딕코딩"/>
+                <a:latin typeface="D2Coding"/>
+                <a:ea typeface="D2Coding"/>
+                <a:cs typeface="D2Coding"/>
               </a:rPr>
               <a:t>  } </a:t>
             </a:r>
@@ -11300,9 +11300,9 @@
                 <a:solidFill>
                   <a:srgbClr val="D9A7FF"/>
                 </a:solidFill>
-                <a:latin typeface="나눔고딕코딩"/>
-                <a:ea typeface="나눔고딕코딩"/>
-                <a:cs typeface="나눔고딕코딩"/>
+                <a:latin typeface="D2Coding"/>
+                <a:ea typeface="D2Coding"/>
+                <a:cs typeface="D2Coding"/>
               </a:rPr>
               <a:t>catch</a:t>
             </a:r>
@@ -11311,9 +11311,9 @@
                 <a:solidFill>
                   <a:srgbClr val="E6EAF2"/>
                 </a:solidFill>
-                <a:latin typeface="나눔고딕코딩"/>
-                <a:ea typeface="나눔고딕코딩"/>
-                <a:cs typeface="나눔고딕코딩"/>
+                <a:latin typeface="D2Coding"/>
+                <a:ea typeface="D2Coding"/>
+                <a:cs typeface="D2Coding"/>
               </a:rPr>
               <a:t> (</a:t>
             </a:r>
@@ -11322,9 +11322,9 @@
                 <a:solidFill>
                   <a:srgbClr val="E6EAF2"/>
                 </a:solidFill>
-                <a:latin typeface="나눔고딕코딩"/>
-                <a:ea typeface="나눔고딕코딩"/>
-                <a:cs typeface="나눔고딕코딩"/>
+                <a:latin typeface="D2Coding"/>
+                <a:ea typeface="D2Coding"/>
+                <a:cs typeface="D2Coding"/>
               </a:rPr>
               <a:t>err</a:t>
             </a:r>
@@ -11333,9 +11333,9 @@
                 <a:solidFill>
                   <a:srgbClr val="E6EAF2"/>
                 </a:solidFill>
-                <a:latin typeface="나눔고딕코딩"/>
-                <a:ea typeface="나눔고딕코딩"/>
-                <a:cs typeface="나눔고딕코딩"/>
+                <a:latin typeface="D2Coding"/>
+                <a:ea typeface="D2Coding"/>
+                <a:cs typeface="D2Coding"/>
               </a:rPr>
               <a:t>) {</a:t>
             </a:r>
@@ -11351,9 +11351,9 @@
                 <a:solidFill>
                   <a:srgbClr val="E6EAF2"/>
                 </a:solidFill>
-                <a:latin typeface="나눔고딕코딩"/>
-                <a:ea typeface="나눔고딕코딩"/>
-                <a:cs typeface="나눔고딕코딩"/>
+                <a:latin typeface="D2Coding"/>
+                <a:ea typeface="D2Coding"/>
+                <a:cs typeface="D2Coding"/>
               </a:rPr>
               <a:t>    </a:t>
             </a:r>
@@ -11362,9 +11362,9 @@
                 <a:solidFill>
                   <a:srgbClr val="E6EAF2"/>
                 </a:solidFill>
-                <a:latin typeface="나눔고딕코딩"/>
-                <a:ea typeface="나눔고딕코딩"/>
-                <a:cs typeface="나눔고딕코딩"/>
+                <a:latin typeface="D2Coding"/>
+                <a:ea typeface="D2Coding"/>
+                <a:cs typeface="D2Coding"/>
               </a:rPr>
               <a:t>res</a:t>
             </a:r>
@@ -11373,9 +11373,9 @@
                 <a:solidFill>
                   <a:srgbClr val="E6EAF2"/>
                 </a:solidFill>
-                <a:latin typeface="나눔고딕코딩"/>
-                <a:ea typeface="나눔고딕코딩"/>
-                <a:cs typeface="나눔고딕코딩"/>
+                <a:latin typeface="D2Coding"/>
+                <a:ea typeface="D2Coding"/>
+                <a:cs typeface="D2Coding"/>
               </a:rPr>
               <a:t>.</a:t>
             </a:r>
@@ -11384,9 +11384,9 @@
                 <a:solidFill>
                   <a:srgbClr val="E6EAF2"/>
                 </a:solidFill>
-                <a:latin typeface="나눔고딕코딩"/>
-                <a:ea typeface="나눔고딕코딩"/>
-                <a:cs typeface="나눔고딕코딩"/>
+                <a:latin typeface="D2Coding"/>
+                <a:ea typeface="D2Coding"/>
+                <a:cs typeface="D2Coding"/>
               </a:rPr>
               <a:t>status</a:t>
             </a:r>
@@ -11395,9 +11395,9 @@
                 <a:solidFill>
                   <a:srgbClr val="E6EAF2"/>
                 </a:solidFill>
-                <a:latin typeface="나눔고딕코딩"/>
-                <a:ea typeface="나눔고딕코딩"/>
-                <a:cs typeface="나눔고딕코딩"/>
+                <a:latin typeface="D2Coding"/>
+                <a:ea typeface="D2Coding"/>
+                <a:cs typeface="D2Coding"/>
               </a:rPr>
               <a:t>(</a:t>
             </a:r>
@@ -11406,9 +11406,9 @@
                 <a:solidFill>
                   <a:srgbClr val="FFB08A"/>
                 </a:solidFill>
-                <a:latin typeface="나눔고딕코딩"/>
-                <a:ea typeface="나눔고딕코딩"/>
-                <a:cs typeface="나눔고딕코딩"/>
+                <a:latin typeface="D2Coding"/>
+                <a:ea typeface="D2Coding"/>
+                <a:cs typeface="D2Coding"/>
               </a:rPr>
               <a:t>500</a:t>
             </a:r>
@@ -11417,9 +11417,9 @@
                 <a:solidFill>
                   <a:srgbClr val="E6EAF2"/>
                 </a:solidFill>
-                <a:latin typeface="나눔고딕코딩"/>
-                <a:ea typeface="나눔고딕코딩"/>
-                <a:cs typeface="나눔고딕코딩"/>
+                <a:latin typeface="D2Coding"/>
+                <a:ea typeface="D2Coding"/>
+                <a:cs typeface="D2Coding"/>
               </a:rPr>
               <a:t>).</a:t>
             </a:r>
@@ -11428,9 +11428,9 @@
                 <a:solidFill>
                   <a:srgbClr val="E6EAF2"/>
                 </a:solidFill>
-                <a:latin typeface="나눔고딕코딩"/>
-                <a:ea typeface="나눔고딕코딩"/>
-                <a:cs typeface="나눔고딕코딩"/>
+                <a:latin typeface="D2Coding"/>
+                <a:ea typeface="D2Coding"/>
+                <a:cs typeface="D2Coding"/>
               </a:rPr>
               <a:t>send</a:t>
             </a:r>
@@ -11439,9 +11439,9 @@
                 <a:solidFill>
                   <a:srgbClr val="E6EAF2"/>
                 </a:solidFill>
-                <a:latin typeface="나눔고딕코딩"/>
-                <a:ea typeface="나눔고딕코딩"/>
-                <a:cs typeface="나눔고딕코딩"/>
+                <a:latin typeface="D2Coding"/>
+                <a:ea typeface="D2Coding"/>
+                <a:cs typeface="D2Coding"/>
               </a:rPr>
               <a:t>(</a:t>
             </a:r>
@@ -11450,9 +11450,9 @@
                 <a:solidFill>
                   <a:srgbClr val="F5C97A"/>
                 </a:solidFill>
-                <a:latin typeface="나눔고딕코딩"/>
-                <a:ea typeface="나눔고딕코딩"/>
-                <a:cs typeface="나눔고딕코딩"/>
+                <a:latin typeface="D2Coding"/>
+                <a:ea typeface="D2Coding"/>
+                <a:cs typeface="D2Coding"/>
               </a:rPr>
               <a:t>'조회 실패: '</a:t>
             </a:r>
@@ -11461,9 +11461,9 @@
                 <a:solidFill>
                   <a:srgbClr val="E6EAF2"/>
                 </a:solidFill>
-                <a:latin typeface="나눔고딕코딩"/>
-                <a:ea typeface="나눔고딕코딩"/>
-                <a:cs typeface="나눔고딕코딩"/>
+                <a:latin typeface="D2Coding"/>
+                <a:ea typeface="D2Coding"/>
+                <a:cs typeface="D2Coding"/>
               </a:rPr>
               <a:t> + </a:t>
             </a:r>
@@ -11472,9 +11472,9 @@
                 <a:solidFill>
                   <a:srgbClr val="E6EAF2"/>
                 </a:solidFill>
-                <a:latin typeface="나눔고딕코딩"/>
-                <a:ea typeface="나눔고딕코딩"/>
-                <a:cs typeface="나눔고딕코딩"/>
+                <a:latin typeface="D2Coding"/>
+                <a:ea typeface="D2Coding"/>
+                <a:cs typeface="D2Coding"/>
               </a:rPr>
               <a:t>err</a:t>
             </a:r>
@@ -11483,9 +11483,9 @@
                 <a:solidFill>
                   <a:srgbClr val="E6EAF2"/>
                 </a:solidFill>
-                <a:latin typeface="나눔고딕코딩"/>
-                <a:ea typeface="나눔고딕코딩"/>
-                <a:cs typeface="나눔고딕코딩"/>
+                <a:latin typeface="D2Coding"/>
+                <a:ea typeface="D2Coding"/>
+                <a:cs typeface="D2Coding"/>
               </a:rPr>
               <a:t>.</a:t>
             </a:r>
@@ -11494,9 +11494,9 @@
                 <a:solidFill>
                   <a:srgbClr val="E6EAF2"/>
                 </a:solidFill>
-                <a:latin typeface="나눔고딕코딩"/>
-                <a:ea typeface="나눔고딕코딩"/>
-                <a:cs typeface="나눔고딕코딩"/>
+                <a:latin typeface="D2Coding"/>
+                <a:ea typeface="D2Coding"/>
+                <a:cs typeface="D2Coding"/>
               </a:rPr>
               <a:t>message</a:t>
             </a:r>
@@ -11505,9 +11505,9 @@
                 <a:solidFill>
                   <a:srgbClr val="E6EAF2"/>
                 </a:solidFill>
-                <a:latin typeface="나눔고딕코딩"/>
-                <a:ea typeface="나눔고딕코딩"/>
-                <a:cs typeface="나눔고딕코딩"/>
+                <a:latin typeface="D2Coding"/>
+                <a:ea typeface="D2Coding"/>
+                <a:cs typeface="D2Coding"/>
               </a:rPr>
               <a:t>);</a:t>
             </a:r>
@@ -11523,9 +11523,9 @@
                 <a:solidFill>
                   <a:srgbClr val="E6EAF2"/>
                 </a:solidFill>
-                <a:latin typeface="나눔고딕코딩"/>
-                <a:ea typeface="나눔고딕코딩"/>
-                <a:cs typeface="나눔고딕코딩"/>
+                <a:latin typeface="D2Coding"/>
+                <a:ea typeface="D2Coding"/>
+                <a:cs typeface="D2Coding"/>
               </a:rPr>
               <a:t>  }</a:t>
             </a:r>
@@ -11541,9 +11541,9 @@
                 <a:solidFill>
                   <a:srgbClr val="E6EAF2"/>
                 </a:solidFill>
-                <a:latin typeface="나눔고딕코딩"/>
-                <a:ea typeface="나눔고딕코딩"/>
-                <a:cs typeface="나눔고딕코딩"/>
+                <a:latin typeface="D2Coding"/>
+                <a:ea typeface="D2Coding"/>
+                <a:cs typeface="D2Coding"/>
               </a:rPr>
               <a:t>});</a:t>
             </a:r>
@@ -11559,9 +11559,9 @@
                 <a:solidFill>
                   <a:srgbClr val="E6EAF2"/>
                 </a:solidFill>
-                <a:latin typeface="나눔고딕코딩"/>
-                <a:ea typeface="나눔고딕코딩"/>
-                <a:cs typeface="나눔고딕코딩"/>
+                <a:latin typeface="D2Coding"/>
+                <a:ea typeface="D2Coding"/>
+                <a:cs typeface="D2Coding"/>
               </a:rPr>
               <a:t/>
             </a:r>
@@ -11577,9 +11577,9 @@
                 <a:solidFill>
                   <a:srgbClr val="E6EAF2"/>
                 </a:solidFill>
-                <a:latin typeface="나눔고딕코딩"/>
-                <a:ea typeface="나눔고딕코딩"/>
-                <a:cs typeface="나눔고딕코딩"/>
+                <a:latin typeface="D2Coding"/>
+                <a:ea typeface="D2Coding"/>
+                <a:cs typeface="D2Coding"/>
               </a:rPr>
               <a:t>app</a:t>
             </a:r>
@@ -11588,9 +11588,9 @@
                 <a:solidFill>
                   <a:srgbClr val="E6EAF2"/>
                 </a:solidFill>
-                <a:latin typeface="나눔고딕코딩"/>
-                <a:ea typeface="나눔고딕코딩"/>
-                <a:cs typeface="나눔고딕코딩"/>
+                <a:latin typeface="D2Coding"/>
+                <a:ea typeface="D2Coding"/>
+                <a:cs typeface="D2Coding"/>
               </a:rPr>
               <a:t>.</a:t>
             </a:r>
@@ -11599,9 +11599,9 @@
                 <a:solidFill>
                   <a:srgbClr val="E6EAF2"/>
                 </a:solidFill>
-                <a:latin typeface="나눔고딕코딩"/>
-                <a:ea typeface="나눔고딕코딩"/>
-                <a:cs typeface="나눔고딕코딩"/>
+                <a:latin typeface="D2Coding"/>
+                <a:ea typeface="D2Coding"/>
+                <a:cs typeface="D2Coding"/>
               </a:rPr>
               <a:t>listen</a:t>
             </a:r>
@@ -11610,9 +11610,9 @@
                 <a:solidFill>
                   <a:srgbClr val="E6EAF2"/>
                 </a:solidFill>
-                <a:latin typeface="나눔고딕코딩"/>
-                <a:ea typeface="나눔고딕코딩"/>
-                <a:cs typeface="나눔고딕코딩"/>
+                <a:latin typeface="D2Coding"/>
+                <a:ea typeface="D2Coding"/>
+                <a:cs typeface="D2Coding"/>
               </a:rPr>
               <a:t>(</a:t>
             </a:r>
@@ -11621,9 +11621,9 @@
                 <a:solidFill>
                   <a:srgbClr val="FFB08A"/>
                 </a:solidFill>
-                <a:latin typeface="나눔고딕코딩"/>
-                <a:ea typeface="나눔고딕코딩"/>
-                <a:cs typeface="나눔고딕코딩"/>
+                <a:latin typeface="D2Coding"/>
+                <a:ea typeface="D2Coding"/>
+                <a:cs typeface="D2Coding"/>
               </a:rPr>
               <a:t>3000</a:t>
             </a:r>
@@ -11632,9 +11632,9 @@
                 <a:solidFill>
                   <a:srgbClr val="E6EAF2"/>
                 </a:solidFill>
-                <a:latin typeface="나눔고딕코딩"/>
-                <a:ea typeface="나눔고딕코딩"/>
-                <a:cs typeface="나눔고딕코딩"/>
+                <a:latin typeface="D2Coding"/>
+                <a:ea typeface="D2Coding"/>
+                <a:cs typeface="D2Coding"/>
               </a:rPr>
               <a:t>, () =&gt; {</a:t>
             </a:r>
@@ -11650,9 +11650,9 @@
                 <a:solidFill>
                   <a:srgbClr val="E6EAF2"/>
                 </a:solidFill>
-                <a:latin typeface="나눔고딕코딩"/>
-                <a:ea typeface="나눔고딕코딩"/>
-                <a:cs typeface="나눔고딕코딩"/>
+                <a:latin typeface="D2Coding"/>
+                <a:ea typeface="D2Coding"/>
+                <a:cs typeface="D2Coding"/>
               </a:rPr>
               <a:t>  </a:t>
             </a:r>
@@ -11661,9 +11661,9 @@
                 <a:solidFill>
                   <a:srgbClr val="E6EAF2"/>
                 </a:solidFill>
-                <a:latin typeface="나눔고딕코딩"/>
-                <a:ea typeface="나눔고딕코딩"/>
-                <a:cs typeface="나눔고딕코딩"/>
+                <a:latin typeface="D2Coding"/>
+                <a:ea typeface="D2Coding"/>
+                <a:cs typeface="D2Coding"/>
               </a:rPr>
               <a:t>console</a:t>
             </a:r>
@@ -11672,9 +11672,9 @@
                 <a:solidFill>
                   <a:srgbClr val="E6EAF2"/>
                 </a:solidFill>
-                <a:latin typeface="나눔고딕코딩"/>
-                <a:ea typeface="나눔고딕코딩"/>
-                <a:cs typeface="나눔고딕코딩"/>
+                <a:latin typeface="D2Coding"/>
+                <a:ea typeface="D2Coding"/>
+                <a:cs typeface="D2Coding"/>
               </a:rPr>
               <a:t>.</a:t>
             </a:r>
@@ -11683,9 +11683,9 @@
                 <a:solidFill>
                   <a:srgbClr val="E6EAF2"/>
                 </a:solidFill>
-                <a:latin typeface="나눔고딕코딩"/>
-                <a:ea typeface="나눔고딕코딩"/>
-                <a:cs typeface="나눔고딕코딩"/>
+                <a:latin typeface="D2Coding"/>
+                <a:ea typeface="D2Coding"/>
+                <a:cs typeface="D2Coding"/>
               </a:rPr>
               <a:t>log</a:t>
             </a:r>
@@ -11694,9 +11694,9 @@
                 <a:solidFill>
                   <a:srgbClr val="E6EAF2"/>
                 </a:solidFill>
-                <a:latin typeface="나눔고딕코딩"/>
-                <a:ea typeface="나눔고딕코딩"/>
-                <a:cs typeface="나눔고딕코딩"/>
+                <a:latin typeface="D2Coding"/>
+                <a:ea typeface="D2Coding"/>
+                <a:cs typeface="D2Coding"/>
               </a:rPr>
               <a:t>(</a:t>
             </a:r>
@@ -11705,9 +11705,9 @@
                 <a:solidFill>
                   <a:srgbClr val="F5C97A"/>
                 </a:solidFill>
-                <a:latin typeface="나눔고딕코딩"/>
-                <a:ea typeface="나눔고딕코딩"/>
-                <a:cs typeface="나눔고딕코딩"/>
+                <a:latin typeface="D2Coding"/>
+                <a:ea typeface="D2Coding"/>
+                <a:cs typeface="D2Coding"/>
               </a:rPr>
               <a:t>'서버 실행 중: http://localhost:3000/products'</a:t>
             </a:r>
@@ -11716,9 +11716,9 @@
                 <a:solidFill>
                   <a:srgbClr val="E6EAF2"/>
                 </a:solidFill>
-                <a:latin typeface="나눔고딕코딩"/>
-                <a:ea typeface="나눔고딕코딩"/>
-                <a:cs typeface="나눔고딕코딩"/>
+                <a:latin typeface="D2Coding"/>
+                <a:ea typeface="D2Coding"/>
+                <a:cs typeface="D2Coding"/>
               </a:rPr>
               <a:t>);</a:t>
             </a:r>
@@ -11734,9 +11734,9 @@
                 <a:solidFill>
                   <a:srgbClr val="E6EAF2"/>
                 </a:solidFill>
-                <a:latin typeface="나눔고딕코딩"/>
-                <a:ea typeface="나눔고딕코딩"/>
-                <a:cs typeface="나눔고딕코딩"/>
+                <a:latin typeface="D2Coding"/>
+                <a:ea typeface="D2Coding"/>
+                <a:cs typeface="D2Coding"/>
               </a:rPr>
               <a:t>});</a:t>
             </a:r>
@@ -12438,9 +12438,9 @@
                 <a:solidFill>
                   <a:srgbClr val="E6EAF2"/>
                 </a:solidFill>
-                <a:latin typeface="나눔고딕코딩"/>
-                <a:ea typeface="나눔고딕코딩"/>
-                <a:cs typeface="나눔고딕코딩"/>
+                <a:latin typeface="D2Coding"/>
+                <a:ea typeface="D2Coding"/>
+                <a:cs typeface="D2Coding"/>
               </a:rPr>
               <a:t>node app.js</a:t>
             </a:r>
@@ -12657,9 +12657,9 @@
                 <a:solidFill>
                   <a:srgbClr val="E6EAF2"/>
                 </a:solidFill>
-                <a:latin typeface="나눔고딕코딩"/>
-                <a:ea typeface="나눔고딕코딩"/>
-                <a:cs typeface="나눔고딕코딩"/>
+                <a:latin typeface="D2Coding"/>
+                <a:ea typeface="D2Coding"/>
+                <a:cs typeface="D2Coding"/>
               </a:rPr>
               <a:t>http://localhost:3000/products</a:t>
             </a:r>
@@ -12876,9 +12876,9 @@
                 <a:solidFill>
                   <a:srgbClr val="E6EAF2"/>
                 </a:solidFill>
-                <a:latin typeface="나눔고딕코딩"/>
-                <a:ea typeface="나눔고딕코딩"/>
-                <a:cs typeface="나눔고딕코딩"/>
+                <a:latin typeface="D2Coding"/>
+                <a:ea typeface="D2Coding"/>
+                <a:cs typeface="D2Coding"/>
               </a:rPr>
               <a:t>Ctrl+C</a:t>
             </a:r>
@@ -13095,9 +13095,9 @@
                 <a:solidFill>
                   <a:srgbClr val="E6EAF2"/>
                 </a:solidFill>
-                <a:latin typeface="나눔고딕코딩"/>
-                <a:ea typeface="나눔고딕코딩"/>
-                <a:cs typeface="나눔고딕코딩"/>
+                <a:latin typeface="D2Coding"/>
+                <a:ea typeface="D2Coding"/>
+                <a:cs typeface="D2Coding"/>
               </a:rPr>
               <a:t>node app.js</a:t>
             </a:r>
@@ -18148,9 +18148,9 @@
                 <a:solidFill>
                   <a:srgbClr val="7A869C"/>
                 </a:solidFill>
-                <a:latin typeface="나눔고딕코딩"/>
-                <a:ea typeface="나눔고딕코딩"/>
-                <a:cs typeface="나눔고딕코딩"/>
+                <a:latin typeface="D2Coding"/>
+                <a:ea typeface="D2Coding"/>
+                <a:cs typeface="D2Coding"/>
               </a:rPr>
               <a:t>1</a:t>
             </a:r>
@@ -18166,9 +18166,9 @@
                 <a:solidFill>
                   <a:srgbClr val="7A869C"/>
                 </a:solidFill>
-                <a:latin typeface="나눔고딕코딩"/>
-                <a:ea typeface="나눔고딕코딩"/>
-                <a:cs typeface="나눔고딕코딩"/>
+                <a:latin typeface="D2Coding"/>
+                <a:ea typeface="D2Coding"/>
+                <a:cs typeface="D2Coding"/>
               </a:rPr>
               <a:t>2</a:t>
             </a:r>
@@ -18184,9 +18184,9 @@
                 <a:solidFill>
                   <a:srgbClr val="7A869C"/>
                 </a:solidFill>
-                <a:latin typeface="나눔고딕코딩"/>
-                <a:ea typeface="나눔고딕코딩"/>
-                <a:cs typeface="나눔고딕코딩"/>
+                <a:latin typeface="D2Coding"/>
+                <a:ea typeface="D2Coding"/>
+                <a:cs typeface="D2Coding"/>
               </a:rPr>
               <a:t>3</a:t>
             </a:r>
@@ -18202,9 +18202,9 @@
                 <a:solidFill>
                   <a:srgbClr val="7A869C"/>
                 </a:solidFill>
-                <a:latin typeface="나눔고딕코딩"/>
-                <a:ea typeface="나눔고딕코딩"/>
-                <a:cs typeface="나눔고딕코딩"/>
+                <a:latin typeface="D2Coding"/>
+                <a:ea typeface="D2Coding"/>
+                <a:cs typeface="D2Coding"/>
               </a:rPr>
               <a:t>4</a:t>
             </a:r>
@@ -18220,9 +18220,9 @@
                 <a:solidFill>
                   <a:srgbClr val="7A869C"/>
                 </a:solidFill>
-                <a:latin typeface="나눔고딕코딩"/>
-                <a:ea typeface="나눔고딕코딩"/>
-                <a:cs typeface="나눔고딕코딩"/>
+                <a:latin typeface="D2Coding"/>
+                <a:ea typeface="D2Coding"/>
+                <a:cs typeface="D2Coding"/>
               </a:rPr>
               <a:t>5</a:t>
             </a:r>
@@ -18238,9 +18238,9 @@
                 <a:solidFill>
                   <a:srgbClr val="7A869C"/>
                 </a:solidFill>
-                <a:latin typeface="나눔고딕코딩"/>
-                <a:ea typeface="나눔고딕코딩"/>
-                <a:cs typeface="나눔고딕코딩"/>
+                <a:latin typeface="D2Coding"/>
+                <a:ea typeface="D2Coding"/>
+                <a:cs typeface="D2Coding"/>
               </a:rPr>
               <a:t>6</a:t>
             </a:r>
@@ -18256,9 +18256,9 @@
                 <a:solidFill>
                   <a:srgbClr val="7A869C"/>
                 </a:solidFill>
-                <a:latin typeface="나눔고딕코딩"/>
-                <a:ea typeface="나눔고딕코딩"/>
-                <a:cs typeface="나눔고딕코딩"/>
+                <a:latin typeface="D2Coding"/>
+                <a:ea typeface="D2Coding"/>
+                <a:cs typeface="D2Coding"/>
               </a:rPr>
               <a:t>7</a:t>
             </a:r>
@@ -18274,9 +18274,9 @@
                 <a:solidFill>
                   <a:srgbClr val="7A869C"/>
                 </a:solidFill>
-                <a:latin typeface="나눔고딕코딩"/>
-                <a:ea typeface="나눔고딕코딩"/>
-                <a:cs typeface="나눔고딕코딩"/>
+                <a:latin typeface="D2Coding"/>
+                <a:ea typeface="D2Coding"/>
+                <a:cs typeface="D2Coding"/>
               </a:rPr>
               <a:t>8</a:t>
             </a:r>
@@ -18292,9 +18292,9 @@
                 <a:solidFill>
                   <a:srgbClr val="7A869C"/>
                 </a:solidFill>
-                <a:latin typeface="나눔고딕코딩"/>
-                <a:ea typeface="나눔고딕코딩"/>
-                <a:cs typeface="나눔고딕코딩"/>
+                <a:latin typeface="D2Coding"/>
+                <a:ea typeface="D2Coding"/>
+                <a:cs typeface="D2Coding"/>
               </a:rPr>
               <a:t>9</a:t>
             </a:r>
@@ -18310,9 +18310,9 @@
                 <a:solidFill>
                   <a:srgbClr val="7A869C"/>
                 </a:solidFill>
-                <a:latin typeface="나눔고딕코딩"/>
-                <a:ea typeface="나눔고딕코딩"/>
-                <a:cs typeface="나눔고딕코딩"/>
+                <a:latin typeface="D2Coding"/>
+                <a:ea typeface="D2Coding"/>
+                <a:cs typeface="D2Coding"/>
               </a:rPr>
               <a:t>10</a:t>
             </a:r>
@@ -18328,9 +18328,9 @@
                 <a:solidFill>
                   <a:srgbClr val="7A869C"/>
                 </a:solidFill>
-                <a:latin typeface="나눔고딕코딩"/>
-                <a:ea typeface="나눔고딕코딩"/>
-                <a:cs typeface="나눔고딕코딩"/>
+                <a:latin typeface="D2Coding"/>
+                <a:ea typeface="D2Coding"/>
+                <a:cs typeface="D2Coding"/>
               </a:rPr>
               <a:t>11</a:t>
             </a:r>
@@ -18346,9 +18346,9 @@
                 <a:solidFill>
                   <a:srgbClr val="7A869C"/>
                 </a:solidFill>
-                <a:latin typeface="나눔고딕코딩"/>
-                <a:ea typeface="나눔고딕코딩"/>
-                <a:cs typeface="나눔고딕코딩"/>
+                <a:latin typeface="D2Coding"/>
+                <a:ea typeface="D2Coding"/>
+                <a:cs typeface="D2Coding"/>
               </a:rPr>
               <a:t>12</a:t>
             </a:r>
@@ -18364,9 +18364,9 @@
                 <a:solidFill>
                   <a:srgbClr val="7A869C"/>
                 </a:solidFill>
-                <a:latin typeface="나눔고딕코딩"/>
-                <a:ea typeface="나눔고딕코딩"/>
-                <a:cs typeface="나눔고딕코딩"/>
+                <a:latin typeface="D2Coding"/>
+                <a:ea typeface="D2Coding"/>
+                <a:cs typeface="D2Coding"/>
               </a:rPr>
               <a:t>13</a:t>
             </a:r>
@@ -18382,9 +18382,9 @@
                 <a:solidFill>
                   <a:srgbClr val="7A869C"/>
                 </a:solidFill>
-                <a:latin typeface="나눔고딕코딩"/>
-                <a:ea typeface="나눔고딕코딩"/>
-                <a:cs typeface="나눔고딕코딩"/>
+                <a:latin typeface="D2Coding"/>
+                <a:ea typeface="D2Coding"/>
+                <a:cs typeface="D2Coding"/>
               </a:rPr>
               <a:t>14</a:t>
             </a:r>
@@ -18400,9 +18400,9 @@
                 <a:solidFill>
                   <a:srgbClr val="7A869C"/>
                 </a:solidFill>
-                <a:latin typeface="나눔고딕코딩"/>
-                <a:ea typeface="나눔고딕코딩"/>
-                <a:cs typeface="나눔고딕코딩"/>
+                <a:latin typeface="D2Coding"/>
+                <a:ea typeface="D2Coding"/>
+                <a:cs typeface="D2Coding"/>
               </a:rPr>
               <a:t>15</a:t>
             </a:r>
@@ -18418,9 +18418,9 @@
                 <a:solidFill>
                   <a:srgbClr val="7A869C"/>
                 </a:solidFill>
-                <a:latin typeface="나눔고딕코딩"/>
-                <a:ea typeface="나눔고딕코딩"/>
-                <a:cs typeface="나눔고딕코딩"/>
+                <a:latin typeface="D2Coding"/>
+                <a:ea typeface="D2Coding"/>
+                <a:cs typeface="D2Coding"/>
               </a:rPr>
               <a:t>16</a:t>
             </a:r>
@@ -18436,9 +18436,9 @@
                 <a:solidFill>
                   <a:srgbClr val="7A869C"/>
                 </a:solidFill>
-                <a:latin typeface="나눔고딕코딩"/>
-                <a:ea typeface="나눔고딕코딩"/>
-                <a:cs typeface="나눔고딕코딩"/>
+                <a:latin typeface="D2Coding"/>
+                <a:ea typeface="D2Coding"/>
+                <a:cs typeface="D2Coding"/>
               </a:rPr>
               <a:t>17</a:t>
             </a:r>
@@ -18454,9 +18454,9 @@
                 <a:solidFill>
                   <a:srgbClr val="7A869C"/>
                 </a:solidFill>
-                <a:latin typeface="나눔고딕코딩"/>
-                <a:ea typeface="나눔고딕코딩"/>
-                <a:cs typeface="나눔고딕코딩"/>
+                <a:latin typeface="D2Coding"/>
+                <a:ea typeface="D2Coding"/>
+                <a:cs typeface="D2Coding"/>
               </a:rPr>
               <a:t>18</a:t>
             </a:r>
@@ -18472,9 +18472,9 @@
                 <a:solidFill>
                   <a:srgbClr val="7A869C"/>
                 </a:solidFill>
-                <a:latin typeface="나눔고딕코딩"/>
-                <a:ea typeface="나눔고딕코딩"/>
-                <a:cs typeface="나눔고딕코딩"/>
+                <a:latin typeface="D2Coding"/>
+                <a:ea typeface="D2Coding"/>
+                <a:cs typeface="D2Coding"/>
               </a:rPr>
               <a:t>19</a:t>
             </a:r>
@@ -18513,9 +18513,9 @@
                 <a:solidFill>
                   <a:srgbClr val="E6EAF2"/>
                 </a:solidFill>
-                <a:latin typeface="나눔고딕코딩"/>
-                <a:ea typeface="나눔고딕코딩"/>
-                <a:cs typeface="나눔고딕코딩"/>
+                <a:latin typeface="D2Coding"/>
+                <a:ea typeface="D2Coding"/>
+                <a:cs typeface="D2Coding"/>
               </a:rPr>
               <a:t>app</a:t>
             </a:r>
@@ -18524,9 +18524,9 @@
                 <a:solidFill>
                   <a:srgbClr val="E6EAF2"/>
                 </a:solidFill>
-                <a:latin typeface="나눔고딕코딩"/>
-                <a:ea typeface="나눔고딕코딩"/>
-                <a:cs typeface="나눔고딕코딩"/>
+                <a:latin typeface="D2Coding"/>
+                <a:ea typeface="D2Coding"/>
+                <a:cs typeface="D2Coding"/>
               </a:rPr>
               <a:t>.</a:t>
             </a:r>
@@ -18535,9 +18535,9 @@
                 <a:solidFill>
                   <a:srgbClr val="D9A7FF"/>
                 </a:solidFill>
-                <a:latin typeface="나눔고딕코딩"/>
-                <a:ea typeface="나눔고딕코딩"/>
-                <a:cs typeface="나눔고딕코딩"/>
+                <a:latin typeface="D2Coding"/>
+                <a:ea typeface="D2Coding"/>
+                <a:cs typeface="D2Coding"/>
               </a:rPr>
               <a:t>get</a:t>
             </a:r>
@@ -18546,9 +18546,9 @@
                 <a:solidFill>
                   <a:srgbClr val="E6EAF2"/>
                 </a:solidFill>
-                <a:latin typeface="나눔고딕코딩"/>
-                <a:ea typeface="나눔고딕코딩"/>
-                <a:cs typeface="나눔고딕코딩"/>
+                <a:latin typeface="D2Coding"/>
+                <a:ea typeface="D2Coding"/>
+                <a:cs typeface="D2Coding"/>
               </a:rPr>
               <a:t>(</a:t>
             </a:r>
@@ -18557,9 +18557,9 @@
                 <a:solidFill>
                   <a:srgbClr val="F5C97A"/>
                 </a:solidFill>
-                <a:latin typeface="나눔고딕코딩"/>
-                <a:ea typeface="나눔고딕코딩"/>
-                <a:cs typeface="나눔고딕코딩"/>
+                <a:latin typeface="D2Coding"/>
+                <a:ea typeface="D2Coding"/>
+                <a:cs typeface="D2Coding"/>
               </a:rPr>
               <a:t>'/search'</a:t>
             </a:r>
@@ -18568,9 +18568,9 @@
                 <a:solidFill>
                   <a:srgbClr val="E6EAF2"/>
                 </a:solidFill>
-                <a:latin typeface="나눔고딕코딩"/>
-                <a:ea typeface="나눔고딕코딩"/>
-                <a:cs typeface="나눔고딕코딩"/>
+                <a:latin typeface="D2Coding"/>
+                <a:ea typeface="D2Coding"/>
+                <a:cs typeface="D2Coding"/>
               </a:rPr>
               <a:t>, </a:t>
             </a:r>
@@ -18579,9 +18579,9 @@
                 <a:solidFill>
                   <a:srgbClr val="D9A7FF"/>
                 </a:solidFill>
-                <a:latin typeface="나눔고딕코딩"/>
-                <a:ea typeface="나눔고딕코딩"/>
-                <a:cs typeface="나눔고딕코딩"/>
+                <a:latin typeface="D2Coding"/>
+                <a:ea typeface="D2Coding"/>
+                <a:cs typeface="D2Coding"/>
               </a:rPr>
               <a:t>async</a:t>
             </a:r>
@@ -18590,9 +18590,9 @@
                 <a:solidFill>
                   <a:srgbClr val="E6EAF2"/>
                 </a:solidFill>
-                <a:latin typeface="나눔고딕코딩"/>
-                <a:ea typeface="나눔고딕코딩"/>
-                <a:cs typeface="나눔고딕코딩"/>
+                <a:latin typeface="D2Coding"/>
+                <a:ea typeface="D2Coding"/>
+                <a:cs typeface="D2Coding"/>
               </a:rPr>
               <a:t> (</a:t>
             </a:r>
@@ -18601,9 +18601,9 @@
                 <a:solidFill>
                   <a:srgbClr val="E6EAF2"/>
                 </a:solidFill>
-                <a:latin typeface="나눔고딕코딩"/>
-                <a:ea typeface="나눔고딕코딩"/>
-                <a:cs typeface="나눔고딕코딩"/>
+                <a:latin typeface="D2Coding"/>
+                <a:ea typeface="D2Coding"/>
+                <a:cs typeface="D2Coding"/>
               </a:rPr>
               <a:t>req</a:t>
             </a:r>
@@ -18612,9 +18612,9 @@
                 <a:solidFill>
                   <a:srgbClr val="E6EAF2"/>
                 </a:solidFill>
-                <a:latin typeface="나눔고딕코딩"/>
-                <a:ea typeface="나눔고딕코딩"/>
-                <a:cs typeface="나눔고딕코딩"/>
+                <a:latin typeface="D2Coding"/>
+                <a:ea typeface="D2Coding"/>
+                <a:cs typeface="D2Coding"/>
               </a:rPr>
               <a:t>, </a:t>
             </a:r>
@@ -18623,9 +18623,9 @@
                 <a:solidFill>
                   <a:srgbClr val="E6EAF2"/>
                 </a:solidFill>
-                <a:latin typeface="나눔고딕코딩"/>
-                <a:ea typeface="나눔고딕코딩"/>
-                <a:cs typeface="나눔고딕코딩"/>
+                <a:latin typeface="D2Coding"/>
+                <a:ea typeface="D2Coding"/>
+                <a:cs typeface="D2Coding"/>
               </a:rPr>
               <a:t>res</a:t>
             </a:r>
@@ -18634,9 +18634,9 @@
                 <a:solidFill>
                   <a:srgbClr val="E6EAF2"/>
                 </a:solidFill>
-                <a:latin typeface="나눔고딕코딩"/>
-                <a:ea typeface="나눔고딕코딩"/>
-                <a:cs typeface="나눔고딕코딩"/>
+                <a:latin typeface="D2Coding"/>
+                <a:ea typeface="D2Coding"/>
+                <a:cs typeface="D2Coding"/>
               </a:rPr>
               <a:t>) =&gt; {</a:t>
             </a:r>
@@ -18652,9 +18652,9 @@
                 <a:solidFill>
                   <a:srgbClr val="E6EAF2"/>
                 </a:solidFill>
-                <a:latin typeface="나눔고딕코딩"/>
-                <a:ea typeface="나눔고딕코딩"/>
-                <a:cs typeface="나눔고딕코딩"/>
+                <a:latin typeface="D2Coding"/>
+                <a:ea typeface="D2Coding"/>
+                <a:cs typeface="D2Coding"/>
               </a:rPr>
               <a:t>  </a:t>
             </a:r>
@@ -18663,9 +18663,9 @@
                 <a:solidFill>
                   <a:srgbClr val="D9A7FF"/>
                 </a:solidFill>
-                <a:latin typeface="나눔고딕코딩"/>
-                <a:ea typeface="나눔고딕코딩"/>
-                <a:cs typeface="나눔고딕코딩"/>
+                <a:latin typeface="D2Coding"/>
+                <a:ea typeface="D2Coding"/>
+                <a:cs typeface="D2Coding"/>
               </a:rPr>
               <a:t>try</a:t>
             </a:r>
@@ -18674,9 +18674,9 @@
                 <a:solidFill>
                   <a:srgbClr val="E6EAF2"/>
                 </a:solidFill>
-                <a:latin typeface="나눔고딕코딩"/>
-                <a:ea typeface="나눔고딕코딩"/>
-                <a:cs typeface="나눔고딕코딩"/>
+                <a:latin typeface="D2Coding"/>
+                <a:ea typeface="D2Coding"/>
+                <a:cs typeface="D2Coding"/>
               </a:rPr>
               <a:t> {</a:t>
             </a:r>
@@ -18692,9 +18692,9 @@
                 <a:solidFill>
                   <a:srgbClr val="E6EAF2"/>
                 </a:solidFill>
-                <a:latin typeface="나눔고딕코딩"/>
-                <a:ea typeface="나눔고딕코딩"/>
-                <a:cs typeface="나눔고딕코딩"/>
+                <a:latin typeface="D2Coding"/>
+                <a:ea typeface="D2Coding"/>
+                <a:cs typeface="D2Coding"/>
               </a:rPr>
               <a:t>    </a:t>
             </a:r>
@@ -18703,9 +18703,9 @@
                 <a:solidFill>
                   <a:srgbClr val="D9A7FF"/>
                 </a:solidFill>
-                <a:latin typeface="나눔고딕코딩"/>
-                <a:ea typeface="나눔고딕코딩"/>
-                <a:cs typeface="나눔고딕코딩"/>
+                <a:latin typeface="D2Coding"/>
+                <a:ea typeface="D2Coding"/>
+                <a:cs typeface="D2Coding"/>
               </a:rPr>
               <a:t>const</a:t>
             </a:r>
@@ -18714,9 +18714,9 @@
                 <a:solidFill>
                   <a:srgbClr val="E6EAF2"/>
                 </a:solidFill>
-                <a:latin typeface="나눔고딕코딩"/>
-                <a:ea typeface="나눔고딕코딩"/>
-                <a:cs typeface="나눔고딕코딩"/>
+                <a:latin typeface="D2Coding"/>
+                <a:ea typeface="D2Coding"/>
+                <a:cs typeface="D2Coding"/>
               </a:rPr>
               <a:t> </a:t>
             </a:r>
@@ -18725,9 +18725,9 @@
                 <a:solidFill>
                   <a:srgbClr val="E6EAF2"/>
                 </a:solidFill>
-                <a:latin typeface="나눔고딕코딩"/>
-                <a:ea typeface="나눔고딕코딩"/>
-                <a:cs typeface="나눔고딕코딩"/>
+                <a:latin typeface="D2Coding"/>
+                <a:ea typeface="D2Coding"/>
+                <a:cs typeface="D2Coding"/>
               </a:rPr>
               <a:t>category</a:t>
             </a:r>
@@ -18736,9 +18736,9 @@
                 <a:solidFill>
                   <a:srgbClr val="E6EAF2"/>
                 </a:solidFill>
-                <a:latin typeface="나눔고딕코딩"/>
-                <a:ea typeface="나눔고딕코딩"/>
-                <a:cs typeface="나눔고딕코딩"/>
+                <a:latin typeface="D2Coding"/>
+                <a:ea typeface="D2Coding"/>
+                <a:cs typeface="D2Coding"/>
               </a:rPr>
               <a:t> = </a:t>
             </a:r>
@@ -18747,9 +18747,9 @@
                 <a:solidFill>
                   <a:srgbClr val="E6EAF2"/>
                 </a:solidFill>
-                <a:latin typeface="나눔고딕코딩"/>
-                <a:ea typeface="나눔고딕코딩"/>
-                <a:cs typeface="나눔고딕코딩"/>
+                <a:latin typeface="D2Coding"/>
+                <a:ea typeface="D2Coding"/>
+                <a:cs typeface="D2Coding"/>
               </a:rPr>
               <a:t>req</a:t>
             </a:r>
@@ -18758,9 +18758,9 @@
                 <a:solidFill>
                   <a:srgbClr val="E6EAF2"/>
                 </a:solidFill>
-                <a:latin typeface="나눔고딕코딩"/>
-                <a:ea typeface="나눔고딕코딩"/>
-                <a:cs typeface="나눔고딕코딩"/>
+                <a:latin typeface="D2Coding"/>
+                <a:ea typeface="D2Coding"/>
+                <a:cs typeface="D2Coding"/>
               </a:rPr>
               <a:t>.</a:t>
             </a:r>
@@ -18769,9 +18769,9 @@
                 <a:solidFill>
                   <a:srgbClr val="E6EAF2"/>
                 </a:solidFill>
-                <a:latin typeface="나눔고딕코딩"/>
-                <a:ea typeface="나눔고딕코딩"/>
-                <a:cs typeface="나눔고딕코딩"/>
+                <a:latin typeface="D2Coding"/>
+                <a:ea typeface="D2Coding"/>
+                <a:cs typeface="D2Coding"/>
               </a:rPr>
               <a:t>query</a:t>
             </a:r>
@@ -18780,9 +18780,9 @@
                 <a:solidFill>
                   <a:srgbClr val="E6EAF2"/>
                 </a:solidFill>
-                <a:latin typeface="나눔고딕코딩"/>
-                <a:ea typeface="나눔고딕코딩"/>
-                <a:cs typeface="나눔고딕코딩"/>
+                <a:latin typeface="D2Coding"/>
+                <a:ea typeface="D2Coding"/>
+                <a:cs typeface="D2Coding"/>
               </a:rPr>
               <a:t>.</a:t>
             </a:r>
@@ -18791,9 +18791,9 @@
                 <a:solidFill>
                   <a:srgbClr val="E6EAF2"/>
                 </a:solidFill>
-                <a:latin typeface="나눔고딕코딩"/>
-                <a:ea typeface="나눔고딕코딩"/>
-                <a:cs typeface="나눔고딕코딩"/>
+                <a:latin typeface="D2Coding"/>
+                <a:ea typeface="D2Coding"/>
+                <a:cs typeface="D2Coding"/>
               </a:rPr>
               <a:t>category</a:t>
             </a:r>
@@ -18802,9 +18802,9 @@
                 <a:solidFill>
                   <a:srgbClr val="E6EAF2"/>
                 </a:solidFill>
-                <a:latin typeface="나눔고딕코딩"/>
-                <a:ea typeface="나눔고딕코딩"/>
-                <a:cs typeface="나눔고딕코딩"/>
+                <a:latin typeface="D2Coding"/>
+                <a:ea typeface="D2Coding"/>
+                <a:cs typeface="D2Coding"/>
               </a:rPr>
               <a:t>;   </a:t>
             </a:r>
@@ -18813,9 +18813,9 @@
                 <a:solidFill>
                   <a:srgbClr val="8F9DB5"/>
                 </a:solidFill>
-                <a:latin typeface="나눔고딕코딩"/>
-                <a:ea typeface="나눔고딕코딩"/>
-                <a:cs typeface="나눔고딕코딩"/>
+                <a:latin typeface="D2Coding"/>
+                <a:ea typeface="D2Coding"/>
+                <a:cs typeface="D2Coding"/>
               </a:rPr>
               <a:t>// 쿼리스트링에서 값 읽기 (예: '식품')</a:t>
             </a:r>
@@ -18831,9 +18831,9 @@
                 <a:solidFill>
                   <a:srgbClr val="E6EAF2"/>
                 </a:solidFill>
-                <a:latin typeface="나눔고딕코딩"/>
-                <a:ea typeface="나눔고딕코딩"/>
-                <a:cs typeface="나눔고딕코딩"/>
+                <a:latin typeface="D2Coding"/>
+                <a:ea typeface="D2Coding"/>
+                <a:cs typeface="D2Coding"/>
               </a:rPr>
               <a:t/>
             </a:r>
@@ -18849,9 +18849,9 @@
                 <a:solidFill>
                   <a:srgbClr val="E6EAF2"/>
                 </a:solidFill>
-                <a:latin typeface="나눔고딕코딩"/>
-                <a:ea typeface="나눔고딕코딩"/>
-                <a:cs typeface="나눔고딕코딩"/>
+                <a:latin typeface="D2Coding"/>
+                <a:ea typeface="D2Coding"/>
+                <a:cs typeface="D2Coding"/>
               </a:rPr>
               <a:t>    </a:t>
             </a:r>
@@ -18860,9 +18860,9 @@
                 <a:solidFill>
                   <a:srgbClr val="D9A7FF"/>
                 </a:solidFill>
-                <a:latin typeface="나눔고딕코딩"/>
-                <a:ea typeface="나눔고딕코딩"/>
-                <a:cs typeface="나눔고딕코딩"/>
+                <a:latin typeface="D2Coding"/>
+                <a:ea typeface="D2Coding"/>
+                <a:cs typeface="D2Coding"/>
               </a:rPr>
               <a:t>const</a:t>
             </a:r>
@@ -18871,9 +18871,9 @@
                 <a:solidFill>
                   <a:srgbClr val="E6EAF2"/>
                 </a:solidFill>
-                <a:latin typeface="나눔고딕코딩"/>
-                <a:ea typeface="나눔고딕코딩"/>
-                <a:cs typeface="나눔고딕코딩"/>
+                <a:latin typeface="D2Coding"/>
+                <a:ea typeface="D2Coding"/>
+                <a:cs typeface="D2Coding"/>
               </a:rPr>
               <a:t> [</a:t>
             </a:r>
@@ -18882,9 +18882,9 @@
                 <a:solidFill>
                   <a:srgbClr val="E6EAF2"/>
                 </a:solidFill>
-                <a:latin typeface="나눔고딕코딩"/>
-                <a:ea typeface="나눔고딕코딩"/>
-                <a:cs typeface="나눔고딕코딩"/>
+                <a:latin typeface="D2Coding"/>
+                <a:ea typeface="D2Coding"/>
+                <a:cs typeface="D2Coding"/>
               </a:rPr>
               <a:t>rows</a:t>
             </a:r>
@@ -18893,9 +18893,9 @@
                 <a:solidFill>
                   <a:srgbClr val="E6EAF2"/>
                 </a:solidFill>
-                <a:latin typeface="나눔고딕코딩"/>
-                <a:ea typeface="나눔고딕코딩"/>
-                <a:cs typeface="나눔고딕코딩"/>
+                <a:latin typeface="D2Coding"/>
+                <a:ea typeface="D2Coding"/>
+                <a:cs typeface="D2Coding"/>
               </a:rPr>
               <a:t>] = </a:t>
             </a:r>
@@ -18904,9 +18904,9 @@
                 <a:solidFill>
                   <a:srgbClr val="D9A7FF"/>
                 </a:solidFill>
-                <a:latin typeface="나눔고딕코딩"/>
-                <a:ea typeface="나눔고딕코딩"/>
-                <a:cs typeface="나눔고딕코딩"/>
+                <a:latin typeface="D2Coding"/>
+                <a:ea typeface="D2Coding"/>
+                <a:cs typeface="D2Coding"/>
               </a:rPr>
               <a:t>await</a:t>
             </a:r>
@@ -18915,9 +18915,9 @@
                 <a:solidFill>
                   <a:srgbClr val="E6EAF2"/>
                 </a:solidFill>
-                <a:latin typeface="나눔고딕코딩"/>
-                <a:ea typeface="나눔고딕코딩"/>
-                <a:cs typeface="나눔고딕코딩"/>
+                <a:latin typeface="D2Coding"/>
+                <a:ea typeface="D2Coding"/>
+                <a:cs typeface="D2Coding"/>
               </a:rPr>
               <a:t> </a:t>
             </a:r>
@@ -18926,9 +18926,9 @@
                 <a:solidFill>
                   <a:srgbClr val="E6EAF2"/>
                 </a:solidFill>
-                <a:latin typeface="나눔고딕코딩"/>
-                <a:ea typeface="나눔고딕코딩"/>
-                <a:cs typeface="나눔고딕코딩"/>
+                <a:latin typeface="D2Coding"/>
+                <a:ea typeface="D2Coding"/>
+                <a:cs typeface="D2Coding"/>
               </a:rPr>
               <a:t>pool</a:t>
             </a:r>
@@ -18937,9 +18937,9 @@
                 <a:solidFill>
                   <a:srgbClr val="E6EAF2"/>
                 </a:solidFill>
-                <a:latin typeface="나눔고딕코딩"/>
-                <a:ea typeface="나눔고딕코딩"/>
-                <a:cs typeface="나눔고딕코딩"/>
+                <a:latin typeface="D2Coding"/>
+                <a:ea typeface="D2Coding"/>
+                <a:cs typeface="D2Coding"/>
               </a:rPr>
               <a:t>.</a:t>
             </a:r>
@@ -18948,9 +18948,9 @@
                 <a:solidFill>
                   <a:srgbClr val="E6EAF2"/>
                 </a:solidFill>
-                <a:latin typeface="나눔고딕코딩"/>
-                <a:ea typeface="나눔고딕코딩"/>
-                <a:cs typeface="나눔고딕코딩"/>
+                <a:latin typeface="D2Coding"/>
+                <a:ea typeface="D2Coding"/>
+                <a:cs typeface="D2Coding"/>
               </a:rPr>
               <a:t>query</a:t>
             </a:r>
@@ -18959,9 +18959,9 @@
                 <a:solidFill>
                   <a:srgbClr val="E6EAF2"/>
                 </a:solidFill>
-                <a:latin typeface="나눔고딕코딩"/>
-                <a:ea typeface="나눔고딕코딩"/>
-                <a:cs typeface="나눔고딕코딩"/>
+                <a:latin typeface="D2Coding"/>
+                <a:ea typeface="D2Coding"/>
+                <a:cs typeface="D2Coding"/>
               </a:rPr>
               <a:t>(</a:t>
             </a:r>
@@ -18977,9 +18977,9 @@
                 <a:solidFill>
                   <a:srgbClr val="E6EAF2"/>
                 </a:solidFill>
-                <a:latin typeface="나눔고딕코딩"/>
-                <a:ea typeface="나눔고딕코딩"/>
-                <a:cs typeface="나눔고딕코딩"/>
+                <a:latin typeface="D2Coding"/>
+                <a:ea typeface="D2Coding"/>
+                <a:cs typeface="D2Coding"/>
               </a:rPr>
               <a:t>      </a:t>
             </a:r>
@@ -18988,9 +18988,9 @@
                 <a:solidFill>
                   <a:srgbClr val="F5C97A"/>
                 </a:solidFill>
-                <a:latin typeface="나눔고딕코딩"/>
-                <a:ea typeface="나눔고딕코딩"/>
-                <a:cs typeface="나눔고딕코딩"/>
+                <a:latin typeface="D2Coding"/>
+                <a:ea typeface="D2Coding"/>
+                <a:cs typeface="D2Coding"/>
               </a:rPr>
               <a:t>'SELECT prod_id, name, price, stock FROM products WHERE category = ? ORDER BY prod_id'</a:t>
             </a:r>
@@ -18999,9 +18999,9 @@
                 <a:solidFill>
                   <a:srgbClr val="E6EAF2"/>
                 </a:solidFill>
-                <a:latin typeface="나눔고딕코딩"/>
-                <a:ea typeface="나눔고딕코딩"/>
-                <a:cs typeface="나눔고딕코딩"/>
+                <a:latin typeface="D2Coding"/>
+                <a:ea typeface="D2Coding"/>
+                <a:cs typeface="D2Coding"/>
               </a:rPr>
               <a:t>,</a:t>
             </a:r>
@@ -19017,9 +19017,9 @@
                 <a:solidFill>
                   <a:srgbClr val="E6EAF2"/>
                 </a:solidFill>
-                <a:latin typeface="나눔고딕코딩"/>
-                <a:ea typeface="나눔고딕코딩"/>
-                <a:cs typeface="나눔고딕코딩"/>
+                <a:latin typeface="D2Coding"/>
+                <a:ea typeface="D2Coding"/>
+                <a:cs typeface="D2Coding"/>
               </a:rPr>
               <a:t>      [</a:t>
             </a:r>
@@ -19028,9 +19028,9 @@
                 <a:solidFill>
                   <a:srgbClr val="E6EAF2"/>
                 </a:solidFill>
-                <a:latin typeface="나눔고딕코딩"/>
-                <a:ea typeface="나눔고딕코딩"/>
-                <a:cs typeface="나눔고딕코딩"/>
+                <a:latin typeface="D2Coding"/>
+                <a:ea typeface="D2Coding"/>
+                <a:cs typeface="D2Coding"/>
               </a:rPr>
               <a:t>category</a:t>
             </a:r>
@@ -19039,9 +19039,9 @@
                 <a:solidFill>
                   <a:srgbClr val="E6EAF2"/>
                 </a:solidFill>
-                <a:latin typeface="나눔고딕코딩"/>
-                <a:ea typeface="나눔고딕코딩"/>
-                <a:cs typeface="나눔고딕코딩"/>
+                <a:latin typeface="D2Coding"/>
+                <a:ea typeface="D2Coding"/>
+                <a:cs typeface="D2Coding"/>
               </a:rPr>
               <a:t>]   </a:t>
             </a:r>
@@ -19050,9 +19050,9 @@
                 <a:solidFill>
                   <a:srgbClr val="8F9DB5"/>
                 </a:solidFill>
-                <a:latin typeface="나눔고딕코딩"/>
-                <a:ea typeface="나눔고딕코딩"/>
-                <a:cs typeface="나눔고딕코딩"/>
+                <a:latin typeface="D2Coding"/>
+                <a:ea typeface="D2Coding"/>
+                <a:cs typeface="D2Coding"/>
               </a:rPr>
               <a:t>// ? 자리에 값이 안전하게 들어간다 (파라미터 바인딩)</a:t>
             </a:r>
@@ -19068,9 +19068,9 @@
                 <a:solidFill>
                   <a:srgbClr val="E6EAF2"/>
                 </a:solidFill>
-                <a:latin typeface="나눔고딕코딩"/>
-                <a:ea typeface="나눔고딕코딩"/>
-                <a:cs typeface="나눔고딕코딩"/>
+                <a:latin typeface="D2Coding"/>
+                <a:ea typeface="D2Coding"/>
+                <a:cs typeface="D2Coding"/>
               </a:rPr>
               <a:t>    );</a:t>
             </a:r>
@@ -19086,9 +19086,9 @@
                 <a:solidFill>
                   <a:srgbClr val="E6EAF2"/>
                 </a:solidFill>
-                <a:latin typeface="나눔고딕코딩"/>
-                <a:ea typeface="나눔고딕코딩"/>
-                <a:cs typeface="나눔고딕코딩"/>
+                <a:latin typeface="D2Coding"/>
+                <a:ea typeface="D2Coding"/>
+                <a:cs typeface="D2Coding"/>
               </a:rPr>
               <a:t/>
             </a:r>
@@ -19104,9 +19104,9 @@
                 <a:solidFill>
                   <a:srgbClr val="E6EAF2"/>
                 </a:solidFill>
-                <a:latin typeface="나눔고딕코딩"/>
-                <a:ea typeface="나눔고딕코딩"/>
-                <a:cs typeface="나눔고딕코딩"/>
+                <a:latin typeface="D2Coding"/>
+                <a:ea typeface="D2Coding"/>
+                <a:cs typeface="D2Coding"/>
               </a:rPr>
               <a:t>    </a:t>
             </a:r>
@@ -19115,9 +19115,9 @@
                 <a:solidFill>
                   <a:srgbClr val="D9A7FF"/>
                 </a:solidFill>
-                <a:latin typeface="나눔고딕코딩"/>
-                <a:ea typeface="나눔고딕코딩"/>
-                <a:cs typeface="나눔고딕코딩"/>
+                <a:latin typeface="D2Coding"/>
+                <a:ea typeface="D2Coding"/>
+                <a:cs typeface="D2Coding"/>
               </a:rPr>
               <a:t>let</a:t>
             </a:r>
@@ -19126,9 +19126,9 @@
                 <a:solidFill>
                   <a:srgbClr val="E6EAF2"/>
                 </a:solidFill>
-                <a:latin typeface="나눔고딕코딩"/>
-                <a:ea typeface="나눔고딕코딩"/>
-                <a:cs typeface="나눔고딕코딩"/>
+                <a:latin typeface="D2Coding"/>
+                <a:ea typeface="D2Coding"/>
+                <a:cs typeface="D2Coding"/>
               </a:rPr>
               <a:t> </a:t>
             </a:r>
@@ -19137,9 +19137,9 @@
                 <a:solidFill>
                   <a:srgbClr val="E6EAF2"/>
                 </a:solidFill>
-                <a:latin typeface="나눔고딕코딩"/>
-                <a:ea typeface="나눔고딕코딩"/>
-                <a:cs typeface="나눔고딕코딩"/>
+                <a:latin typeface="D2Coding"/>
+                <a:ea typeface="D2Coding"/>
+                <a:cs typeface="D2Coding"/>
               </a:rPr>
               <a:t>html</a:t>
             </a:r>
@@ -19148,9 +19148,9 @@
                 <a:solidFill>
                   <a:srgbClr val="E6EAF2"/>
                 </a:solidFill>
-                <a:latin typeface="나눔고딕코딩"/>
-                <a:ea typeface="나눔고딕코딩"/>
-                <a:cs typeface="나눔고딕코딩"/>
+                <a:latin typeface="D2Coding"/>
+                <a:ea typeface="D2Coding"/>
+                <a:cs typeface="D2Coding"/>
               </a:rPr>
               <a:t> = </a:t>
             </a:r>
@@ -19159,9 +19159,9 @@
                 <a:solidFill>
                   <a:srgbClr val="F5C97A"/>
                 </a:solidFill>
-                <a:latin typeface="나눔고딕코딩"/>
-                <a:ea typeface="나눔고딕코딩"/>
-                <a:cs typeface="나눔고딕코딩"/>
+                <a:latin typeface="D2Coding"/>
+                <a:ea typeface="D2Coding"/>
+                <a:cs typeface="D2Coding"/>
               </a:rPr>
               <a:t>'&lt;meta charset="utf-8"&gt;&lt;h1&gt;'</a:t>
             </a:r>
@@ -19170,9 +19170,9 @@
                 <a:solidFill>
                   <a:srgbClr val="E6EAF2"/>
                 </a:solidFill>
-                <a:latin typeface="나눔고딕코딩"/>
-                <a:ea typeface="나눔고딕코딩"/>
-                <a:cs typeface="나눔고딕코딩"/>
+                <a:latin typeface="D2Coding"/>
+                <a:ea typeface="D2Coding"/>
+                <a:cs typeface="D2Coding"/>
               </a:rPr>
               <a:t> + </a:t>
             </a:r>
@@ -19181,9 +19181,9 @@
                 <a:solidFill>
                   <a:srgbClr val="E6EAF2"/>
                 </a:solidFill>
-                <a:latin typeface="나눔고딕코딩"/>
-                <a:ea typeface="나눔고딕코딩"/>
-                <a:cs typeface="나눔고딕코딩"/>
+                <a:latin typeface="D2Coding"/>
+                <a:ea typeface="D2Coding"/>
+                <a:cs typeface="D2Coding"/>
               </a:rPr>
               <a:t>category</a:t>
             </a:r>
@@ -19192,9 +19192,9 @@
                 <a:solidFill>
                   <a:srgbClr val="E6EAF2"/>
                 </a:solidFill>
-                <a:latin typeface="나눔고딕코딩"/>
-                <a:ea typeface="나눔고딕코딩"/>
-                <a:cs typeface="나눔고딕코딩"/>
+                <a:latin typeface="D2Coding"/>
+                <a:ea typeface="D2Coding"/>
+                <a:cs typeface="D2Coding"/>
               </a:rPr>
               <a:t> + </a:t>
             </a:r>
@@ -19203,9 +19203,9 @@
                 <a:solidFill>
                   <a:srgbClr val="F5C97A"/>
                 </a:solidFill>
-                <a:latin typeface="나눔고딕코딩"/>
-                <a:ea typeface="나눔고딕코딩"/>
-                <a:cs typeface="나눔고딕코딩"/>
+                <a:latin typeface="D2Coding"/>
+                <a:ea typeface="D2Coding"/>
+                <a:cs typeface="D2Coding"/>
               </a:rPr>
               <a:t>' 상품&lt;/h1&gt;&lt;ul&gt;'</a:t>
             </a:r>
@@ -19214,9 +19214,9 @@
                 <a:solidFill>
                   <a:srgbClr val="E6EAF2"/>
                 </a:solidFill>
-                <a:latin typeface="나눔고딕코딩"/>
-                <a:ea typeface="나눔고딕코딩"/>
-                <a:cs typeface="나눔고딕코딩"/>
+                <a:latin typeface="D2Coding"/>
+                <a:ea typeface="D2Coding"/>
+                <a:cs typeface="D2Coding"/>
               </a:rPr>
               <a:t>;</a:t>
             </a:r>
@@ -19232,9 +19232,9 @@
                 <a:solidFill>
                   <a:srgbClr val="E6EAF2"/>
                 </a:solidFill>
-                <a:latin typeface="나눔고딕코딩"/>
-                <a:ea typeface="나눔고딕코딩"/>
-                <a:cs typeface="나눔고딕코딩"/>
+                <a:latin typeface="D2Coding"/>
+                <a:ea typeface="D2Coding"/>
+                <a:cs typeface="D2Coding"/>
               </a:rPr>
               <a:t>    </a:t>
             </a:r>
@@ -19243,9 +19243,9 @@
                 <a:solidFill>
                   <a:srgbClr val="D9A7FF"/>
                 </a:solidFill>
-                <a:latin typeface="나눔고딕코딩"/>
-                <a:ea typeface="나눔고딕코딩"/>
-                <a:cs typeface="나눔고딕코딩"/>
+                <a:latin typeface="D2Coding"/>
+                <a:ea typeface="D2Coding"/>
+                <a:cs typeface="D2Coding"/>
               </a:rPr>
               <a:t>for</a:t>
             </a:r>
@@ -19254,9 +19254,9 @@
                 <a:solidFill>
                   <a:srgbClr val="E6EAF2"/>
                 </a:solidFill>
-                <a:latin typeface="나눔고딕코딩"/>
-                <a:ea typeface="나눔고딕코딩"/>
-                <a:cs typeface="나눔고딕코딩"/>
+                <a:latin typeface="D2Coding"/>
+                <a:ea typeface="D2Coding"/>
+                <a:cs typeface="D2Coding"/>
               </a:rPr>
               <a:t> (</a:t>
             </a:r>
@@ -19265,9 +19265,9 @@
                 <a:solidFill>
                   <a:srgbClr val="D9A7FF"/>
                 </a:solidFill>
-                <a:latin typeface="나눔고딕코딩"/>
-                <a:ea typeface="나눔고딕코딩"/>
-                <a:cs typeface="나눔고딕코딩"/>
+                <a:latin typeface="D2Coding"/>
+                <a:ea typeface="D2Coding"/>
+                <a:cs typeface="D2Coding"/>
               </a:rPr>
               <a:t>const</a:t>
             </a:r>
@@ -19276,9 +19276,9 @@
                 <a:solidFill>
                   <a:srgbClr val="E6EAF2"/>
                 </a:solidFill>
-                <a:latin typeface="나눔고딕코딩"/>
-                <a:ea typeface="나눔고딕코딩"/>
-                <a:cs typeface="나눔고딕코딩"/>
+                <a:latin typeface="D2Coding"/>
+                <a:ea typeface="D2Coding"/>
+                <a:cs typeface="D2Coding"/>
               </a:rPr>
               <a:t> </a:t>
             </a:r>
@@ -19287,9 +19287,9 @@
                 <a:solidFill>
                   <a:srgbClr val="E6EAF2"/>
                 </a:solidFill>
-                <a:latin typeface="나눔고딕코딩"/>
-                <a:ea typeface="나눔고딕코딩"/>
-                <a:cs typeface="나눔고딕코딩"/>
+                <a:latin typeface="D2Coding"/>
+                <a:ea typeface="D2Coding"/>
+                <a:cs typeface="D2Coding"/>
               </a:rPr>
               <a:t>p</a:t>
             </a:r>
@@ -19298,9 +19298,9 @@
                 <a:solidFill>
                   <a:srgbClr val="E6EAF2"/>
                 </a:solidFill>
-                <a:latin typeface="나눔고딕코딩"/>
-                <a:ea typeface="나눔고딕코딩"/>
-                <a:cs typeface="나눔고딕코딩"/>
+                <a:latin typeface="D2Coding"/>
+                <a:ea typeface="D2Coding"/>
+                <a:cs typeface="D2Coding"/>
               </a:rPr>
               <a:t> </a:t>
             </a:r>
@@ -19309,9 +19309,9 @@
                 <a:solidFill>
                   <a:srgbClr val="D9A7FF"/>
                 </a:solidFill>
-                <a:latin typeface="나눔고딕코딩"/>
-                <a:ea typeface="나눔고딕코딩"/>
-                <a:cs typeface="나눔고딕코딩"/>
+                <a:latin typeface="D2Coding"/>
+                <a:ea typeface="D2Coding"/>
+                <a:cs typeface="D2Coding"/>
               </a:rPr>
               <a:t>of</a:t>
             </a:r>
@@ -19320,9 +19320,9 @@
                 <a:solidFill>
                   <a:srgbClr val="E6EAF2"/>
                 </a:solidFill>
-                <a:latin typeface="나눔고딕코딩"/>
-                <a:ea typeface="나눔고딕코딩"/>
-                <a:cs typeface="나눔고딕코딩"/>
+                <a:latin typeface="D2Coding"/>
+                <a:ea typeface="D2Coding"/>
+                <a:cs typeface="D2Coding"/>
               </a:rPr>
               <a:t> </a:t>
             </a:r>
@@ -19331,9 +19331,9 @@
                 <a:solidFill>
                   <a:srgbClr val="E6EAF2"/>
                 </a:solidFill>
-                <a:latin typeface="나눔고딕코딩"/>
-                <a:ea typeface="나눔고딕코딩"/>
-                <a:cs typeface="나눔고딕코딩"/>
+                <a:latin typeface="D2Coding"/>
+                <a:ea typeface="D2Coding"/>
+                <a:cs typeface="D2Coding"/>
               </a:rPr>
               <a:t>rows</a:t>
             </a:r>
@@ -19342,9 +19342,9 @@
                 <a:solidFill>
                   <a:srgbClr val="E6EAF2"/>
                 </a:solidFill>
-                <a:latin typeface="나눔고딕코딩"/>
-                <a:ea typeface="나눔고딕코딩"/>
-                <a:cs typeface="나눔고딕코딩"/>
+                <a:latin typeface="D2Coding"/>
+                <a:ea typeface="D2Coding"/>
+                <a:cs typeface="D2Coding"/>
               </a:rPr>
               <a:t>) {</a:t>
             </a:r>
@@ -19360,9 +19360,9 @@
                 <a:solidFill>
                   <a:srgbClr val="E6EAF2"/>
                 </a:solidFill>
-                <a:latin typeface="나눔고딕코딩"/>
-                <a:ea typeface="나눔고딕코딩"/>
-                <a:cs typeface="나눔고딕코딩"/>
+                <a:latin typeface="D2Coding"/>
+                <a:ea typeface="D2Coding"/>
+                <a:cs typeface="D2Coding"/>
               </a:rPr>
               <a:t>      </a:t>
             </a:r>
@@ -19371,9 +19371,9 @@
                 <a:solidFill>
                   <a:srgbClr val="E6EAF2"/>
                 </a:solidFill>
-                <a:latin typeface="나눔고딕코딩"/>
-                <a:ea typeface="나눔고딕코딩"/>
-                <a:cs typeface="나눔고딕코딩"/>
+                <a:latin typeface="D2Coding"/>
+                <a:ea typeface="D2Coding"/>
+                <a:cs typeface="D2Coding"/>
               </a:rPr>
               <a:t>html</a:t>
             </a:r>
@@ -19382,9 +19382,9 @@
                 <a:solidFill>
                   <a:srgbClr val="E6EAF2"/>
                 </a:solidFill>
-                <a:latin typeface="나눔고딕코딩"/>
-                <a:ea typeface="나눔고딕코딩"/>
-                <a:cs typeface="나눔고딕코딩"/>
+                <a:latin typeface="D2Coding"/>
+                <a:ea typeface="D2Coding"/>
+                <a:cs typeface="D2Coding"/>
               </a:rPr>
               <a:t> += </a:t>
             </a:r>
@@ -19393,9 +19393,9 @@
                 <a:solidFill>
                   <a:srgbClr val="F5C97A"/>
                 </a:solidFill>
-                <a:latin typeface="나눔고딕코딩"/>
-                <a:ea typeface="나눔고딕코딩"/>
-                <a:cs typeface="나눔고딕코딩"/>
+                <a:latin typeface="D2Coding"/>
+                <a:ea typeface="D2Coding"/>
+                <a:cs typeface="D2Coding"/>
               </a:rPr>
               <a:t>'&lt;li&gt;'</a:t>
             </a:r>
@@ -19404,9 +19404,9 @@
                 <a:solidFill>
                   <a:srgbClr val="E6EAF2"/>
                 </a:solidFill>
-                <a:latin typeface="나눔고딕코딩"/>
-                <a:ea typeface="나눔고딕코딩"/>
-                <a:cs typeface="나눔고딕코딩"/>
+                <a:latin typeface="D2Coding"/>
+                <a:ea typeface="D2Coding"/>
+                <a:cs typeface="D2Coding"/>
               </a:rPr>
               <a:t> + </a:t>
             </a:r>
@@ -19415,9 +19415,9 @@
                 <a:solidFill>
                   <a:srgbClr val="E6EAF2"/>
                 </a:solidFill>
-                <a:latin typeface="나눔고딕코딩"/>
-                <a:ea typeface="나눔고딕코딩"/>
-                <a:cs typeface="나눔고딕코딩"/>
+                <a:latin typeface="D2Coding"/>
+                <a:ea typeface="D2Coding"/>
+                <a:cs typeface="D2Coding"/>
               </a:rPr>
               <a:t>p</a:t>
             </a:r>
@@ -19426,9 +19426,9 @@
                 <a:solidFill>
                   <a:srgbClr val="E6EAF2"/>
                 </a:solidFill>
-                <a:latin typeface="나눔고딕코딩"/>
-                <a:ea typeface="나눔고딕코딩"/>
-                <a:cs typeface="나눔고딕코딩"/>
+                <a:latin typeface="D2Coding"/>
+                <a:ea typeface="D2Coding"/>
+                <a:cs typeface="D2Coding"/>
               </a:rPr>
               <a:t>.</a:t>
             </a:r>
@@ -19437,9 +19437,9 @@
                 <a:solidFill>
                   <a:srgbClr val="E6EAF2"/>
                 </a:solidFill>
-                <a:latin typeface="나눔고딕코딩"/>
-                <a:ea typeface="나눔고딕코딩"/>
-                <a:cs typeface="나눔고딕코딩"/>
+                <a:latin typeface="D2Coding"/>
+                <a:ea typeface="D2Coding"/>
+                <a:cs typeface="D2Coding"/>
               </a:rPr>
               <a:t>name</a:t>
             </a:r>
@@ -19448,9 +19448,9 @@
                 <a:solidFill>
                   <a:srgbClr val="E6EAF2"/>
                 </a:solidFill>
-                <a:latin typeface="나눔고딕코딩"/>
-                <a:ea typeface="나눔고딕코딩"/>
-                <a:cs typeface="나눔고딕코딩"/>
+                <a:latin typeface="D2Coding"/>
+                <a:ea typeface="D2Coding"/>
+                <a:cs typeface="D2Coding"/>
               </a:rPr>
               <a:t> + </a:t>
             </a:r>
@@ -19459,9 +19459,9 @@
                 <a:solidFill>
                   <a:srgbClr val="F5C97A"/>
                 </a:solidFill>
-                <a:latin typeface="나눔고딕코딩"/>
-                <a:ea typeface="나눔고딕코딩"/>
-                <a:cs typeface="나눔고딕코딩"/>
+                <a:latin typeface="D2Coding"/>
+                <a:ea typeface="D2Coding"/>
+                <a:cs typeface="D2Coding"/>
               </a:rPr>
               <a:t>' — '</a:t>
             </a:r>
@@ -19470,9 +19470,9 @@
                 <a:solidFill>
                   <a:srgbClr val="E6EAF2"/>
                 </a:solidFill>
-                <a:latin typeface="나눔고딕코딩"/>
-                <a:ea typeface="나눔고딕코딩"/>
-                <a:cs typeface="나눔고딕코딩"/>
+                <a:latin typeface="D2Coding"/>
+                <a:ea typeface="D2Coding"/>
+                <a:cs typeface="D2Coding"/>
               </a:rPr>
               <a:t> + </a:t>
             </a:r>
@@ -19481,9 +19481,9 @@
                 <a:solidFill>
                   <a:srgbClr val="E6EAF2"/>
                 </a:solidFill>
-                <a:latin typeface="나눔고딕코딩"/>
-                <a:ea typeface="나눔고딕코딩"/>
-                <a:cs typeface="나눔고딕코딩"/>
+                <a:latin typeface="D2Coding"/>
+                <a:ea typeface="D2Coding"/>
+                <a:cs typeface="D2Coding"/>
               </a:rPr>
               <a:t>p</a:t>
             </a:r>
@@ -19492,9 +19492,9 @@
                 <a:solidFill>
                   <a:srgbClr val="E6EAF2"/>
                 </a:solidFill>
-                <a:latin typeface="나눔고딕코딩"/>
-                <a:ea typeface="나눔고딕코딩"/>
-                <a:cs typeface="나눔고딕코딩"/>
+                <a:latin typeface="D2Coding"/>
+                <a:ea typeface="D2Coding"/>
+                <a:cs typeface="D2Coding"/>
               </a:rPr>
               <a:t>.</a:t>
             </a:r>
@@ -19503,9 +19503,9 @@
                 <a:solidFill>
                   <a:srgbClr val="E6EAF2"/>
                 </a:solidFill>
-                <a:latin typeface="나눔고딕코딩"/>
-                <a:ea typeface="나눔고딕코딩"/>
-                <a:cs typeface="나눔고딕코딩"/>
+                <a:latin typeface="D2Coding"/>
+                <a:ea typeface="D2Coding"/>
+                <a:cs typeface="D2Coding"/>
               </a:rPr>
               <a:t>price</a:t>
             </a:r>
@@ -19514,9 +19514,9 @@
                 <a:solidFill>
                   <a:srgbClr val="E6EAF2"/>
                 </a:solidFill>
-                <a:latin typeface="나눔고딕코딩"/>
-                <a:ea typeface="나눔고딕코딩"/>
-                <a:cs typeface="나눔고딕코딩"/>
+                <a:latin typeface="D2Coding"/>
+                <a:ea typeface="D2Coding"/>
+                <a:cs typeface="D2Coding"/>
               </a:rPr>
               <a:t> + </a:t>
             </a:r>
@@ -19525,9 +19525,9 @@
                 <a:solidFill>
                   <a:srgbClr val="F5C97A"/>
                 </a:solidFill>
-                <a:latin typeface="나눔고딕코딩"/>
-                <a:ea typeface="나눔고딕코딩"/>
-                <a:cs typeface="나눔고딕코딩"/>
+                <a:latin typeface="D2Coding"/>
+                <a:ea typeface="D2Coding"/>
+                <a:cs typeface="D2Coding"/>
               </a:rPr>
               <a:t>'원 (재고 '</a:t>
             </a:r>
@@ -19536,9 +19536,9 @@
                 <a:solidFill>
                   <a:srgbClr val="E6EAF2"/>
                 </a:solidFill>
-                <a:latin typeface="나눔고딕코딩"/>
-                <a:ea typeface="나눔고딕코딩"/>
-                <a:cs typeface="나눔고딕코딩"/>
+                <a:latin typeface="D2Coding"/>
+                <a:ea typeface="D2Coding"/>
+                <a:cs typeface="D2Coding"/>
               </a:rPr>
               <a:t> + </a:t>
             </a:r>
@@ -19547,9 +19547,9 @@
                 <a:solidFill>
                   <a:srgbClr val="E6EAF2"/>
                 </a:solidFill>
-                <a:latin typeface="나눔고딕코딩"/>
-                <a:ea typeface="나눔고딕코딩"/>
-                <a:cs typeface="나눔고딕코딩"/>
+                <a:latin typeface="D2Coding"/>
+                <a:ea typeface="D2Coding"/>
+                <a:cs typeface="D2Coding"/>
               </a:rPr>
               <a:t>p</a:t>
             </a:r>
@@ -19558,9 +19558,9 @@
                 <a:solidFill>
                   <a:srgbClr val="E6EAF2"/>
                 </a:solidFill>
-                <a:latin typeface="나눔고딕코딩"/>
-                <a:ea typeface="나눔고딕코딩"/>
-                <a:cs typeface="나눔고딕코딩"/>
+                <a:latin typeface="D2Coding"/>
+                <a:ea typeface="D2Coding"/>
+                <a:cs typeface="D2Coding"/>
               </a:rPr>
               <a:t>.</a:t>
             </a:r>
@@ -19569,9 +19569,9 @@
                 <a:solidFill>
                   <a:srgbClr val="E6EAF2"/>
                 </a:solidFill>
-                <a:latin typeface="나눔고딕코딩"/>
-                <a:ea typeface="나눔고딕코딩"/>
-                <a:cs typeface="나눔고딕코딩"/>
+                <a:latin typeface="D2Coding"/>
+                <a:ea typeface="D2Coding"/>
+                <a:cs typeface="D2Coding"/>
               </a:rPr>
               <a:t>stock</a:t>
             </a:r>
@@ -19580,9 +19580,9 @@
                 <a:solidFill>
                   <a:srgbClr val="E6EAF2"/>
                 </a:solidFill>
-                <a:latin typeface="나눔고딕코딩"/>
-                <a:ea typeface="나눔고딕코딩"/>
-                <a:cs typeface="나눔고딕코딩"/>
+                <a:latin typeface="D2Coding"/>
+                <a:ea typeface="D2Coding"/>
+                <a:cs typeface="D2Coding"/>
               </a:rPr>
               <a:t> + </a:t>
             </a:r>
@@ -19591,9 +19591,9 @@
                 <a:solidFill>
                   <a:srgbClr val="F5C97A"/>
                 </a:solidFill>
-                <a:latin typeface="나눔고딕코딩"/>
-                <a:ea typeface="나눔고딕코딩"/>
-                <a:cs typeface="나눔고딕코딩"/>
+                <a:latin typeface="D2Coding"/>
+                <a:ea typeface="D2Coding"/>
+                <a:cs typeface="D2Coding"/>
               </a:rPr>
               <a:t>')&lt;/li&gt;'</a:t>
             </a:r>
@@ -19602,9 +19602,9 @@
                 <a:solidFill>
                   <a:srgbClr val="E6EAF2"/>
                 </a:solidFill>
-                <a:latin typeface="나눔고딕코딩"/>
-                <a:ea typeface="나눔고딕코딩"/>
-                <a:cs typeface="나눔고딕코딩"/>
+                <a:latin typeface="D2Coding"/>
+                <a:ea typeface="D2Coding"/>
+                <a:cs typeface="D2Coding"/>
               </a:rPr>
               <a:t>;</a:t>
             </a:r>
@@ -19620,9 +19620,9 @@
                 <a:solidFill>
                   <a:srgbClr val="E6EAF2"/>
                 </a:solidFill>
-                <a:latin typeface="나눔고딕코딩"/>
-                <a:ea typeface="나눔고딕코딩"/>
-                <a:cs typeface="나눔고딕코딩"/>
+                <a:latin typeface="D2Coding"/>
+                <a:ea typeface="D2Coding"/>
+                <a:cs typeface="D2Coding"/>
               </a:rPr>
               <a:t>    }</a:t>
             </a:r>
@@ -19638,9 +19638,9 @@
                 <a:solidFill>
                   <a:srgbClr val="E6EAF2"/>
                 </a:solidFill>
-                <a:latin typeface="나눔고딕코딩"/>
-                <a:ea typeface="나눔고딕코딩"/>
-                <a:cs typeface="나눔고딕코딩"/>
+                <a:latin typeface="D2Coding"/>
+                <a:ea typeface="D2Coding"/>
+                <a:cs typeface="D2Coding"/>
               </a:rPr>
               <a:t>    </a:t>
             </a:r>
@@ -19649,9 +19649,9 @@
                 <a:solidFill>
                   <a:srgbClr val="E6EAF2"/>
                 </a:solidFill>
-                <a:latin typeface="나눔고딕코딩"/>
-                <a:ea typeface="나눔고딕코딩"/>
-                <a:cs typeface="나눔고딕코딩"/>
+                <a:latin typeface="D2Coding"/>
+                <a:ea typeface="D2Coding"/>
+                <a:cs typeface="D2Coding"/>
               </a:rPr>
               <a:t>html</a:t>
             </a:r>
@@ -19660,9 +19660,9 @@
                 <a:solidFill>
                   <a:srgbClr val="E6EAF2"/>
                 </a:solidFill>
-                <a:latin typeface="나눔고딕코딩"/>
-                <a:ea typeface="나눔고딕코딩"/>
-                <a:cs typeface="나눔고딕코딩"/>
+                <a:latin typeface="D2Coding"/>
+                <a:ea typeface="D2Coding"/>
+                <a:cs typeface="D2Coding"/>
               </a:rPr>
               <a:t> += </a:t>
             </a:r>
@@ -19671,9 +19671,9 @@
                 <a:solidFill>
                   <a:srgbClr val="F5C97A"/>
                 </a:solidFill>
-                <a:latin typeface="나눔고딕코딩"/>
-                <a:ea typeface="나눔고딕코딩"/>
-                <a:cs typeface="나눔고딕코딩"/>
+                <a:latin typeface="D2Coding"/>
+                <a:ea typeface="D2Coding"/>
+                <a:cs typeface="D2Coding"/>
               </a:rPr>
               <a:t>'&lt;/ul&gt;'</a:t>
             </a:r>
@@ -19682,9 +19682,9 @@
                 <a:solidFill>
                   <a:srgbClr val="E6EAF2"/>
                 </a:solidFill>
-                <a:latin typeface="나눔고딕코딩"/>
-                <a:ea typeface="나눔고딕코딩"/>
-                <a:cs typeface="나눔고딕코딩"/>
+                <a:latin typeface="D2Coding"/>
+                <a:ea typeface="D2Coding"/>
+                <a:cs typeface="D2Coding"/>
               </a:rPr>
               <a:t>;</a:t>
             </a:r>
@@ -19700,9 +19700,9 @@
                 <a:solidFill>
                   <a:srgbClr val="E6EAF2"/>
                 </a:solidFill>
-                <a:latin typeface="나눔고딕코딩"/>
-                <a:ea typeface="나눔고딕코딩"/>
-                <a:cs typeface="나눔고딕코딩"/>
+                <a:latin typeface="D2Coding"/>
+                <a:ea typeface="D2Coding"/>
+                <a:cs typeface="D2Coding"/>
               </a:rPr>
               <a:t>    </a:t>
             </a:r>
@@ -19711,9 +19711,9 @@
                 <a:solidFill>
                   <a:srgbClr val="E6EAF2"/>
                 </a:solidFill>
-                <a:latin typeface="나눔고딕코딩"/>
-                <a:ea typeface="나눔고딕코딩"/>
-                <a:cs typeface="나눔고딕코딩"/>
+                <a:latin typeface="D2Coding"/>
+                <a:ea typeface="D2Coding"/>
+                <a:cs typeface="D2Coding"/>
               </a:rPr>
               <a:t>res</a:t>
             </a:r>
@@ -19722,9 +19722,9 @@
                 <a:solidFill>
                   <a:srgbClr val="E6EAF2"/>
                 </a:solidFill>
-                <a:latin typeface="나눔고딕코딩"/>
-                <a:ea typeface="나눔고딕코딩"/>
-                <a:cs typeface="나눔고딕코딩"/>
+                <a:latin typeface="D2Coding"/>
+                <a:ea typeface="D2Coding"/>
+                <a:cs typeface="D2Coding"/>
               </a:rPr>
               <a:t>.</a:t>
             </a:r>
@@ -19733,9 +19733,9 @@
                 <a:solidFill>
                   <a:srgbClr val="E6EAF2"/>
                 </a:solidFill>
-                <a:latin typeface="나눔고딕코딩"/>
-                <a:ea typeface="나눔고딕코딩"/>
-                <a:cs typeface="나눔고딕코딩"/>
+                <a:latin typeface="D2Coding"/>
+                <a:ea typeface="D2Coding"/>
+                <a:cs typeface="D2Coding"/>
               </a:rPr>
               <a:t>send</a:t>
             </a:r>
@@ -19744,9 +19744,9 @@
                 <a:solidFill>
                   <a:srgbClr val="E6EAF2"/>
                 </a:solidFill>
-                <a:latin typeface="나눔고딕코딩"/>
-                <a:ea typeface="나눔고딕코딩"/>
-                <a:cs typeface="나눔고딕코딩"/>
+                <a:latin typeface="D2Coding"/>
+                <a:ea typeface="D2Coding"/>
+                <a:cs typeface="D2Coding"/>
               </a:rPr>
               <a:t>(</a:t>
             </a:r>
@@ -19755,9 +19755,9 @@
                 <a:solidFill>
                   <a:srgbClr val="E6EAF2"/>
                 </a:solidFill>
-                <a:latin typeface="나눔고딕코딩"/>
-                <a:ea typeface="나눔고딕코딩"/>
-                <a:cs typeface="나눔고딕코딩"/>
+                <a:latin typeface="D2Coding"/>
+                <a:ea typeface="D2Coding"/>
+                <a:cs typeface="D2Coding"/>
               </a:rPr>
               <a:t>html</a:t>
             </a:r>
@@ -19766,9 +19766,9 @@
                 <a:solidFill>
                   <a:srgbClr val="E6EAF2"/>
                 </a:solidFill>
-                <a:latin typeface="나눔고딕코딩"/>
-                <a:ea typeface="나눔고딕코딩"/>
-                <a:cs typeface="나눔고딕코딩"/>
+                <a:latin typeface="D2Coding"/>
+                <a:ea typeface="D2Coding"/>
+                <a:cs typeface="D2Coding"/>
               </a:rPr>
               <a:t>);                         </a:t>
             </a:r>
@@ -19777,9 +19777,9 @@
                 <a:solidFill>
                   <a:srgbClr val="8F9DB5"/>
                 </a:solidFill>
-                <a:latin typeface="나눔고딕코딩"/>
-                <a:ea typeface="나눔고딕코딩"/>
-                <a:cs typeface="나눔고딕코딩"/>
+                <a:latin typeface="D2Coding"/>
+                <a:ea typeface="D2Coding"/>
+                <a:cs typeface="D2Coding"/>
               </a:rPr>
               <a:t>// 브라우저로 응답</a:t>
             </a:r>
@@ -19795,9 +19795,9 @@
                 <a:solidFill>
                   <a:srgbClr val="E6EAF2"/>
                 </a:solidFill>
-                <a:latin typeface="나눔고딕코딩"/>
-                <a:ea typeface="나눔고딕코딩"/>
-                <a:cs typeface="나눔고딕코딩"/>
+                <a:latin typeface="D2Coding"/>
+                <a:ea typeface="D2Coding"/>
+                <a:cs typeface="D2Coding"/>
               </a:rPr>
               <a:t>  } </a:t>
             </a:r>
@@ -19806,9 +19806,9 @@
                 <a:solidFill>
                   <a:srgbClr val="D9A7FF"/>
                 </a:solidFill>
-                <a:latin typeface="나눔고딕코딩"/>
-                <a:ea typeface="나눔고딕코딩"/>
-                <a:cs typeface="나눔고딕코딩"/>
+                <a:latin typeface="D2Coding"/>
+                <a:ea typeface="D2Coding"/>
+                <a:cs typeface="D2Coding"/>
               </a:rPr>
               <a:t>catch</a:t>
             </a:r>
@@ -19817,9 +19817,9 @@
                 <a:solidFill>
                   <a:srgbClr val="E6EAF2"/>
                 </a:solidFill>
-                <a:latin typeface="나눔고딕코딩"/>
-                <a:ea typeface="나눔고딕코딩"/>
-                <a:cs typeface="나눔고딕코딩"/>
+                <a:latin typeface="D2Coding"/>
+                <a:ea typeface="D2Coding"/>
+                <a:cs typeface="D2Coding"/>
               </a:rPr>
               <a:t> (</a:t>
             </a:r>
@@ -19828,9 +19828,9 @@
                 <a:solidFill>
                   <a:srgbClr val="E6EAF2"/>
                 </a:solidFill>
-                <a:latin typeface="나눔고딕코딩"/>
-                <a:ea typeface="나눔고딕코딩"/>
-                <a:cs typeface="나눔고딕코딩"/>
+                <a:latin typeface="D2Coding"/>
+                <a:ea typeface="D2Coding"/>
+                <a:cs typeface="D2Coding"/>
               </a:rPr>
               <a:t>err</a:t>
             </a:r>
@@ -19839,9 +19839,9 @@
                 <a:solidFill>
                   <a:srgbClr val="E6EAF2"/>
                 </a:solidFill>
-                <a:latin typeface="나눔고딕코딩"/>
-                <a:ea typeface="나눔고딕코딩"/>
-                <a:cs typeface="나눔고딕코딩"/>
+                <a:latin typeface="D2Coding"/>
+                <a:ea typeface="D2Coding"/>
+                <a:cs typeface="D2Coding"/>
               </a:rPr>
               <a:t>) {</a:t>
             </a:r>
@@ -19857,9 +19857,9 @@
                 <a:solidFill>
                   <a:srgbClr val="E6EAF2"/>
                 </a:solidFill>
-                <a:latin typeface="나눔고딕코딩"/>
-                <a:ea typeface="나눔고딕코딩"/>
-                <a:cs typeface="나눔고딕코딩"/>
+                <a:latin typeface="D2Coding"/>
+                <a:ea typeface="D2Coding"/>
+                <a:cs typeface="D2Coding"/>
               </a:rPr>
               <a:t>    </a:t>
             </a:r>
@@ -19868,9 +19868,9 @@
                 <a:solidFill>
                   <a:srgbClr val="E6EAF2"/>
                 </a:solidFill>
-                <a:latin typeface="나눔고딕코딩"/>
-                <a:ea typeface="나눔고딕코딩"/>
-                <a:cs typeface="나눔고딕코딩"/>
+                <a:latin typeface="D2Coding"/>
+                <a:ea typeface="D2Coding"/>
+                <a:cs typeface="D2Coding"/>
               </a:rPr>
               <a:t>res</a:t>
             </a:r>
@@ -19879,9 +19879,9 @@
                 <a:solidFill>
                   <a:srgbClr val="E6EAF2"/>
                 </a:solidFill>
-                <a:latin typeface="나눔고딕코딩"/>
-                <a:ea typeface="나눔고딕코딩"/>
-                <a:cs typeface="나눔고딕코딩"/>
+                <a:latin typeface="D2Coding"/>
+                <a:ea typeface="D2Coding"/>
+                <a:cs typeface="D2Coding"/>
               </a:rPr>
               <a:t>.</a:t>
             </a:r>
@@ -19890,9 +19890,9 @@
                 <a:solidFill>
                   <a:srgbClr val="E6EAF2"/>
                 </a:solidFill>
-                <a:latin typeface="나눔고딕코딩"/>
-                <a:ea typeface="나눔고딕코딩"/>
-                <a:cs typeface="나눔고딕코딩"/>
+                <a:latin typeface="D2Coding"/>
+                <a:ea typeface="D2Coding"/>
+                <a:cs typeface="D2Coding"/>
               </a:rPr>
               <a:t>status</a:t>
             </a:r>
@@ -19901,9 +19901,9 @@
                 <a:solidFill>
                   <a:srgbClr val="E6EAF2"/>
                 </a:solidFill>
-                <a:latin typeface="나눔고딕코딩"/>
-                <a:ea typeface="나눔고딕코딩"/>
-                <a:cs typeface="나눔고딕코딩"/>
+                <a:latin typeface="D2Coding"/>
+                <a:ea typeface="D2Coding"/>
+                <a:cs typeface="D2Coding"/>
               </a:rPr>
               <a:t>(</a:t>
             </a:r>
@@ -19912,9 +19912,9 @@
                 <a:solidFill>
                   <a:srgbClr val="FFB08A"/>
                 </a:solidFill>
-                <a:latin typeface="나눔고딕코딩"/>
-                <a:ea typeface="나눔고딕코딩"/>
-                <a:cs typeface="나눔고딕코딩"/>
+                <a:latin typeface="D2Coding"/>
+                <a:ea typeface="D2Coding"/>
+                <a:cs typeface="D2Coding"/>
               </a:rPr>
               <a:t>500</a:t>
             </a:r>
@@ -19923,9 +19923,9 @@
                 <a:solidFill>
                   <a:srgbClr val="E6EAF2"/>
                 </a:solidFill>
-                <a:latin typeface="나눔고딕코딩"/>
-                <a:ea typeface="나눔고딕코딩"/>
-                <a:cs typeface="나눔고딕코딩"/>
+                <a:latin typeface="D2Coding"/>
+                <a:ea typeface="D2Coding"/>
+                <a:cs typeface="D2Coding"/>
               </a:rPr>
               <a:t>).</a:t>
             </a:r>
@@ -19934,9 +19934,9 @@
                 <a:solidFill>
                   <a:srgbClr val="E6EAF2"/>
                 </a:solidFill>
-                <a:latin typeface="나눔고딕코딩"/>
-                <a:ea typeface="나눔고딕코딩"/>
-                <a:cs typeface="나눔고딕코딩"/>
+                <a:latin typeface="D2Coding"/>
+                <a:ea typeface="D2Coding"/>
+                <a:cs typeface="D2Coding"/>
               </a:rPr>
               <a:t>send</a:t>
             </a:r>
@@ -19945,9 +19945,9 @@
                 <a:solidFill>
                   <a:srgbClr val="E6EAF2"/>
                 </a:solidFill>
-                <a:latin typeface="나눔고딕코딩"/>
-                <a:ea typeface="나눔고딕코딩"/>
-                <a:cs typeface="나눔고딕코딩"/>
+                <a:latin typeface="D2Coding"/>
+                <a:ea typeface="D2Coding"/>
+                <a:cs typeface="D2Coding"/>
               </a:rPr>
               <a:t>(</a:t>
             </a:r>
@@ -19956,9 +19956,9 @@
                 <a:solidFill>
                   <a:srgbClr val="F5C97A"/>
                 </a:solidFill>
-                <a:latin typeface="나눔고딕코딩"/>
-                <a:ea typeface="나눔고딕코딩"/>
-                <a:cs typeface="나눔고딕코딩"/>
+                <a:latin typeface="D2Coding"/>
+                <a:ea typeface="D2Coding"/>
+                <a:cs typeface="D2Coding"/>
               </a:rPr>
               <a:t>'조회 실패: '</a:t>
             </a:r>
@@ -19967,9 +19967,9 @@
                 <a:solidFill>
                   <a:srgbClr val="E6EAF2"/>
                 </a:solidFill>
-                <a:latin typeface="나눔고딕코딩"/>
-                <a:ea typeface="나눔고딕코딩"/>
-                <a:cs typeface="나눔고딕코딩"/>
+                <a:latin typeface="D2Coding"/>
+                <a:ea typeface="D2Coding"/>
+                <a:cs typeface="D2Coding"/>
               </a:rPr>
               <a:t> + </a:t>
             </a:r>
@@ -19978,9 +19978,9 @@
                 <a:solidFill>
                   <a:srgbClr val="E6EAF2"/>
                 </a:solidFill>
-                <a:latin typeface="나눔고딕코딩"/>
-                <a:ea typeface="나눔고딕코딩"/>
-                <a:cs typeface="나눔고딕코딩"/>
+                <a:latin typeface="D2Coding"/>
+                <a:ea typeface="D2Coding"/>
+                <a:cs typeface="D2Coding"/>
               </a:rPr>
               <a:t>err</a:t>
             </a:r>
@@ -19989,9 +19989,9 @@
                 <a:solidFill>
                   <a:srgbClr val="E6EAF2"/>
                 </a:solidFill>
-                <a:latin typeface="나눔고딕코딩"/>
-                <a:ea typeface="나눔고딕코딩"/>
-                <a:cs typeface="나눔고딕코딩"/>
+                <a:latin typeface="D2Coding"/>
+                <a:ea typeface="D2Coding"/>
+                <a:cs typeface="D2Coding"/>
               </a:rPr>
               <a:t>.</a:t>
             </a:r>
@@ -20000,9 +20000,9 @@
                 <a:solidFill>
                   <a:srgbClr val="E6EAF2"/>
                 </a:solidFill>
-                <a:latin typeface="나눔고딕코딩"/>
-                <a:ea typeface="나눔고딕코딩"/>
-                <a:cs typeface="나눔고딕코딩"/>
+                <a:latin typeface="D2Coding"/>
+                <a:ea typeface="D2Coding"/>
+                <a:cs typeface="D2Coding"/>
               </a:rPr>
               <a:t>message</a:t>
             </a:r>
@@ -20011,9 +20011,9 @@
                 <a:solidFill>
                   <a:srgbClr val="E6EAF2"/>
                 </a:solidFill>
-                <a:latin typeface="나눔고딕코딩"/>
-                <a:ea typeface="나눔고딕코딩"/>
-                <a:cs typeface="나눔고딕코딩"/>
+                <a:latin typeface="D2Coding"/>
+                <a:ea typeface="D2Coding"/>
+                <a:cs typeface="D2Coding"/>
               </a:rPr>
               <a:t>);   </a:t>
             </a:r>
@@ -20022,9 +20022,9 @@
                 <a:solidFill>
                   <a:srgbClr val="8F9DB5"/>
                 </a:solidFill>
-                <a:latin typeface="나눔고딕코딩"/>
-                <a:ea typeface="나눔고딕코딩"/>
-                <a:cs typeface="나눔고딕코딩"/>
+                <a:latin typeface="D2Coding"/>
+                <a:ea typeface="D2Coding"/>
+                <a:cs typeface="D2Coding"/>
               </a:rPr>
               <a:t>// 실패 시 500 오류로 응답</a:t>
             </a:r>
@@ -20040,9 +20040,9 @@
                 <a:solidFill>
                   <a:srgbClr val="E6EAF2"/>
                 </a:solidFill>
-                <a:latin typeface="나눔고딕코딩"/>
-                <a:ea typeface="나눔고딕코딩"/>
-                <a:cs typeface="나눔고딕코딩"/>
+                <a:latin typeface="D2Coding"/>
+                <a:ea typeface="D2Coding"/>
+                <a:cs typeface="D2Coding"/>
               </a:rPr>
               <a:t>  }</a:t>
             </a:r>
@@ -20058,9 +20058,9 @@
                 <a:solidFill>
                   <a:srgbClr val="E6EAF2"/>
                 </a:solidFill>
-                <a:latin typeface="나눔고딕코딩"/>
-                <a:ea typeface="나눔고딕코딩"/>
-                <a:cs typeface="나눔고딕코딩"/>
+                <a:latin typeface="D2Coding"/>
+                <a:ea typeface="D2Coding"/>
+                <a:cs typeface="D2Coding"/>
               </a:rPr>
               <a:t>});</a:t>
             </a:r>
@@ -22998,9 +22998,9 @@
                 <a:solidFill>
                   <a:srgbClr val="7A869C"/>
                 </a:solidFill>
-                <a:latin typeface="나눔고딕코딩"/>
-                <a:ea typeface="나눔고딕코딩"/>
-                <a:cs typeface="나눔고딕코딩"/>
+                <a:latin typeface="D2Coding"/>
+                <a:ea typeface="D2Coding"/>
+                <a:cs typeface="D2Coding"/>
               </a:rPr>
               <a:t>1</a:t>
             </a:r>
@@ -23016,9 +23016,9 @@
                 <a:solidFill>
                   <a:srgbClr val="7A869C"/>
                 </a:solidFill>
-                <a:latin typeface="나눔고딕코딩"/>
-                <a:ea typeface="나눔고딕코딩"/>
-                <a:cs typeface="나눔고딕코딩"/>
+                <a:latin typeface="D2Coding"/>
+                <a:ea typeface="D2Coding"/>
+                <a:cs typeface="D2Coding"/>
               </a:rPr>
               <a:t>2</a:t>
             </a:r>
@@ -23034,9 +23034,9 @@
                 <a:solidFill>
                   <a:srgbClr val="7A869C"/>
                 </a:solidFill>
-                <a:latin typeface="나눔고딕코딩"/>
-                <a:ea typeface="나눔고딕코딩"/>
-                <a:cs typeface="나눔고딕코딩"/>
+                <a:latin typeface="D2Coding"/>
+                <a:ea typeface="D2Coding"/>
+                <a:cs typeface="D2Coding"/>
               </a:rPr>
               <a:t>3</a:t>
             </a:r>
@@ -23052,9 +23052,9 @@
                 <a:solidFill>
                   <a:srgbClr val="7A869C"/>
                 </a:solidFill>
-                <a:latin typeface="나눔고딕코딩"/>
-                <a:ea typeface="나눔고딕코딩"/>
-                <a:cs typeface="나눔고딕코딩"/>
+                <a:latin typeface="D2Coding"/>
+                <a:ea typeface="D2Coding"/>
+                <a:cs typeface="D2Coding"/>
               </a:rPr>
               <a:t>4</a:t>
             </a:r>
@@ -23070,9 +23070,9 @@
                 <a:solidFill>
                   <a:srgbClr val="7A869C"/>
                 </a:solidFill>
-                <a:latin typeface="나눔고딕코딩"/>
-                <a:ea typeface="나눔고딕코딩"/>
-                <a:cs typeface="나눔고딕코딩"/>
+                <a:latin typeface="D2Coding"/>
+                <a:ea typeface="D2Coding"/>
+                <a:cs typeface="D2Coding"/>
               </a:rPr>
               <a:t>5</a:t>
             </a:r>
@@ -23088,9 +23088,9 @@
                 <a:solidFill>
                   <a:srgbClr val="7A869C"/>
                 </a:solidFill>
-                <a:latin typeface="나눔고딕코딩"/>
-                <a:ea typeface="나눔고딕코딩"/>
-                <a:cs typeface="나눔고딕코딩"/>
+                <a:latin typeface="D2Coding"/>
+                <a:ea typeface="D2Coding"/>
+                <a:cs typeface="D2Coding"/>
               </a:rPr>
               <a:t>6</a:t>
             </a:r>
@@ -23106,9 +23106,9 @@
                 <a:solidFill>
                   <a:srgbClr val="7A869C"/>
                 </a:solidFill>
-                <a:latin typeface="나눔고딕코딩"/>
-                <a:ea typeface="나눔고딕코딩"/>
-                <a:cs typeface="나눔고딕코딩"/>
+                <a:latin typeface="D2Coding"/>
+                <a:ea typeface="D2Coding"/>
+                <a:cs typeface="D2Coding"/>
               </a:rPr>
               <a:t>7</a:t>
             </a:r>
@@ -23124,9 +23124,9 @@
                 <a:solidFill>
                   <a:srgbClr val="7A869C"/>
                 </a:solidFill>
-                <a:latin typeface="나눔고딕코딩"/>
-                <a:ea typeface="나눔고딕코딩"/>
-                <a:cs typeface="나눔고딕코딩"/>
+                <a:latin typeface="D2Coding"/>
+                <a:ea typeface="D2Coding"/>
+                <a:cs typeface="D2Coding"/>
               </a:rPr>
               <a:t>8</a:t>
             </a:r>
@@ -23142,9 +23142,9 @@
                 <a:solidFill>
                   <a:srgbClr val="7A869C"/>
                 </a:solidFill>
-                <a:latin typeface="나눔고딕코딩"/>
-                <a:ea typeface="나눔고딕코딩"/>
-                <a:cs typeface="나눔고딕코딩"/>
+                <a:latin typeface="D2Coding"/>
+                <a:ea typeface="D2Coding"/>
+                <a:cs typeface="D2Coding"/>
               </a:rPr>
               <a:t>9</a:t>
             </a:r>
@@ -23160,9 +23160,9 @@
                 <a:solidFill>
                   <a:srgbClr val="7A869C"/>
                 </a:solidFill>
-                <a:latin typeface="나눔고딕코딩"/>
-                <a:ea typeface="나눔고딕코딩"/>
-                <a:cs typeface="나눔고딕코딩"/>
+                <a:latin typeface="D2Coding"/>
+                <a:ea typeface="D2Coding"/>
+                <a:cs typeface="D2Coding"/>
               </a:rPr>
               <a:t>10</a:t>
             </a:r>
@@ -23178,9 +23178,9 @@
                 <a:solidFill>
                   <a:srgbClr val="7A869C"/>
                 </a:solidFill>
-                <a:latin typeface="나눔고딕코딩"/>
-                <a:ea typeface="나눔고딕코딩"/>
-                <a:cs typeface="나눔고딕코딩"/>
+                <a:latin typeface="D2Coding"/>
+                <a:ea typeface="D2Coding"/>
+                <a:cs typeface="D2Coding"/>
               </a:rPr>
               <a:t>11</a:t>
             </a:r>
@@ -23196,9 +23196,9 @@
                 <a:solidFill>
                   <a:srgbClr val="7A869C"/>
                 </a:solidFill>
-                <a:latin typeface="나눔고딕코딩"/>
-                <a:ea typeface="나눔고딕코딩"/>
-                <a:cs typeface="나눔고딕코딩"/>
+                <a:latin typeface="D2Coding"/>
+                <a:ea typeface="D2Coding"/>
+                <a:cs typeface="D2Coding"/>
               </a:rPr>
               <a:t>12</a:t>
             </a:r>
@@ -23214,9 +23214,9 @@
                 <a:solidFill>
                   <a:srgbClr val="7A869C"/>
                 </a:solidFill>
-                <a:latin typeface="나눔고딕코딩"/>
-                <a:ea typeface="나눔고딕코딩"/>
-                <a:cs typeface="나눔고딕코딩"/>
+                <a:latin typeface="D2Coding"/>
+                <a:ea typeface="D2Coding"/>
+                <a:cs typeface="D2Coding"/>
               </a:rPr>
               <a:t>13</a:t>
             </a:r>
@@ -23232,9 +23232,9 @@
                 <a:solidFill>
                   <a:srgbClr val="7A869C"/>
                 </a:solidFill>
-                <a:latin typeface="나눔고딕코딩"/>
-                <a:ea typeface="나눔고딕코딩"/>
-                <a:cs typeface="나눔고딕코딩"/>
+                <a:latin typeface="D2Coding"/>
+                <a:ea typeface="D2Coding"/>
+                <a:cs typeface="D2Coding"/>
               </a:rPr>
               <a:t>14</a:t>
             </a:r>
@@ -23250,9 +23250,9 @@
                 <a:solidFill>
                   <a:srgbClr val="7A869C"/>
                 </a:solidFill>
-                <a:latin typeface="나눔고딕코딩"/>
-                <a:ea typeface="나눔고딕코딩"/>
-                <a:cs typeface="나눔고딕코딩"/>
+                <a:latin typeface="D2Coding"/>
+                <a:ea typeface="D2Coding"/>
+                <a:cs typeface="D2Coding"/>
               </a:rPr>
               <a:t>15</a:t>
             </a:r>
@@ -23268,9 +23268,9 @@
                 <a:solidFill>
                   <a:srgbClr val="7A869C"/>
                 </a:solidFill>
-                <a:latin typeface="나눔고딕코딩"/>
-                <a:ea typeface="나눔고딕코딩"/>
-                <a:cs typeface="나눔고딕코딩"/>
+                <a:latin typeface="D2Coding"/>
+                <a:ea typeface="D2Coding"/>
+                <a:cs typeface="D2Coding"/>
               </a:rPr>
               <a:t>16</a:t>
             </a:r>
@@ -23309,9 +23309,9 @@
                 <a:solidFill>
                   <a:srgbClr val="8F9DB5"/>
                 </a:solidFill>
-                <a:latin typeface="나눔고딕코딩"/>
-                <a:ea typeface="나눔고딕코딩"/>
-                <a:cs typeface="나눔고딕코딩"/>
+                <a:latin typeface="D2Coding"/>
+                <a:ea typeface="D2Coding"/>
+                <a:cs typeface="D2Coding"/>
               </a:rPr>
               <a:t>// ✗ 위험: 사용자 입력을 문자열로 직접 이어 붙임</a:t>
             </a:r>
@@ -23327,9 +23327,9 @@
                 <a:solidFill>
                   <a:srgbClr val="8F9DB5"/>
                 </a:solidFill>
-                <a:latin typeface="나눔고딕코딩"/>
-                <a:ea typeface="나눔고딕코딩"/>
-                <a:cs typeface="나눔고딕코딩"/>
+                <a:latin typeface="D2Coding"/>
+                <a:ea typeface="D2Coding"/>
+                <a:cs typeface="D2Coding"/>
               </a:rPr>
               <a:t>// input 은 사용자가 화면에 입력한 값. 무엇이 들어올지 서버는 알 수 없다</a:t>
             </a:r>
@@ -23345,9 +23345,9 @@
                 <a:solidFill>
                   <a:srgbClr val="D9A7FF"/>
                 </a:solidFill>
-                <a:latin typeface="나눔고딕코딩"/>
-                <a:ea typeface="나눔고딕코딩"/>
-                <a:cs typeface="나눔고딕코딩"/>
+                <a:latin typeface="D2Coding"/>
+                <a:ea typeface="D2Coding"/>
+                <a:cs typeface="D2Coding"/>
               </a:rPr>
               <a:t>const</a:t>
             </a:r>
@@ -23356,9 +23356,9 @@
                 <a:solidFill>
                   <a:srgbClr val="E6EAF2"/>
                 </a:solidFill>
-                <a:latin typeface="나눔고딕코딩"/>
-                <a:ea typeface="나눔고딕코딩"/>
-                <a:cs typeface="나눔고딕코딩"/>
+                <a:latin typeface="D2Coding"/>
+                <a:ea typeface="D2Coding"/>
+                <a:cs typeface="D2Coding"/>
               </a:rPr>
               <a:t> </a:t>
             </a:r>
@@ -23367,9 +23367,9 @@
                 <a:solidFill>
                   <a:srgbClr val="E6EAF2"/>
                 </a:solidFill>
-                <a:latin typeface="나눔고딕코딩"/>
-                <a:ea typeface="나눔고딕코딩"/>
-                <a:cs typeface="나눔고딕코딩"/>
+                <a:latin typeface="D2Coding"/>
+                <a:ea typeface="D2Coding"/>
+                <a:cs typeface="D2Coding"/>
               </a:rPr>
               <a:t>sql</a:t>
             </a:r>
@@ -23378,9 +23378,9 @@
                 <a:solidFill>
                   <a:srgbClr val="E6EAF2"/>
                 </a:solidFill>
-                <a:latin typeface="나눔고딕코딩"/>
-                <a:ea typeface="나눔고딕코딩"/>
-                <a:cs typeface="나눔고딕코딩"/>
+                <a:latin typeface="D2Coding"/>
+                <a:ea typeface="D2Coding"/>
+                <a:cs typeface="D2Coding"/>
               </a:rPr>
               <a:t> = </a:t>
             </a:r>
@@ -23389,9 +23389,9 @@
                 <a:solidFill>
                   <a:srgbClr val="F5C97A"/>
                 </a:solidFill>
-                <a:latin typeface="나눔고딕코딩"/>
-                <a:ea typeface="나눔고딕코딩"/>
-                <a:cs typeface="나눔고딕코딩"/>
+                <a:latin typeface="D2Coding"/>
+                <a:ea typeface="D2Coding"/>
+                <a:cs typeface="D2Coding"/>
               </a:rPr>
               <a:t>"SELECT * FROM customers WHERE cust_id = '"</a:t>
             </a:r>
@@ -23400,9 +23400,9 @@
                 <a:solidFill>
                   <a:srgbClr val="E6EAF2"/>
                 </a:solidFill>
-                <a:latin typeface="나눔고딕코딩"/>
-                <a:ea typeface="나눔고딕코딩"/>
-                <a:cs typeface="나눔고딕코딩"/>
+                <a:latin typeface="D2Coding"/>
+                <a:ea typeface="D2Coding"/>
+                <a:cs typeface="D2Coding"/>
               </a:rPr>
               <a:t> + </a:t>
             </a:r>
@@ -23411,9 +23411,9 @@
                 <a:solidFill>
                   <a:srgbClr val="E6EAF2"/>
                 </a:solidFill>
-                <a:latin typeface="나눔고딕코딩"/>
-                <a:ea typeface="나눔고딕코딩"/>
-                <a:cs typeface="나눔고딕코딩"/>
+                <a:latin typeface="D2Coding"/>
+                <a:ea typeface="D2Coding"/>
+                <a:cs typeface="D2Coding"/>
               </a:rPr>
               <a:t>input</a:t>
             </a:r>
@@ -23422,9 +23422,9 @@
                 <a:solidFill>
                   <a:srgbClr val="E6EAF2"/>
                 </a:solidFill>
-                <a:latin typeface="나눔고딕코딩"/>
-                <a:ea typeface="나눔고딕코딩"/>
-                <a:cs typeface="나눔고딕코딩"/>
+                <a:latin typeface="D2Coding"/>
+                <a:ea typeface="D2Coding"/>
+                <a:cs typeface="D2Coding"/>
               </a:rPr>
               <a:t> + </a:t>
             </a:r>
@@ -23433,9 +23433,9 @@
                 <a:solidFill>
                   <a:srgbClr val="F5C97A"/>
                 </a:solidFill>
-                <a:latin typeface="나눔고딕코딩"/>
-                <a:ea typeface="나눔고딕코딩"/>
-                <a:cs typeface="나눔고딕코딩"/>
+                <a:latin typeface="D2Coding"/>
+                <a:ea typeface="D2Coding"/>
+                <a:cs typeface="D2Coding"/>
               </a:rPr>
               <a:t>"'"</a:t>
             </a:r>
@@ -23444,9 +23444,9 @@
                 <a:solidFill>
                   <a:srgbClr val="E6EAF2"/>
                 </a:solidFill>
-                <a:latin typeface="나눔고딕코딩"/>
-                <a:ea typeface="나눔고딕코딩"/>
-                <a:cs typeface="나눔고딕코딩"/>
+                <a:latin typeface="D2Coding"/>
+                <a:ea typeface="D2Coding"/>
+                <a:cs typeface="D2Coding"/>
               </a:rPr>
               <a:t>;</a:t>
             </a:r>
@@ -23462,9 +23462,9 @@
                 <a:solidFill>
                   <a:srgbClr val="8F9DB5"/>
                 </a:solidFill>
-                <a:latin typeface="나눔고딕코딩"/>
-                <a:ea typeface="나눔고딕코딩"/>
-                <a:cs typeface="나눔고딕코딩"/>
+                <a:latin typeface="D2Coding"/>
+                <a:ea typeface="D2Coding"/>
+                <a:cs typeface="D2Coding"/>
               </a:rPr>
               <a:t>// 입력값이  ' OR '1'='1  이면 완성되는 SQL은</a:t>
             </a:r>
@@ -23480,9 +23480,9 @@
                 <a:solidFill>
                   <a:srgbClr val="8F9DB5"/>
                 </a:solidFill>
-                <a:latin typeface="나눔고딕코딩"/>
-                <a:ea typeface="나눔고딕코딩"/>
-                <a:cs typeface="나눔고딕코딩"/>
+                <a:latin typeface="D2Coding"/>
+                <a:ea typeface="D2Coding"/>
+                <a:cs typeface="D2Coding"/>
               </a:rPr>
               <a:t>//   SELECT * FROM customers WHERE cust_id = '' OR '1'='1'</a:t>
             </a:r>
@@ -23498,9 +23498,9 @@
                 <a:solidFill>
                   <a:srgbClr val="8F9DB5"/>
                 </a:solidFill>
-                <a:latin typeface="나눔고딕코딩"/>
-                <a:ea typeface="나눔고딕코딩"/>
-                <a:cs typeface="나눔고딕코딩"/>
+                <a:latin typeface="D2Coding"/>
+                <a:ea typeface="D2Coding"/>
+                <a:cs typeface="D2Coding"/>
               </a:rPr>
               <a:t>// → 조건이 항상 참이 되어 전체 고객 명단(이메일·포인트 포함)이 통째로 유출된다</a:t>
             </a:r>
@@ -23516,9 +23516,9 @@
                 <a:solidFill>
                   <a:srgbClr val="8F9DB5"/>
                 </a:solidFill>
-                <a:latin typeface="나눔고딕코딩"/>
-                <a:ea typeface="나눔고딕코딩"/>
-                <a:cs typeface="나눔고딕코딩"/>
+                <a:latin typeface="D2Coding"/>
+                <a:ea typeface="D2Coding"/>
+                <a:cs typeface="D2Coding"/>
               </a:rPr>
               <a:t>// 입력값 속의 따옴표(')가 SQL 문법의 일부로 해석되는 것이 문제의 핵심이다</a:t>
             </a:r>
@@ -23534,9 +23534,9 @@
                 <a:solidFill>
                   <a:srgbClr val="E6EAF2"/>
                 </a:solidFill>
-                <a:latin typeface="나눔고딕코딩"/>
-                <a:ea typeface="나눔고딕코딩"/>
-                <a:cs typeface="나눔고딕코딩"/>
+                <a:latin typeface="D2Coding"/>
+                <a:ea typeface="D2Coding"/>
+                <a:cs typeface="D2Coding"/>
               </a:rPr>
               <a:t/>
             </a:r>
@@ -23552,9 +23552,9 @@
                 <a:solidFill>
                   <a:srgbClr val="8F9DB5"/>
                 </a:solidFill>
-                <a:latin typeface="나눔고딕코딩"/>
-                <a:ea typeface="나눔고딕코딩"/>
-                <a:cs typeface="나눔고딕코딩"/>
+                <a:latin typeface="D2Coding"/>
+                <a:ea typeface="D2Coding"/>
+                <a:cs typeface="D2Coding"/>
               </a:rPr>
               <a:t>// ✓ 안전: 파라미터 바인딩</a:t>
             </a:r>
@@ -23570,9 +23570,9 @@
                 <a:solidFill>
                   <a:srgbClr val="8F9DB5"/>
                 </a:solidFill>
-                <a:latin typeface="나눔고딕코딩"/>
-                <a:ea typeface="나눔고딕코딩"/>
-                <a:cs typeface="나눔고딕코딩"/>
+                <a:latin typeface="D2Coding"/>
+                <a:ea typeface="D2Coding"/>
+                <a:cs typeface="D2Coding"/>
               </a:rPr>
               <a:t>// SQL 문장은 ? 로 고정해 두고, 값은 배열로 따로 넘긴다</a:t>
             </a:r>
@@ -23588,9 +23588,9 @@
                 <a:solidFill>
                   <a:srgbClr val="D9A7FF"/>
                 </a:solidFill>
-                <a:latin typeface="나눔고딕코딩"/>
-                <a:ea typeface="나눔고딕코딩"/>
-                <a:cs typeface="나눔고딕코딩"/>
+                <a:latin typeface="D2Coding"/>
+                <a:ea typeface="D2Coding"/>
+                <a:cs typeface="D2Coding"/>
               </a:rPr>
               <a:t>const</a:t>
             </a:r>
@@ -23599,9 +23599,9 @@
                 <a:solidFill>
                   <a:srgbClr val="E6EAF2"/>
                 </a:solidFill>
-                <a:latin typeface="나눔고딕코딩"/>
-                <a:ea typeface="나눔고딕코딩"/>
-                <a:cs typeface="나눔고딕코딩"/>
+                <a:latin typeface="D2Coding"/>
+                <a:ea typeface="D2Coding"/>
+                <a:cs typeface="D2Coding"/>
               </a:rPr>
               <a:t> [</a:t>
             </a:r>
@@ -23610,9 +23610,9 @@
                 <a:solidFill>
                   <a:srgbClr val="E6EAF2"/>
                 </a:solidFill>
-                <a:latin typeface="나눔고딕코딩"/>
-                <a:ea typeface="나눔고딕코딩"/>
-                <a:cs typeface="나눔고딕코딩"/>
+                <a:latin typeface="D2Coding"/>
+                <a:ea typeface="D2Coding"/>
+                <a:cs typeface="D2Coding"/>
               </a:rPr>
               <a:t>rows</a:t>
             </a:r>
@@ -23621,9 +23621,9 @@
                 <a:solidFill>
                   <a:srgbClr val="E6EAF2"/>
                 </a:solidFill>
-                <a:latin typeface="나눔고딕코딩"/>
-                <a:ea typeface="나눔고딕코딩"/>
-                <a:cs typeface="나눔고딕코딩"/>
+                <a:latin typeface="D2Coding"/>
+                <a:ea typeface="D2Coding"/>
+                <a:cs typeface="D2Coding"/>
               </a:rPr>
               <a:t>] = </a:t>
             </a:r>
@@ -23632,9 +23632,9 @@
                 <a:solidFill>
                   <a:srgbClr val="D9A7FF"/>
                 </a:solidFill>
-                <a:latin typeface="나눔고딕코딩"/>
-                <a:ea typeface="나눔고딕코딩"/>
-                <a:cs typeface="나눔고딕코딩"/>
+                <a:latin typeface="D2Coding"/>
+                <a:ea typeface="D2Coding"/>
+                <a:cs typeface="D2Coding"/>
               </a:rPr>
               <a:t>await</a:t>
             </a:r>
@@ -23643,9 +23643,9 @@
                 <a:solidFill>
                   <a:srgbClr val="E6EAF2"/>
                 </a:solidFill>
-                <a:latin typeface="나눔고딕코딩"/>
-                <a:ea typeface="나눔고딕코딩"/>
-                <a:cs typeface="나눔고딕코딩"/>
+                <a:latin typeface="D2Coding"/>
+                <a:ea typeface="D2Coding"/>
+                <a:cs typeface="D2Coding"/>
               </a:rPr>
               <a:t> </a:t>
             </a:r>
@@ -23654,9 +23654,9 @@
                 <a:solidFill>
                   <a:srgbClr val="E6EAF2"/>
                 </a:solidFill>
-                <a:latin typeface="나눔고딕코딩"/>
-                <a:ea typeface="나눔고딕코딩"/>
-                <a:cs typeface="나눔고딕코딩"/>
+                <a:latin typeface="D2Coding"/>
+                <a:ea typeface="D2Coding"/>
+                <a:cs typeface="D2Coding"/>
               </a:rPr>
               <a:t>pool</a:t>
             </a:r>
@@ -23665,9 +23665,9 @@
                 <a:solidFill>
                   <a:srgbClr val="E6EAF2"/>
                 </a:solidFill>
-                <a:latin typeface="나눔고딕코딩"/>
-                <a:ea typeface="나눔고딕코딩"/>
-                <a:cs typeface="나눔고딕코딩"/>
+                <a:latin typeface="D2Coding"/>
+                <a:ea typeface="D2Coding"/>
+                <a:cs typeface="D2Coding"/>
               </a:rPr>
               <a:t>.</a:t>
             </a:r>
@@ -23676,9 +23676,9 @@
                 <a:solidFill>
                   <a:srgbClr val="E6EAF2"/>
                 </a:solidFill>
-                <a:latin typeface="나눔고딕코딩"/>
-                <a:ea typeface="나눔고딕코딩"/>
-                <a:cs typeface="나눔고딕코딩"/>
+                <a:latin typeface="D2Coding"/>
+                <a:ea typeface="D2Coding"/>
+                <a:cs typeface="D2Coding"/>
               </a:rPr>
               <a:t>query</a:t>
             </a:r>
@@ -23687,9 +23687,9 @@
                 <a:solidFill>
                   <a:srgbClr val="E6EAF2"/>
                 </a:solidFill>
-                <a:latin typeface="나눔고딕코딩"/>
-                <a:ea typeface="나눔고딕코딩"/>
-                <a:cs typeface="나눔고딕코딩"/>
+                <a:latin typeface="D2Coding"/>
+                <a:ea typeface="D2Coding"/>
+                <a:cs typeface="D2Coding"/>
               </a:rPr>
               <a:t>(</a:t>
             </a:r>
@@ -23705,9 +23705,9 @@
                 <a:solidFill>
                   <a:srgbClr val="E6EAF2"/>
                 </a:solidFill>
-                <a:latin typeface="나눔고딕코딩"/>
-                <a:ea typeface="나눔고딕코딩"/>
-                <a:cs typeface="나눔고딕코딩"/>
+                <a:latin typeface="D2Coding"/>
+                <a:ea typeface="D2Coding"/>
+                <a:cs typeface="D2Coding"/>
               </a:rPr>
               <a:t>  </a:t>
             </a:r>
@@ -23716,9 +23716,9 @@
                 <a:solidFill>
                   <a:srgbClr val="F5C97A"/>
                 </a:solidFill>
-                <a:latin typeface="나눔고딕코딩"/>
-                <a:ea typeface="나눔고딕코딩"/>
-                <a:cs typeface="나눔고딕코딩"/>
+                <a:latin typeface="D2Coding"/>
+                <a:ea typeface="D2Coding"/>
+                <a:cs typeface="D2Coding"/>
               </a:rPr>
               <a:t>'SELECT * FROM customers WHERE cust_id = ?'</a:t>
             </a:r>
@@ -23727,9 +23727,9 @@
                 <a:solidFill>
                   <a:srgbClr val="E6EAF2"/>
                 </a:solidFill>
-                <a:latin typeface="나눔고딕코딩"/>
-                <a:ea typeface="나눔고딕코딩"/>
-                <a:cs typeface="나눔고딕코딩"/>
+                <a:latin typeface="D2Coding"/>
+                <a:ea typeface="D2Coding"/>
+                <a:cs typeface="D2Coding"/>
               </a:rPr>
               <a:t>,</a:t>
             </a:r>
@@ -23745,9 +23745,9 @@
                 <a:solidFill>
                   <a:srgbClr val="E6EAF2"/>
                 </a:solidFill>
-                <a:latin typeface="나눔고딕코딩"/>
-                <a:ea typeface="나눔고딕코딩"/>
-                <a:cs typeface="나눔고딕코딩"/>
+                <a:latin typeface="D2Coding"/>
+                <a:ea typeface="D2Coding"/>
+                <a:cs typeface="D2Coding"/>
               </a:rPr>
               <a:t>  [</a:t>
             </a:r>
@@ -23756,9 +23756,9 @@
                 <a:solidFill>
                   <a:srgbClr val="E6EAF2"/>
                 </a:solidFill>
-                <a:latin typeface="나눔고딕코딩"/>
-                <a:ea typeface="나눔고딕코딩"/>
-                <a:cs typeface="나눔고딕코딩"/>
+                <a:latin typeface="D2Coding"/>
+                <a:ea typeface="D2Coding"/>
+                <a:cs typeface="D2Coding"/>
               </a:rPr>
               <a:t>input</a:t>
             </a:r>
@@ -23767,9 +23767,9 @@
                 <a:solidFill>
                   <a:srgbClr val="E6EAF2"/>
                 </a:solidFill>
-                <a:latin typeface="나눔고딕코딩"/>
-                <a:ea typeface="나눔고딕코딩"/>
-                <a:cs typeface="나눔고딕코딩"/>
+                <a:latin typeface="D2Coding"/>
+                <a:ea typeface="D2Coding"/>
+                <a:cs typeface="D2Coding"/>
               </a:rPr>
               <a:t>]</a:t>
             </a:r>
@@ -23785,9 +23785,9 @@
                 <a:solidFill>
                   <a:srgbClr val="E6EAF2"/>
                 </a:solidFill>
-                <a:latin typeface="나눔고딕코딩"/>
-                <a:ea typeface="나눔고딕코딩"/>
-                <a:cs typeface="나눔고딕코딩"/>
+                <a:latin typeface="D2Coding"/>
+                <a:ea typeface="D2Coding"/>
+                <a:cs typeface="D2Coding"/>
               </a:rPr>
               <a:t>);</a:t>
             </a:r>
@@ -23803,9 +23803,9 @@
                 <a:solidFill>
                   <a:srgbClr val="8F9DB5"/>
                 </a:solidFill>
-                <a:latin typeface="나눔고딕코딩"/>
-                <a:ea typeface="나눔고딕코딩"/>
-                <a:cs typeface="나눔고딕코딩"/>
+                <a:latin typeface="D2Coding"/>
+                <a:ea typeface="D2Coding"/>
+                <a:cs typeface="D2Coding"/>
               </a:rPr>
               <a:t>// 입력값은 항상 "데이터"로만 취급되어 SQL의 구조를 바꿀 수 없다</a:t>
             </a:r>
@@ -23821,9 +23821,9 @@
                 <a:solidFill>
                   <a:srgbClr val="8F9DB5"/>
                 </a:solidFill>
-                <a:latin typeface="나눔고딕코딩"/>
-                <a:ea typeface="나눔고딕코딩"/>
-                <a:cs typeface="나눔고딕코딩"/>
+                <a:latin typeface="D2Coding"/>
+                <a:ea typeface="D2Coding"/>
+                <a:cs typeface="D2Coding"/>
               </a:rPr>
               <a:t>// 같은  ' OR '1'='1  을 넣어도 "그런 글자의 고객번호"를 찾을 뿐이라 0건이 나온다</a:t>
             </a:r>
@@ -37750,9 +37750,9 @@
                 <a:solidFill>
                   <a:srgbClr val="E6EAF2"/>
                 </a:solidFill>
-                <a:latin typeface="나눔고딕코딩"/>
-                <a:ea typeface="나눔고딕코딩"/>
-                <a:cs typeface="나눔고딕코딩"/>
+                <a:latin typeface="D2Coding"/>
+                <a:ea typeface="D2Coding"/>
+                <a:cs typeface="D2Coding"/>
               </a:rPr>
               <a:t>node -v</a:t>
             </a:r>
@@ -37969,9 +37969,9 @@
                 <a:solidFill>
                   <a:srgbClr val="E6EAF2"/>
                 </a:solidFill>
-                <a:latin typeface="나눔고딕코딩"/>
-                <a:ea typeface="나눔고딕코딩"/>
-                <a:cs typeface="나눔고딕코딩"/>
+                <a:latin typeface="D2Coding"/>
+                <a:ea typeface="D2Coding"/>
+                <a:cs typeface="D2Coding"/>
               </a:rPr>
               <a:t>npm -v</a:t>
             </a:r>
@@ -38188,9 +38188,9 @@
                 <a:solidFill>
                   <a:srgbClr val="E6EAF2"/>
                 </a:solidFill>
-                <a:latin typeface="나눔고딕코딩"/>
-                <a:ea typeface="나눔고딕코딩"/>
-                <a:cs typeface="나눔고딕코딩"/>
+                <a:latin typeface="D2Coding"/>
+                <a:ea typeface="D2Coding"/>
+                <a:cs typeface="D2Coding"/>
               </a:rPr>
               <a:t>mkdir daon-web</a:t>
             </a:r>
@@ -38366,9 +38366,9 @@
                 <a:solidFill>
                   <a:srgbClr val="E6EAF2"/>
                 </a:solidFill>
-                <a:latin typeface="나눔고딕코딩"/>
-                <a:ea typeface="나눔고딕코딩"/>
-                <a:cs typeface="나눔고딕코딩"/>
+                <a:latin typeface="D2Coding"/>
+                <a:ea typeface="D2Coding"/>
+                <a:cs typeface="D2Coding"/>
               </a:rPr>
               <a:t>cd daon-web</a:t>
             </a:r>
@@ -38544,9 +38544,9 @@
                 <a:solidFill>
                   <a:srgbClr val="E6EAF2"/>
                 </a:solidFill>
-                <a:latin typeface="나눔고딕코딩"/>
-                <a:ea typeface="나눔고딕코딩"/>
-                <a:cs typeface="나눔고딕코딩"/>
+                <a:latin typeface="D2Coding"/>
+                <a:ea typeface="D2Coding"/>
+                <a:cs typeface="D2Coding"/>
               </a:rPr>
               <a:t>npm init -y</a:t>
             </a:r>
@@ -38763,9 +38763,9 @@
                 <a:solidFill>
                   <a:srgbClr val="E6EAF2"/>
                 </a:solidFill>
-                <a:latin typeface="나눔고딕코딩"/>
-                <a:ea typeface="나눔고딕코딩"/>
-                <a:cs typeface="나눔고딕코딩"/>
+                <a:latin typeface="D2Coding"/>
+                <a:ea typeface="D2Coding"/>
+                <a:cs typeface="D2Coding"/>
               </a:rPr>
               <a:t>npm install express mysql2</a:t>
             </a:r>
@@ -40683,9 +40683,9 @@
                 <a:solidFill>
                   <a:srgbClr val="7A869C"/>
                 </a:solidFill>
-                <a:latin typeface="나눔고딕코딩"/>
-                <a:ea typeface="나눔고딕코딩"/>
-                <a:cs typeface="나눔고딕코딩"/>
+                <a:latin typeface="D2Coding"/>
+                <a:ea typeface="D2Coding"/>
+                <a:cs typeface="D2Coding"/>
               </a:rPr>
               <a:t>1</a:t>
             </a:r>
@@ -40701,9 +40701,9 @@
                 <a:solidFill>
                   <a:srgbClr val="7A869C"/>
                 </a:solidFill>
-                <a:latin typeface="나눔고딕코딩"/>
-                <a:ea typeface="나눔고딕코딩"/>
-                <a:cs typeface="나눔고딕코딩"/>
+                <a:latin typeface="D2Coding"/>
+                <a:ea typeface="D2Coding"/>
+                <a:cs typeface="D2Coding"/>
               </a:rPr>
               <a:t>2</a:t>
             </a:r>
@@ -40719,9 +40719,9 @@
                 <a:solidFill>
                   <a:srgbClr val="7A869C"/>
                 </a:solidFill>
-                <a:latin typeface="나눔고딕코딩"/>
-                <a:ea typeface="나눔고딕코딩"/>
-                <a:cs typeface="나눔고딕코딩"/>
+                <a:latin typeface="D2Coding"/>
+                <a:ea typeface="D2Coding"/>
+                <a:cs typeface="D2Coding"/>
               </a:rPr>
               <a:t>3</a:t>
             </a:r>
@@ -40737,9 +40737,9 @@
                 <a:solidFill>
                   <a:srgbClr val="7A869C"/>
                 </a:solidFill>
-                <a:latin typeface="나눔고딕코딩"/>
-                <a:ea typeface="나눔고딕코딩"/>
-                <a:cs typeface="나눔고딕코딩"/>
+                <a:latin typeface="D2Coding"/>
+                <a:ea typeface="D2Coding"/>
+                <a:cs typeface="D2Coding"/>
               </a:rPr>
               <a:t>4</a:t>
             </a:r>
@@ -40755,9 +40755,9 @@
                 <a:solidFill>
                   <a:srgbClr val="7A869C"/>
                 </a:solidFill>
-                <a:latin typeface="나눔고딕코딩"/>
-                <a:ea typeface="나눔고딕코딩"/>
-                <a:cs typeface="나눔고딕코딩"/>
+                <a:latin typeface="D2Coding"/>
+                <a:ea typeface="D2Coding"/>
+                <a:cs typeface="D2Coding"/>
               </a:rPr>
               <a:t>5</a:t>
             </a:r>
@@ -40773,9 +40773,9 @@
                 <a:solidFill>
                   <a:srgbClr val="7A869C"/>
                 </a:solidFill>
-                <a:latin typeface="나눔고딕코딩"/>
-                <a:ea typeface="나눔고딕코딩"/>
-                <a:cs typeface="나눔고딕코딩"/>
+                <a:latin typeface="D2Coding"/>
+                <a:ea typeface="D2Coding"/>
+                <a:cs typeface="D2Coding"/>
               </a:rPr>
               <a:t>6</a:t>
             </a:r>
@@ -40791,9 +40791,9 @@
                 <a:solidFill>
                   <a:srgbClr val="7A869C"/>
                 </a:solidFill>
-                <a:latin typeface="나눔고딕코딩"/>
-                <a:ea typeface="나눔고딕코딩"/>
-                <a:cs typeface="나눔고딕코딩"/>
+                <a:latin typeface="D2Coding"/>
+                <a:ea typeface="D2Coding"/>
+                <a:cs typeface="D2Coding"/>
               </a:rPr>
               <a:t>7</a:t>
             </a:r>
@@ -40809,9 +40809,9 @@
                 <a:solidFill>
                   <a:srgbClr val="7A869C"/>
                 </a:solidFill>
-                <a:latin typeface="나눔고딕코딩"/>
-                <a:ea typeface="나눔고딕코딩"/>
-                <a:cs typeface="나눔고딕코딩"/>
+                <a:latin typeface="D2Coding"/>
+                <a:ea typeface="D2Coding"/>
+                <a:cs typeface="D2Coding"/>
               </a:rPr>
               <a:t>8</a:t>
             </a:r>
@@ -40827,9 +40827,9 @@
                 <a:solidFill>
                   <a:srgbClr val="7A869C"/>
                 </a:solidFill>
-                <a:latin typeface="나눔고딕코딩"/>
-                <a:ea typeface="나눔고딕코딩"/>
-                <a:cs typeface="나눔고딕코딩"/>
+                <a:latin typeface="D2Coding"/>
+                <a:ea typeface="D2Coding"/>
+                <a:cs typeface="D2Coding"/>
               </a:rPr>
               <a:t>9</a:t>
             </a:r>
@@ -40845,9 +40845,9 @@
                 <a:solidFill>
                   <a:srgbClr val="7A869C"/>
                 </a:solidFill>
-                <a:latin typeface="나눔고딕코딩"/>
-                <a:ea typeface="나눔고딕코딩"/>
-                <a:cs typeface="나눔고딕코딩"/>
+                <a:latin typeface="D2Coding"/>
+                <a:ea typeface="D2Coding"/>
+                <a:cs typeface="D2Coding"/>
               </a:rPr>
               <a:t>10</a:t>
             </a:r>
@@ -40863,9 +40863,9 @@
                 <a:solidFill>
                   <a:srgbClr val="7A869C"/>
                 </a:solidFill>
-                <a:latin typeface="나눔고딕코딩"/>
-                <a:ea typeface="나눔고딕코딩"/>
-                <a:cs typeface="나눔고딕코딩"/>
+                <a:latin typeface="D2Coding"/>
+                <a:ea typeface="D2Coding"/>
+                <a:cs typeface="D2Coding"/>
               </a:rPr>
               <a:t>11</a:t>
             </a:r>
@@ -40881,9 +40881,9 @@
                 <a:solidFill>
                   <a:srgbClr val="7A869C"/>
                 </a:solidFill>
-                <a:latin typeface="나눔고딕코딩"/>
-                <a:ea typeface="나눔고딕코딩"/>
-                <a:cs typeface="나눔고딕코딩"/>
+                <a:latin typeface="D2Coding"/>
+                <a:ea typeface="D2Coding"/>
+                <a:cs typeface="D2Coding"/>
               </a:rPr>
               <a:t>12</a:t>
             </a:r>
@@ -40899,9 +40899,9 @@
                 <a:solidFill>
                   <a:srgbClr val="7A869C"/>
                 </a:solidFill>
-                <a:latin typeface="나눔고딕코딩"/>
-                <a:ea typeface="나눔고딕코딩"/>
-                <a:cs typeface="나눔고딕코딩"/>
+                <a:latin typeface="D2Coding"/>
+                <a:ea typeface="D2Coding"/>
+                <a:cs typeface="D2Coding"/>
               </a:rPr>
               <a:t>13</a:t>
             </a:r>
@@ -40917,9 +40917,9 @@
                 <a:solidFill>
                   <a:srgbClr val="7A869C"/>
                 </a:solidFill>
-                <a:latin typeface="나눔고딕코딩"/>
-                <a:ea typeface="나눔고딕코딩"/>
-                <a:cs typeface="나눔고딕코딩"/>
+                <a:latin typeface="D2Coding"/>
+                <a:ea typeface="D2Coding"/>
+                <a:cs typeface="D2Coding"/>
               </a:rPr>
               <a:t>14</a:t>
             </a:r>
@@ -40935,9 +40935,9 @@
                 <a:solidFill>
                   <a:srgbClr val="7A869C"/>
                 </a:solidFill>
-                <a:latin typeface="나눔고딕코딩"/>
-                <a:ea typeface="나눔고딕코딩"/>
-                <a:cs typeface="나눔고딕코딩"/>
+                <a:latin typeface="D2Coding"/>
+                <a:ea typeface="D2Coding"/>
+                <a:cs typeface="D2Coding"/>
               </a:rPr>
               <a:t>15</a:t>
             </a:r>
@@ -40953,9 +40953,9 @@
                 <a:solidFill>
                   <a:srgbClr val="7A869C"/>
                 </a:solidFill>
-                <a:latin typeface="나눔고딕코딩"/>
-                <a:ea typeface="나눔고딕코딩"/>
-                <a:cs typeface="나눔고딕코딩"/>
+                <a:latin typeface="D2Coding"/>
+                <a:ea typeface="D2Coding"/>
+                <a:cs typeface="D2Coding"/>
               </a:rPr>
               <a:t>16</a:t>
             </a:r>
@@ -40971,9 +40971,9 @@
                 <a:solidFill>
                   <a:srgbClr val="7A869C"/>
                 </a:solidFill>
-                <a:latin typeface="나눔고딕코딩"/>
-                <a:ea typeface="나눔고딕코딩"/>
-                <a:cs typeface="나눔고딕코딩"/>
+                <a:latin typeface="D2Coding"/>
+                <a:ea typeface="D2Coding"/>
+                <a:cs typeface="D2Coding"/>
               </a:rPr>
               <a:t>17</a:t>
             </a:r>
@@ -41012,9 +41012,9 @@
                 <a:solidFill>
                   <a:srgbClr val="D9A7FF"/>
                 </a:solidFill>
-                <a:latin typeface="나눔고딕코딩"/>
-                <a:ea typeface="나눔고딕코딩"/>
-                <a:cs typeface="나눔고딕코딩"/>
+                <a:latin typeface="D2Coding"/>
+                <a:ea typeface="D2Coding"/>
+                <a:cs typeface="D2Coding"/>
               </a:rPr>
               <a:t>const</a:t>
             </a:r>
@@ -41023,9 +41023,9 @@
                 <a:solidFill>
                   <a:srgbClr val="E6EAF2"/>
                 </a:solidFill>
-                <a:latin typeface="나눔고딕코딩"/>
-                <a:ea typeface="나눔고딕코딩"/>
-                <a:cs typeface="나눔고딕코딩"/>
+                <a:latin typeface="D2Coding"/>
+                <a:ea typeface="D2Coding"/>
+                <a:cs typeface="D2Coding"/>
               </a:rPr>
               <a:t> </a:t>
             </a:r>
@@ -41034,9 +41034,9 @@
                 <a:solidFill>
                   <a:srgbClr val="E6EAF2"/>
                 </a:solidFill>
-                <a:latin typeface="나눔고딕코딩"/>
-                <a:ea typeface="나눔고딕코딩"/>
-                <a:cs typeface="나눔고딕코딩"/>
+                <a:latin typeface="D2Coding"/>
+                <a:ea typeface="D2Coding"/>
+                <a:cs typeface="D2Coding"/>
               </a:rPr>
               <a:t>mysql</a:t>
             </a:r>
@@ -41045,9 +41045,9 @@
                 <a:solidFill>
                   <a:srgbClr val="E6EAF2"/>
                 </a:solidFill>
-                <a:latin typeface="나눔고딕코딩"/>
-                <a:ea typeface="나눔고딕코딩"/>
-                <a:cs typeface="나눔고딕코딩"/>
+                <a:latin typeface="D2Coding"/>
+                <a:ea typeface="D2Coding"/>
+                <a:cs typeface="D2Coding"/>
               </a:rPr>
               <a:t> = </a:t>
             </a:r>
@@ -41056,9 +41056,9 @@
                 <a:solidFill>
                   <a:srgbClr val="E6EAF2"/>
                 </a:solidFill>
-                <a:latin typeface="나눔고딕코딩"/>
-                <a:ea typeface="나눔고딕코딩"/>
-                <a:cs typeface="나눔고딕코딩"/>
+                <a:latin typeface="D2Coding"/>
+                <a:ea typeface="D2Coding"/>
+                <a:cs typeface="D2Coding"/>
               </a:rPr>
               <a:t>require</a:t>
             </a:r>
@@ -41067,9 +41067,9 @@
                 <a:solidFill>
                   <a:srgbClr val="E6EAF2"/>
                 </a:solidFill>
-                <a:latin typeface="나눔고딕코딩"/>
-                <a:ea typeface="나눔고딕코딩"/>
-                <a:cs typeface="나눔고딕코딩"/>
+                <a:latin typeface="D2Coding"/>
+                <a:ea typeface="D2Coding"/>
+                <a:cs typeface="D2Coding"/>
               </a:rPr>
               <a:t>(</a:t>
             </a:r>
@@ -41078,9 +41078,9 @@
                 <a:solidFill>
                   <a:srgbClr val="F5C97A"/>
                 </a:solidFill>
-                <a:latin typeface="나눔고딕코딩"/>
-                <a:ea typeface="나눔고딕코딩"/>
-                <a:cs typeface="나눔고딕코딩"/>
+                <a:latin typeface="D2Coding"/>
+                <a:ea typeface="D2Coding"/>
+                <a:cs typeface="D2Coding"/>
               </a:rPr>
               <a:t>'mysql2/promise'</a:t>
             </a:r>
@@ -41089,9 +41089,9 @@
                 <a:solidFill>
                   <a:srgbClr val="E6EAF2"/>
                 </a:solidFill>
-                <a:latin typeface="나눔고딕코딩"/>
-                <a:ea typeface="나눔고딕코딩"/>
-                <a:cs typeface="나눔고딕코딩"/>
+                <a:latin typeface="D2Coding"/>
+                <a:ea typeface="D2Coding"/>
+                <a:cs typeface="D2Coding"/>
               </a:rPr>
               <a:t>);</a:t>
             </a:r>
@@ -41107,9 +41107,9 @@
                 <a:solidFill>
                   <a:srgbClr val="E6EAF2"/>
                 </a:solidFill>
-                <a:latin typeface="나눔고딕코딩"/>
-                <a:ea typeface="나눔고딕코딩"/>
-                <a:cs typeface="나눔고딕코딩"/>
+                <a:latin typeface="D2Coding"/>
+                <a:ea typeface="D2Coding"/>
+                <a:cs typeface="D2Coding"/>
               </a:rPr>
               <a:t/>
             </a:r>
@@ -41125,9 +41125,9 @@
                 <a:solidFill>
                   <a:srgbClr val="D9A7FF"/>
                 </a:solidFill>
-                <a:latin typeface="나눔고딕코딩"/>
-                <a:ea typeface="나눔고딕코딩"/>
-                <a:cs typeface="나눔고딕코딩"/>
+                <a:latin typeface="D2Coding"/>
+                <a:ea typeface="D2Coding"/>
+                <a:cs typeface="D2Coding"/>
               </a:rPr>
               <a:t>async</a:t>
             </a:r>
@@ -41136,9 +41136,9 @@
                 <a:solidFill>
                   <a:srgbClr val="E6EAF2"/>
                 </a:solidFill>
-                <a:latin typeface="나눔고딕코딩"/>
-                <a:ea typeface="나눔고딕코딩"/>
-                <a:cs typeface="나눔고딕코딩"/>
+                <a:latin typeface="D2Coding"/>
+                <a:ea typeface="D2Coding"/>
+                <a:cs typeface="D2Coding"/>
               </a:rPr>
               <a:t> </a:t>
             </a:r>
@@ -41147,9 +41147,9 @@
                 <a:solidFill>
                   <a:srgbClr val="D9A7FF"/>
                 </a:solidFill>
-                <a:latin typeface="나눔고딕코딩"/>
-                <a:ea typeface="나눔고딕코딩"/>
-                <a:cs typeface="나눔고딕코딩"/>
+                <a:latin typeface="D2Coding"/>
+                <a:ea typeface="D2Coding"/>
+                <a:cs typeface="D2Coding"/>
               </a:rPr>
               <a:t>function</a:t>
             </a:r>
@@ -41158,9 +41158,9 @@
                 <a:solidFill>
                   <a:srgbClr val="E6EAF2"/>
                 </a:solidFill>
-                <a:latin typeface="나눔고딕코딩"/>
-                <a:ea typeface="나눔고딕코딩"/>
-                <a:cs typeface="나눔고딕코딩"/>
+                <a:latin typeface="D2Coding"/>
+                <a:ea typeface="D2Coding"/>
+                <a:cs typeface="D2Coding"/>
               </a:rPr>
               <a:t> </a:t>
             </a:r>
@@ -41169,9 +41169,9 @@
                 <a:solidFill>
                   <a:srgbClr val="E6EAF2"/>
                 </a:solidFill>
-                <a:latin typeface="나눔고딕코딩"/>
-                <a:ea typeface="나눔고딕코딩"/>
-                <a:cs typeface="나눔고딕코딩"/>
+                <a:latin typeface="D2Coding"/>
+                <a:ea typeface="D2Coding"/>
+                <a:cs typeface="D2Coding"/>
               </a:rPr>
               <a:t>main</a:t>
             </a:r>
@@ -41180,9 +41180,9 @@
                 <a:solidFill>
                   <a:srgbClr val="E6EAF2"/>
                 </a:solidFill>
-                <a:latin typeface="나눔고딕코딩"/>
-                <a:ea typeface="나눔고딕코딩"/>
-                <a:cs typeface="나눔고딕코딩"/>
+                <a:latin typeface="D2Coding"/>
+                <a:ea typeface="D2Coding"/>
+                <a:cs typeface="D2Coding"/>
               </a:rPr>
               <a:t>() {</a:t>
             </a:r>
@@ -41198,9 +41198,9 @@
                 <a:solidFill>
                   <a:srgbClr val="E6EAF2"/>
                 </a:solidFill>
-                <a:latin typeface="나눔고딕코딩"/>
-                <a:ea typeface="나눔고딕코딩"/>
-                <a:cs typeface="나눔고딕코딩"/>
+                <a:latin typeface="D2Coding"/>
+                <a:ea typeface="D2Coding"/>
+                <a:cs typeface="D2Coding"/>
               </a:rPr>
               <a:t>  </a:t>
             </a:r>
@@ -41209,9 +41209,9 @@
                 <a:solidFill>
                   <a:srgbClr val="D9A7FF"/>
                 </a:solidFill>
-                <a:latin typeface="나눔고딕코딩"/>
-                <a:ea typeface="나눔고딕코딩"/>
-                <a:cs typeface="나눔고딕코딩"/>
+                <a:latin typeface="D2Coding"/>
+                <a:ea typeface="D2Coding"/>
+                <a:cs typeface="D2Coding"/>
               </a:rPr>
               <a:t>const</a:t>
             </a:r>
@@ -41220,9 +41220,9 @@
                 <a:solidFill>
                   <a:srgbClr val="E6EAF2"/>
                 </a:solidFill>
-                <a:latin typeface="나눔고딕코딩"/>
-                <a:ea typeface="나눔고딕코딩"/>
-                <a:cs typeface="나눔고딕코딩"/>
+                <a:latin typeface="D2Coding"/>
+                <a:ea typeface="D2Coding"/>
+                <a:cs typeface="D2Coding"/>
               </a:rPr>
               <a:t> </a:t>
             </a:r>
@@ -41231,9 +41231,9 @@
                 <a:solidFill>
                   <a:srgbClr val="E6EAF2"/>
                 </a:solidFill>
-                <a:latin typeface="나눔고딕코딩"/>
-                <a:ea typeface="나눔고딕코딩"/>
-                <a:cs typeface="나눔고딕코딩"/>
+                <a:latin typeface="D2Coding"/>
+                <a:ea typeface="D2Coding"/>
+                <a:cs typeface="D2Coding"/>
               </a:rPr>
               <a:t>conn</a:t>
             </a:r>
@@ -41242,9 +41242,9 @@
                 <a:solidFill>
                   <a:srgbClr val="E6EAF2"/>
                 </a:solidFill>
-                <a:latin typeface="나눔고딕코딩"/>
-                <a:ea typeface="나눔고딕코딩"/>
-                <a:cs typeface="나눔고딕코딩"/>
+                <a:latin typeface="D2Coding"/>
+                <a:ea typeface="D2Coding"/>
+                <a:cs typeface="D2Coding"/>
               </a:rPr>
               <a:t> = </a:t>
             </a:r>
@@ -41253,9 +41253,9 @@
                 <a:solidFill>
                   <a:srgbClr val="D9A7FF"/>
                 </a:solidFill>
-                <a:latin typeface="나눔고딕코딩"/>
-                <a:ea typeface="나눔고딕코딩"/>
-                <a:cs typeface="나눔고딕코딩"/>
+                <a:latin typeface="D2Coding"/>
+                <a:ea typeface="D2Coding"/>
+                <a:cs typeface="D2Coding"/>
               </a:rPr>
               <a:t>await</a:t>
             </a:r>
@@ -41264,9 +41264,9 @@
                 <a:solidFill>
                   <a:srgbClr val="E6EAF2"/>
                 </a:solidFill>
-                <a:latin typeface="나눔고딕코딩"/>
-                <a:ea typeface="나눔고딕코딩"/>
-                <a:cs typeface="나눔고딕코딩"/>
+                <a:latin typeface="D2Coding"/>
+                <a:ea typeface="D2Coding"/>
+                <a:cs typeface="D2Coding"/>
               </a:rPr>
               <a:t> </a:t>
             </a:r>
@@ -41275,9 +41275,9 @@
                 <a:solidFill>
                   <a:srgbClr val="E6EAF2"/>
                 </a:solidFill>
-                <a:latin typeface="나눔고딕코딩"/>
-                <a:ea typeface="나눔고딕코딩"/>
-                <a:cs typeface="나눔고딕코딩"/>
+                <a:latin typeface="D2Coding"/>
+                <a:ea typeface="D2Coding"/>
+                <a:cs typeface="D2Coding"/>
               </a:rPr>
               <a:t>mysql</a:t>
             </a:r>
@@ -41286,9 +41286,9 @@
                 <a:solidFill>
                   <a:srgbClr val="E6EAF2"/>
                 </a:solidFill>
-                <a:latin typeface="나눔고딕코딩"/>
-                <a:ea typeface="나눔고딕코딩"/>
-                <a:cs typeface="나눔고딕코딩"/>
+                <a:latin typeface="D2Coding"/>
+                <a:ea typeface="D2Coding"/>
+                <a:cs typeface="D2Coding"/>
               </a:rPr>
               <a:t>.</a:t>
             </a:r>
@@ -41297,9 +41297,9 @@
                 <a:solidFill>
                   <a:srgbClr val="E6EAF2"/>
                 </a:solidFill>
-                <a:latin typeface="나눔고딕코딩"/>
-                <a:ea typeface="나눔고딕코딩"/>
-                <a:cs typeface="나눔고딕코딩"/>
+                <a:latin typeface="D2Coding"/>
+                <a:ea typeface="D2Coding"/>
+                <a:cs typeface="D2Coding"/>
               </a:rPr>
               <a:t>createConnection</a:t>
             </a:r>
@@ -41308,9 +41308,9 @@
                 <a:solidFill>
                   <a:srgbClr val="E6EAF2"/>
                 </a:solidFill>
-                <a:latin typeface="나눔고딕코딩"/>
-                <a:ea typeface="나눔고딕코딩"/>
-                <a:cs typeface="나눔고딕코딩"/>
+                <a:latin typeface="D2Coding"/>
+                <a:ea typeface="D2Coding"/>
+                <a:cs typeface="D2Coding"/>
               </a:rPr>
               <a:t>({</a:t>
             </a:r>
@@ -41326,9 +41326,9 @@
                 <a:solidFill>
                   <a:srgbClr val="E6EAF2"/>
                 </a:solidFill>
-                <a:latin typeface="나눔고딕코딩"/>
-                <a:ea typeface="나눔고딕코딩"/>
-                <a:cs typeface="나눔고딕코딩"/>
+                <a:latin typeface="D2Coding"/>
+                <a:ea typeface="D2Coding"/>
+                <a:cs typeface="D2Coding"/>
               </a:rPr>
               <a:t>    </a:t>
             </a:r>
@@ -41337,9 +41337,9 @@
                 <a:solidFill>
                   <a:srgbClr val="E6EAF2"/>
                 </a:solidFill>
-                <a:latin typeface="나눔고딕코딩"/>
-                <a:ea typeface="나눔고딕코딩"/>
-                <a:cs typeface="나눔고딕코딩"/>
+                <a:latin typeface="D2Coding"/>
+                <a:ea typeface="D2Coding"/>
+                <a:cs typeface="D2Coding"/>
               </a:rPr>
               <a:t>host</a:t>
             </a:r>
@@ -41348,9 +41348,9 @@
                 <a:solidFill>
                   <a:srgbClr val="E6EAF2"/>
                 </a:solidFill>
-                <a:latin typeface="나눔고딕코딩"/>
-                <a:ea typeface="나눔고딕코딩"/>
-                <a:cs typeface="나눔고딕코딩"/>
+                <a:latin typeface="D2Coding"/>
+                <a:ea typeface="D2Coding"/>
+                <a:cs typeface="D2Coding"/>
               </a:rPr>
               <a:t>: </a:t>
             </a:r>
@@ -41359,9 +41359,9 @@
                 <a:solidFill>
                   <a:srgbClr val="F5C97A"/>
                 </a:solidFill>
-                <a:latin typeface="나눔고딕코딩"/>
-                <a:ea typeface="나눔고딕코딩"/>
-                <a:cs typeface="나눔고딕코딩"/>
+                <a:latin typeface="D2Coding"/>
+                <a:ea typeface="D2Coding"/>
+                <a:cs typeface="D2Coding"/>
               </a:rPr>
               <a:t>'localhost'</a:t>
             </a:r>
@@ -41370,9 +41370,9 @@
                 <a:solidFill>
                   <a:srgbClr val="E6EAF2"/>
                 </a:solidFill>
-                <a:latin typeface="나눔고딕코딩"/>
-                <a:ea typeface="나눔고딕코딩"/>
-                <a:cs typeface="나눔고딕코딩"/>
+                <a:latin typeface="D2Coding"/>
+                <a:ea typeface="D2Coding"/>
+                <a:cs typeface="D2Coding"/>
               </a:rPr>
               <a:t>,            </a:t>
             </a:r>
@@ -41381,9 +41381,9 @@
                 <a:solidFill>
                   <a:srgbClr val="8F9DB5"/>
                 </a:solidFill>
-                <a:latin typeface="나눔고딕코딩"/>
-                <a:ea typeface="나눔고딕코딩"/>
-                <a:cs typeface="나눔고딕코딩"/>
+                <a:latin typeface="D2Coding"/>
+                <a:ea typeface="D2Coding"/>
+                <a:cs typeface="D2Coding"/>
               </a:rPr>
               <a:t>// MySQL 서버 위치 — 내 컴퓨터</a:t>
             </a:r>
@@ -41399,9 +41399,9 @@
                 <a:solidFill>
                   <a:srgbClr val="E6EAF2"/>
                 </a:solidFill>
-                <a:latin typeface="나눔고딕코딩"/>
-                <a:ea typeface="나눔고딕코딩"/>
-                <a:cs typeface="나눔고딕코딩"/>
+                <a:latin typeface="D2Coding"/>
+                <a:ea typeface="D2Coding"/>
+                <a:cs typeface="D2Coding"/>
               </a:rPr>
               <a:t>    </a:t>
             </a:r>
@@ -41410,9 +41410,9 @@
                 <a:solidFill>
                   <a:srgbClr val="E6EAF2"/>
                 </a:solidFill>
-                <a:latin typeface="나눔고딕코딩"/>
-                <a:ea typeface="나눔고딕코딩"/>
-                <a:cs typeface="나눔고딕코딩"/>
+                <a:latin typeface="D2Coding"/>
+                <a:ea typeface="D2Coding"/>
+                <a:cs typeface="D2Coding"/>
               </a:rPr>
               <a:t>user</a:t>
             </a:r>
@@ -41421,9 +41421,9 @@
                 <a:solidFill>
                   <a:srgbClr val="E6EAF2"/>
                 </a:solidFill>
-                <a:latin typeface="나눔고딕코딩"/>
-                <a:ea typeface="나눔고딕코딩"/>
-                <a:cs typeface="나눔고딕코딩"/>
+                <a:latin typeface="D2Coding"/>
+                <a:ea typeface="D2Coding"/>
+                <a:cs typeface="D2Coding"/>
               </a:rPr>
               <a:t>: </a:t>
             </a:r>
@@ -41432,9 +41432,9 @@
                 <a:solidFill>
                   <a:srgbClr val="F5C97A"/>
                 </a:solidFill>
-                <a:latin typeface="나눔고딕코딩"/>
-                <a:ea typeface="나눔고딕코딩"/>
-                <a:cs typeface="나눔고딕코딩"/>
+                <a:latin typeface="D2Coding"/>
+                <a:ea typeface="D2Coding"/>
+                <a:cs typeface="D2Coding"/>
               </a:rPr>
               <a:t>'root'</a:t>
             </a:r>
@@ -41443,9 +41443,9 @@
                 <a:solidFill>
                   <a:srgbClr val="E6EAF2"/>
                 </a:solidFill>
-                <a:latin typeface="나눔고딕코딩"/>
-                <a:ea typeface="나눔고딕코딩"/>
-                <a:cs typeface="나눔고딕코딩"/>
+                <a:latin typeface="D2Coding"/>
+                <a:ea typeface="D2Coding"/>
+                <a:cs typeface="D2Coding"/>
               </a:rPr>
               <a:t>,                 </a:t>
             </a:r>
@@ -41454,9 +41454,9 @@
                 <a:solidFill>
                   <a:srgbClr val="8F9DB5"/>
                 </a:solidFill>
-                <a:latin typeface="나눔고딕코딩"/>
-                <a:ea typeface="나눔고딕코딩"/>
-                <a:cs typeface="나눔고딕코딩"/>
+                <a:latin typeface="D2Coding"/>
+                <a:ea typeface="D2Coding"/>
+                <a:cs typeface="D2Coding"/>
               </a:rPr>
               <a:t>// 접속 계정</a:t>
             </a:r>
@@ -41472,9 +41472,9 @@
                 <a:solidFill>
                   <a:srgbClr val="E6EAF2"/>
                 </a:solidFill>
-                <a:latin typeface="나눔고딕코딩"/>
-                <a:ea typeface="나눔고딕코딩"/>
-                <a:cs typeface="나눔고딕코딩"/>
+                <a:latin typeface="D2Coding"/>
+                <a:ea typeface="D2Coding"/>
+                <a:cs typeface="D2Coding"/>
               </a:rPr>
               <a:t>    </a:t>
             </a:r>
@@ -41483,9 +41483,9 @@
                 <a:solidFill>
                   <a:srgbClr val="E6EAF2"/>
                 </a:solidFill>
-                <a:latin typeface="나눔고딕코딩"/>
-                <a:ea typeface="나눔고딕코딩"/>
-                <a:cs typeface="나눔고딕코딩"/>
+                <a:latin typeface="D2Coding"/>
+                <a:ea typeface="D2Coding"/>
+                <a:cs typeface="D2Coding"/>
               </a:rPr>
               <a:t>password</a:t>
             </a:r>
@@ -41494,9 +41494,9 @@
                 <a:solidFill>
                   <a:srgbClr val="E6EAF2"/>
                 </a:solidFill>
-                <a:latin typeface="나눔고딕코딩"/>
-                <a:ea typeface="나눔고딕코딩"/>
-                <a:cs typeface="나눔고딕코딩"/>
+                <a:latin typeface="D2Coding"/>
+                <a:ea typeface="D2Coding"/>
+                <a:cs typeface="D2Coding"/>
               </a:rPr>
               <a:t>: </a:t>
             </a:r>
@@ -41505,9 +41505,9 @@
                 <a:solidFill>
                   <a:srgbClr val="F5C97A"/>
                 </a:solidFill>
-                <a:latin typeface="나눔고딕코딩"/>
-                <a:ea typeface="나눔고딕코딩"/>
-                <a:cs typeface="나눔고딕코딩"/>
+                <a:latin typeface="D2Coding"/>
+                <a:ea typeface="D2Coding"/>
+                <a:cs typeface="D2Coding"/>
               </a:rPr>
               <a:t>'본인 비밀번호'</a:t>
             </a:r>
@@ -41516,9 +41516,9 @@
                 <a:solidFill>
                   <a:srgbClr val="E6EAF2"/>
                 </a:solidFill>
-                <a:latin typeface="나눔고딕코딩"/>
-                <a:ea typeface="나눔고딕코딩"/>
-                <a:cs typeface="나눔고딕코딩"/>
+                <a:latin typeface="D2Coding"/>
+                <a:ea typeface="D2Coding"/>
+                <a:cs typeface="D2Coding"/>
               </a:rPr>
               <a:t>,   </a:t>
             </a:r>
@@ -41527,9 +41527,9 @@
                 <a:solidFill>
                   <a:srgbClr val="8F9DB5"/>
                 </a:solidFill>
-                <a:latin typeface="나눔고딕코딩"/>
-                <a:ea typeface="나눔고딕코딩"/>
-                <a:cs typeface="나눔고딕코딩"/>
+                <a:latin typeface="D2Coding"/>
+                <a:ea typeface="D2Coding"/>
+                <a:cs typeface="D2Coding"/>
               </a:rPr>
               <a:t>// ← 이 줄만 본인 환경에 맞게 수정</a:t>
             </a:r>
@@ -41545,9 +41545,9 @@
                 <a:solidFill>
                   <a:srgbClr val="E6EAF2"/>
                 </a:solidFill>
-                <a:latin typeface="나눔고딕코딩"/>
-                <a:ea typeface="나눔고딕코딩"/>
-                <a:cs typeface="나눔고딕코딩"/>
+                <a:latin typeface="D2Coding"/>
+                <a:ea typeface="D2Coding"/>
+                <a:cs typeface="D2Coding"/>
               </a:rPr>
               <a:t>    </a:t>
             </a:r>
@@ -41556,9 +41556,9 @@
                 <a:solidFill>
                   <a:srgbClr val="E6EAF2"/>
                 </a:solidFill>
-                <a:latin typeface="나눔고딕코딩"/>
-                <a:ea typeface="나눔고딕코딩"/>
-                <a:cs typeface="나눔고딕코딩"/>
+                <a:latin typeface="D2Coding"/>
+                <a:ea typeface="D2Coding"/>
+                <a:cs typeface="D2Coding"/>
               </a:rPr>
               <a:t>database</a:t>
             </a:r>
@@ -41567,9 +41567,9 @@
                 <a:solidFill>
                   <a:srgbClr val="E6EAF2"/>
                 </a:solidFill>
-                <a:latin typeface="나눔고딕코딩"/>
-                <a:ea typeface="나눔고딕코딩"/>
-                <a:cs typeface="나눔고딕코딩"/>
+                <a:latin typeface="D2Coding"/>
+                <a:ea typeface="D2Coding"/>
+                <a:cs typeface="D2Coding"/>
               </a:rPr>
               <a:t>: </a:t>
             </a:r>
@@ -41578,9 +41578,9 @@
                 <a:solidFill>
                   <a:srgbClr val="F5C97A"/>
                 </a:solidFill>
-                <a:latin typeface="나눔고딕코딩"/>
-                <a:ea typeface="나눔고딕코딩"/>
-                <a:cs typeface="나눔고딕코딩"/>
+                <a:latin typeface="D2Coding"/>
+                <a:ea typeface="D2Coding"/>
+                <a:cs typeface="D2Coding"/>
               </a:rPr>
               <a:t>'daon'</a:t>
             </a:r>
@@ -41589,9 +41589,9 @@
                 <a:solidFill>
                   <a:srgbClr val="E6EAF2"/>
                 </a:solidFill>
-                <a:latin typeface="나눔고딕코딩"/>
-                <a:ea typeface="나눔고딕코딩"/>
-                <a:cs typeface="나눔고딕코딩"/>
+                <a:latin typeface="D2Coding"/>
+                <a:ea typeface="D2Coding"/>
+                <a:cs typeface="D2Coding"/>
               </a:rPr>
               <a:t>,             </a:t>
             </a:r>
@@ -41600,9 +41600,9 @@
                 <a:solidFill>
                   <a:srgbClr val="8F9DB5"/>
                 </a:solidFill>
-                <a:latin typeface="나눔고딕코딩"/>
-                <a:ea typeface="나눔고딕코딩"/>
-                <a:cs typeface="나눔고딕코딩"/>
+                <a:latin typeface="D2Coding"/>
+                <a:ea typeface="D2Coding"/>
+                <a:cs typeface="D2Coding"/>
               </a:rPr>
               <a:t>// 사용할 데이터베이스 이름 (USE daon; 과 같은 역할)</a:t>
             </a:r>
@@ -41618,9 +41618,9 @@
                 <a:solidFill>
                   <a:srgbClr val="E6EAF2"/>
                 </a:solidFill>
-                <a:latin typeface="나눔고딕코딩"/>
-                <a:ea typeface="나눔고딕코딩"/>
-                <a:cs typeface="나눔고딕코딩"/>
+                <a:latin typeface="D2Coding"/>
+                <a:ea typeface="D2Coding"/>
+                <a:cs typeface="D2Coding"/>
               </a:rPr>
               <a:t>  });</a:t>
             </a:r>
@@ -41636,9 +41636,9 @@
                 <a:solidFill>
                   <a:srgbClr val="E6EAF2"/>
                 </a:solidFill>
-                <a:latin typeface="나눔고딕코딩"/>
-                <a:ea typeface="나눔고딕코딩"/>
-                <a:cs typeface="나눔고딕코딩"/>
+                <a:latin typeface="D2Coding"/>
+                <a:ea typeface="D2Coding"/>
+                <a:cs typeface="D2Coding"/>
               </a:rPr>
               <a:t/>
             </a:r>
@@ -41654,9 +41654,9 @@
                 <a:solidFill>
                   <a:srgbClr val="E6EAF2"/>
                 </a:solidFill>
-                <a:latin typeface="나눔고딕코딩"/>
-                <a:ea typeface="나눔고딕코딩"/>
-                <a:cs typeface="나눔고딕코딩"/>
+                <a:latin typeface="D2Coding"/>
+                <a:ea typeface="D2Coding"/>
+                <a:cs typeface="D2Coding"/>
               </a:rPr>
               <a:t>  </a:t>
             </a:r>
@@ -41665,9 +41665,9 @@
                 <a:solidFill>
                   <a:srgbClr val="D9A7FF"/>
                 </a:solidFill>
-                <a:latin typeface="나눔고딕코딩"/>
-                <a:ea typeface="나눔고딕코딩"/>
-                <a:cs typeface="나눔고딕코딩"/>
+                <a:latin typeface="D2Coding"/>
+                <a:ea typeface="D2Coding"/>
+                <a:cs typeface="D2Coding"/>
               </a:rPr>
               <a:t>const</a:t>
             </a:r>
@@ -41676,9 +41676,9 @@
                 <a:solidFill>
                   <a:srgbClr val="E6EAF2"/>
                 </a:solidFill>
-                <a:latin typeface="나눔고딕코딩"/>
-                <a:ea typeface="나눔고딕코딩"/>
-                <a:cs typeface="나눔고딕코딩"/>
+                <a:latin typeface="D2Coding"/>
+                <a:ea typeface="D2Coding"/>
+                <a:cs typeface="D2Coding"/>
               </a:rPr>
               <a:t> [</a:t>
             </a:r>
@@ -41687,9 +41687,9 @@
                 <a:solidFill>
                   <a:srgbClr val="E6EAF2"/>
                 </a:solidFill>
-                <a:latin typeface="나눔고딕코딩"/>
-                <a:ea typeface="나눔고딕코딩"/>
-                <a:cs typeface="나눔고딕코딩"/>
+                <a:latin typeface="D2Coding"/>
+                <a:ea typeface="D2Coding"/>
+                <a:cs typeface="D2Coding"/>
               </a:rPr>
               <a:t>rows</a:t>
             </a:r>
@@ -41698,9 +41698,9 @@
                 <a:solidFill>
                   <a:srgbClr val="E6EAF2"/>
                 </a:solidFill>
-                <a:latin typeface="나눔고딕코딩"/>
-                <a:ea typeface="나눔고딕코딩"/>
-                <a:cs typeface="나눔고딕코딩"/>
+                <a:latin typeface="D2Coding"/>
+                <a:ea typeface="D2Coding"/>
+                <a:cs typeface="D2Coding"/>
               </a:rPr>
               <a:t>] = </a:t>
             </a:r>
@@ -41709,9 +41709,9 @@
                 <a:solidFill>
                   <a:srgbClr val="D9A7FF"/>
                 </a:solidFill>
-                <a:latin typeface="나눔고딕코딩"/>
-                <a:ea typeface="나눔고딕코딩"/>
-                <a:cs typeface="나눔고딕코딩"/>
+                <a:latin typeface="D2Coding"/>
+                <a:ea typeface="D2Coding"/>
+                <a:cs typeface="D2Coding"/>
               </a:rPr>
               <a:t>await</a:t>
             </a:r>
@@ -41720,9 +41720,9 @@
                 <a:solidFill>
                   <a:srgbClr val="E6EAF2"/>
                 </a:solidFill>
-                <a:latin typeface="나눔고딕코딩"/>
-                <a:ea typeface="나눔고딕코딩"/>
-                <a:cs typeface="나눔고딕코딩"/>
+                <a:latin typeface="D2Coding"/>
+                <a:ea typeface="D2Coding"/>
+                <a:cs typeface="D2Coding"/>
               </a:rPr>
               <a:t> </a:t>
             </a:r>
@@ -41731,9 +41731,9 @@
                 <a:solidFill>
                   <a:srgbClr val="E6EAF2"/>
                 </a:solidFill>
-                <a:latin typeface="나눔고딕코딩"/>
-                <a:ea typeface="나눔고딕코딩"/>
-                <a:cs typeface="나눔고딕코딩"/>
+                <a:latin typeface="D2Coding"/>
+                <a:ea typeface="D2Coding"/>
+                <a:cs typeface="D2Coding"/>
               </a:rPr>
               <a:t>conn</a:t>
             </a:r>
@@ -41742,9 +41742,9 @@
                 <a:solidFill>
                   <a:srgbClr val="E6EAF2"/>
                 </a:solidFill>
-                <a:latin typeface="나눔고딕코딩"/>
-                <a:ea typeface="나눔고딕코딩"/>
-                <a:cs typeface="나눔고딕코딩"/>
+                <a:latin typeface="D2Coding"/>
+                <a:ea typeface="D2Coding"/>
+                <a:cs typeface="D2Coding"/>
               </a:rPr>
               <a:t>.</a:t>
             </a:r>
@@ -41753,9 +41753,9 @@
                 <a:solidFill>
                   <a:srgbClr val="E6EAF2"/>
                 </a:solidFill>
-                <a:latin typeface="나눔고딕코딩"/>
-                <a:ea typeface="나눔고딕코딩"/>
-                <a:cs typeface="나눔고딕코딩"/>
+                <a:latin typeface="D2Coding"/>
+                <a:ea typeface="D2Coding"/>
+                <a:cs typeface="D2Coding"/>
               </a:rPr>
               <a:t>query</a:t>
             </a:r>
@@ -41764,9 +41764,9 @@
                 <a:solidFill>
                   <a:srgbClr val="E6EAF2"/>
                 </a:solidFill>
-                <a:latin typeface="나눔고딕코딩"/>
-                <a:ea typeface="나눔고딕코딩"/>
-                <a:cs typeface="나눔고딕코딩"/>
+                <a:latin typeface="D2Coding"/>
+                <a:ea typeface="D2Coding"/>
+                <a:cs typeface="D2Coding"/>
               </a:rPr>
               <a:t>(</a:t>
             </a:r>
@@ -41775,9 +41775,9 @@
                 <a:solidFill>
                   <a:srgbClr val="F5C97A"/>
                 </a:solidFill>
-                <a:latin typeface="나눔고딕코딩"/>
-                <a:ea typeface="나눔고딕코딩"/>
-                <a:cs typeface="나눔고딕코딩"/>
+                <a:latin typeface="D2Coding"/>
+                <a:ea typeface="D2Coding"/>
+                <a:cs typeface="D2Coding"/>
               </a:rPr>
               <a:t>'SELECT COUNT(*) AS cnt FROM products'</a:t>
             </a:r>
@@ -41786,9 +41786,9 @@
                 <a:solidFill>
                   <a:srgbClr val="E6EAF2"/>
                 </a:solidFill>
-                <a:latin typeface="나눔고딕코딩"/>
-                <a:ea typeface="나눔고딕코딩"/>
-                <a:cs typeface="나눔고딕코딩"/>
+                <a:latin typeface="D2Coding"/>
+                <a:ea typeface="D2Coding"/>
+                <a:cs typeface="D2Coding"/>
               </a:rPr>
               <a:t>);</a:t>
             </a:r>
@@ -41804,9 +41804,9 @@
                 <a:solidFill>
                   <a:srgbClr val="E6EAF2"/>
                 </a:solidFill>
-                <a:latin typeface="나눔고딕코딩"/>
-                <a:ea typeface="나눔고딕코딩"/>
-                <a:cs typeface="나눔고딕코딩"/>
+                <a:latin typeface="D2Coding"/>
+                <a:ea typeface="D2Coding"/>
+                <a:cs typeface="D2Coding"/>
               </a:rPr>
               <a:t>  </a:t>
             </a:r>
@@ -41815,9 +41815,9 @@
                 <a:solidFill>
                   <a:srgbClr val="E6EAF2"/>
                 </a:solidFill>
-                <a:latin typeface="나눔고딕코딩"/>
-                <a:ea typeface="나눔고딕코딩"/>
-                <a:cs typeface="나눔고딕코딩"/>
+                <a:latin typeface="D2Coding"/>
+                <a:ea typeface="D2Coding"/>
+                <a:cs typeface="D2Coding"/>
               </a:rPr>
               <a:t>console</a:t>
             </a:r>
@@ -41826,9 +41826,9 @@
                 <a:solidFill>
                   <a:srgbClr val="E6EAF2"/>
                 </a:solidFill>
-                <a:latin typeface="나눔고딕코딩"/>
-                <a:ea typeface="나눔고딕코딩"/>
-                <a:cs typeface="나눔고딕코딩"/>
+                <a:latin typeface="D2Coding"/>
+                <a:ea typeface="D2Coding"/>
+                <a:cs typeface="D2Coding"/>
               </a:rPr>
               <a:t>.</a:t>
             </a:r>
@@ -41837,9 +41837,9 @@
                 <a:solidFill>
                   <a:srgbClr val="E6EAF2"/>
                 </a:solidFill>
-                <a:latin typeface="나눔고딕코딩"/>
-                <a:ea typeface="나눔고딕코딩"/>
-                <a:cs typeface="나눔고딕코딩"/>
+                <a:latin typeface="D2Coding"/>
+                <a:ea typeface="D2Coding"/>
+                <a:cs typeface="D2Coding"/>
               </a:rPr>
               <a:t>log</a:t>
             </a:r>
@@ -41848,9 +41848,9 @@
                 <a:solidFill>
                   <a:srgbClr val="E6EAF2"/>
                 </a:solidFill>
-                <a:latin typeface="나눔고딕코딩"/>
-                <a:ea typeface="나눔고딕코딩"/>
-                <a:cs typeface="나눔고딕코딩"/>
+                <a:latin typeface="D2Coding"/>
+                <a:ea typeface="D2Coding"/>
+                <a:cs typeface="D2Coding"/>
               </a:rPr>
               <a:t>(</a:t>
             </a:r>
@@ -41859,9 +41859,9 @@
                 <a:solidFill>
                   <a:srgbClr val="F5C97A"/>
                 </a:solidFill>
-                <a:latin typeface="나눔고딕코딩"/>
-                <a:ea typeface="나눔고딕코딩"/>
-                <a:cs typeface="나눔고딕코딩"/>
+                <a:latin typeface="D2Coding"/>
+                <a:ea typeface="D2Coding"/>
+                <a:cs typeface="D2Coding"/>
               </a:rPr>
               <a:t>'상품 수:'</a:t>
             </a:r>
@@ -41870,9 +41870,9 @@
                 <a:solidFill>
                   <a:srgbClr val="E6EAF2"/>
                 </a:solidFill>
-                <a:latin typeface="나눔고딕코딩"/>
-                <a:ea typeface="나눔고딕코딩"/>
-                <a:cs typeface="나눔고딕코딩"/>
+                <a:latin typeface="D2Coding"/>
+                <a:ea typeface="D2Coding"/>
+                <a:cs typeface="D2Coding"/>
               </a:rPr>
               <a:t>, </a:t>
             </a:r>
@@ -41881,9 +41881,9 @@
                 <a:solidFill>
                   <a:srgbClr val="E6EAF2"/>
                 </a:solidFill>
-                <a:latin typeface="나눔고딕코딩"/>
-                <a:ea typeface="나눔고딕코딩"/>
-                <a:cs typeface="나눔고딕코딩"/>
+                <a:latin typeface="D2Coding"/>
+                <a:ea typeface="D2Coding"/>
+                <a:cs typeface="D2Coding"/>
               </a:rPr>
               <a:t>rows</a:t>
             </a:r>
@@ -41892,9 +41892,9 @@
                 <a:solidFill>
                   <a:srgbClr val="E6EAF2"/>
                 </a:solidFill>
-                <a:latin typeface="나눔고딕코딩"/>
-                <a:ea typeface="나눔고딕코딩"/>
-                <a:cs typeface="나눔고딕코딩"/>
+                <a:latin typeface="D2Coding"/>
+                <a:ea typeface="D2Coding"/>
+                <a:cs typeface="D2Coding"/>
               </a:rPr>
               <a:t>[</a:t>
             </a:r>
@@ -41903,9 +41903,9 @@
                 <a:solidFill>
                   <a:srgbClr val="FFB08A"/>
                 </a:solidFill>
-                <a:latin typeface="나눔고딕코딩"/>
-                <a:ea typeface="나눔고딕코딩"/>
-                <a:cs typeface="나눔고딕코딩"/>
+                <a:latin typeface="D2Coding"/>
+                <a:ea typeface="D2Coding"/>
+                <a:cs typeface="D2Coding"/>
               </a:rPr>
               <a:t>0</a:t>
             </a:r>
@@ -41914,9 +41914,9 @@
                 <a:solidFill>
                   <a:srgbClr val="E6EAF2"/>
                 </a:solidFill>
-                <a:latin typeface="나눔고딕코딩"/>
-                <a:ea typeface="나눔고딕코딩"/>
-                <a:cs typeface="나눔고딕코딩"/>
+                <a:latin typeface="D2Coding"/>
+                <a:ea typeface="D2Coding"/>
+                <a:cs typeface="D2Coding"/>
               </a:rPr>
               <a:t>].</a:t>
             </a:r>
@@ -41925,9 +41925,9 @@
                 <a:solidFill>
                   <a:srgbClr val="E6EAF2"/>
                 </a:solidFill>
-                <a:latin typeface="나눔고딕코딩"/>
-                <a:ea typeface="나눔고딕코딩"/>
-                <a:cs typeface="나눔고딕코딩"/>
+                <a:latin typeface="D2Coding"/>
+                <a:ea typeface="D2Coding"/>
+                <a:cs typeface="D2Coding"/>
               </a:rPr>
               <a:t>cnt</a:t>
             </a:r>
@@ -41936,9 +41936,9 @@
                 <a:solidFill>
                   <a:srgbClr val="E6EAF2"/>
                 </a:solidFill>
-                <a:latin typeface="나눔고딕코딩"/>
-                <a:ea typeface="나눔고딕코딩"/>
-                <a:cs typeface="나눔고딕코딩"/>
+                <a:latin typeface="D2Coding"/>
+                <a:ea typeface="D2Coding"/>
+                <a:cs typeface="D2Coding"/>
               </a:rPr>
               <a:t>);   </a:t>
             </a:r>
@@ -41947,9 +41947,9 @@
                 <a:solidFill>
                   <a:srgbClr val="8F9DB5"/>
                 </a:solidFill>
-                <a:latin typeface="나눔고딕코딩"/>
-                <a:ea typeface="나눔고딕코딩"/>
-                <a:cs typeface="나눔고딕코딩"/>
+                <a:latin typeface="D2Coding"/>
+                <a:ea typeface="D2Coding"/>
+                <a:cs typeface="D2Coding"/>
               </a:rPr>
               <a:t>// 상품 수: 10</a:t>
             </a:r>
@@ -41965,9 +41965,9 @@
                 <a:solidFill>
                   <a:srgbClr val="E6EAF2"/>
                 </a:solidFill>
-                <a:latin typeface="나눔고딕코딩"/>
-                <a:ea typeface="나눔고딕코딩"/>
-                <a:cs typeface="나눔고딕코딩"/>
+                <a:latin typeface="D2Coding"/>
+                <a:ea typeface="D2Coding"/>
+                <a:cs typeface="D2Coding"/>
               </a:rPr>
               <a:t/>
             </a:r>
@@ -41983,9 +41983,9 @@
                 <a:solidFill>
                   <a:srgbClr val="E6EAF2"/>
                 </a:solidFill>
-                <a:latin typeface="나눔고딕코딩"/>
-                <a:ea typeface="나눔고딕코딩"/>
-                <a:cs typeface="나눔고딕코딩"/>
+                <a:latin typeface="D2Coding"/>
+                <a:ea typeface="D2Coding"/>
+                <a:cs typeface="D2Coding"/>
               </a:rPr>
               <a:t>  </a:t>
             </a:r>
@@ -41994,9 +41994,9 @@
                 <a:solidFill>
                   <a:srgbClr val="D9A7FF"/>
                 </a:solidFill>
-                <a:latin typeface="나눔고딕코딩"/>
-                <a:ea typeface="나눔고딕코딩"/>
-                <a:cs typeface="나눔고딕코딩"/>
+                <a:latin typeface="D2Coding"/>
+                <a:ea typeface="D2Coding"/>
+                <a:cs typeface="D2Coding"/>
               </a:rPr>
               <a:t>await</a:t>
             </a:r>
@@ -42005,9 +42005,9 @@
                 <a:solidFill>
                   <a:srgbClr val="E6EAF2"/>
                 </a:solidFill>
-                <a:latin typeface="나눔고딕코딩"/>
-                <a:ea typeface="나눔고딕코딩"/>
-                <a:cs typeface="나눔고딕코딩"/>
+                <a:latin typeface="D2Coding"/>
+                <a:ea typeface="D2Coding"/>
+                <a:cs typeface="D2Coding"/>
               </a:rPr>
               <a:t> </a:t>
             </a:r>
@@ -42016,9 +42016,9 @@
                 <a:solidFill>
                   <a:srgbClr val="E6EAF2"/>
                 </a:solidFill>
-                <a:latin typeface="나눔고딕코딩"/>
-                <a:ea typeface="나눔고딕코딩"/>
-                <a:cs typeface="나눔고딕코딩"/>
+                <a:latin typeface="D2Coding"/>
+                <a:ea typeface="D2Coding"/>
+                <a:cs typeface="D2Coding"/>
               </a:rPr>
               <a:t>conn</a:t>
             </a:r>
@@ -42027,9 +42027,9 @@
                 <a:solidFill>
                   <a:srgbClr val="E6EAF2"/>
                 </a:solidFill>
-                <a:latin typeface="나눔고딕코딩"/>
-                <a:ea typeface="나눔고딕코딩"/>
-                <a:cs typeface="나눔고딕코딩"/>
+                <a:latin typeface="D2Coding"/>
+                <a:ea typeface="D2Coding"/>
+                <a:cs typeface="D2Coding"/>
               </a:rPr>
               <a:t>.</a:t>
             </a:r>
@@ -42038,9 +42038,9 @@
                 <a:solidFill>
                   <a:srgbClr val="E6EAF2"/>
                 </a:solidFill>
-                <a:latin typeface="나눔고딕코딩"/>
-                <a:ea typeface="나눔고딕코딩"/>
-                <a:cs typeface="나눔고딕코딩"/>
+                <a:latin typeface="D2Coding"/>
+                <a:ea typeface="D2Coding"/>
+                <a:cs typeface="D2Coding"/>
               </a:rPr>
               <a:t>end</a:t>
             </a:r>
@@ -42049,9 +42049,9 @@
                 <a:solidFill>
                   <a:srgbClr val="E6EAF2"/>
                 </a:solidFill>
-                <a:latin typeface="나눔고딕코딩"/>
-                <a:ea typeface="나눔고딕코딩"/>
-                <a:cs typeface="나눔고딕코딩"/>
+                <a:latin typeface="D2Coding"/>
+                <a:ea typeface="D2Coding"/>
+                <a:cs typeface="D2Coding"/>
               </a:rPr>
               <a:t>();</a:t>
             </a:r>
@@ -42067,9 +42067,9 @@
                 <a:solidFill>
                   <a:srgbClr val="E6EAF2"/>
                 </a:solidFill>
-                <a:latin typeface="나눔고딕코딩"/>
-                <a:ea typeface="나눔고딕코딩"/>
-                <a:cs typeface="나눔고딕코딩"/>
+                <a:latin typeface="D2Coding"/>
+                <a:ea typeface="D2Coding"/>
+                <a:cs typeface="D2Coding"/>
               </a:rPr>
               <a:t>}</a:t>
             </a:r>
@@ -42085,9 +42085,9 @@
                 <a:solidFill>
                   <a:srgbClr val="E6EAF2"/>
                 </a:solidFill>
-                <a:latin typeface="나눔고딕코딩"/>
-                <a:ea typeface="나눔고딕코딩"/>
-                <a:cs typeface="나눔고딕코딩"/>
+                <a:latin typeface="D2Coding"/>
+                <a:ea typeface="D2Coding"/>
+                <a:cs typeface="D2Coding"/>
               </a:rPr>
               <a:t/>
             </a:r>
@@ -42103,9 +42103,9 @@
                 <a:solidFill>
                   <a:srgbClr val="E6EAF2"/>
                 </a:solidFill>
-                <a:latin typeface="나눔고딕코딩"/>
-                <a:ea typeface="나눔고딕코딩"/>
-                <a:cs typeface="나눔고딕코딩"/>
+                <a:latin typeface="D2Coding"/>
+                <a:ea typeface="D2Coding"/>
+                <a:cs typeface="D2Coding"/>
               </a:rPr>
               <a:t>main</a:t>
             </a:r>
@@ -42114,9 +42114,9 @@
                 <a:solidFill>
                   <a:srgbClr val="E6EAF2"/>
                 </a:solidFill>
-                <a:latin typeface="나눔고딕코딩"/>
-                <a:ea typeface="나눔고딕코딩"/>
-                <a:cs typeface="나눔고딕코딩"/>
+                <a:latin typeface="D2Coding"/>
+                <a:ea typeface="D2Coding"/>
+                <a:cs typeface="D2Coding"/>
               </a:rPr>
               <a:t>();</a:t>
             </a:r>
